--- a/batch00_React/materials/WebApp_Fundamentals.pptx
+++ b/batch00_React/materials/WebApp_Fundamentals.pptx
@@ -4,6 +4,9 @@
   <p:sldMasterIdLst>
     <p:sldMasterId id="2147483648" r:id="rId1"/>
   </p:sldMasterIdLst>
+  <p:notesMasterIdLst>
+    <p:notesMasterId r:id="rId25"/>
+  </p:notesMasterIdLst>
   <p:sldIdLst>
     <p:sldId id="256" r:id="rId2"/>
     <p:sldId id="257" r:id="rId3"/>
@@ -29,10 +32,7 @@
     <p:sldId id="277" r:id="rId23"/>
     <p:sldId id="278" r:id="rId24"/>
   </p:sldIdLst>
-  <p:notesMasterIdLst>
-    <p:notesMasterId r:id="rId25"/>
-  </p:notesMasterIdLst>
-  <p:sldSz cx="9144000" cy="5143500"/>
+  <p:sldSz cx="9144000" cy="5143500" type="screen16x9"/>
   <p:notesSz cx="5143500" cy="9144000"/>
   <p:defaultTextStyle>
     <a:lvl1pPr marL="0" algn="l" defTabSz="914400" rtl="0" eaLnBrk="1" latinLnBrk="0" hangingPunct="1">
@@ -126,6 +126,11 @@
       </a:defRPr>
     </a:lvl9pPr>
   </p:defaultTextStyle>
+  <p:extLst>
+    <p:ext uri="{EFAFB233-063F-42B5-8137-9DF3F51BA10A}">
+      <p15:sldGuideLst xmlns:p15="http://schemas.microsoft.com/office/powerpoint/2012/main"/>
+    </p:ext>
+  </p:extLst>
 </p:presentation>
 </file>
 
@@ -151,234 +156,10 @@
           <a:chExt cx="0" cy="0"/>
         </a:xfrm>
       </p:grpSpPr>
-      <p:sp>
-        <p:nvSpPr>
-          <p:cNvPr id="2" name="Header Placeholder 1"/>
-          <p:cNvSpPr>
-            <a:spLocks noGrp="1"/>
-          </p:cNvSpPr>
-          <p:nvPr>
-            <p:ph type="hdr" sz="quarter"/>
-          </p:nvPr>
-        </p:nvSpPr>
-        <p:spPr>
-          <a:xfrm>
-            <a:off x="0" y="0"/>
-            <a:ext cx="2971800" cy="458788"/>
-          </a:xfrm>
-          <a:prstGeom prst="rect">
-            <a:avLst/>
-          </a:prstGeom>
-        </p:spPr>
-        <p:txBody>
-          <a:bodyPr vert="horz" lIns="91440" tIns="45720" rIns="91440" bIns="45720" rtlCol="0"/>
-          <a:lstStyle>
-            <a:lvl1pPr algn="l">
-              <a:defRPr sz="1200"/>
-            </a:lvl1pPr>
-          </a:lstStyle>
-          <a:p>
-            <a:endParaRPr lang="en-US"/>
-          </a:p>
-        </p:txBody>
-      </p:sp>
-      <p:sp>
-        <p:nvSpPr>
-          <p:cNvPr id="3" name="Date Placeholder 2"/>
-          <p:cNvSpPr>
-            <a:spLocks noGrp="1"/>
-          </p:cNvSpPr>
-          <p:nvPr>
-            <p:ph type="dt" idx="1"/>
-          </p:nvPr>
-        </p:nvSpPr>
-        <p:spPr>
-          <a:xfrm>
-            <a:off x="3884613" y="0"/>
-            <a:ext cx="2971800" cy="458788"/>
-          </a:xfrm>
-          <a:prstGeom prst="rect">
-            <a:avLst/>
-          </a:prstGeom>
-        </p:spPr>
-        <p:txBody>
-          <a:bodyPr vert="horz" lIns="91440" tIns="45720" rIns="91440" bIns="45720" rtlCol="0"/>
-          <a:lstStyle>
-            <a:lvl1pPr algn="r">
-              <a:defRPr sz="1200"/>
-            </a:lvl1pPr>
-          </a:lstStyle>
-          <a:p>
-            <a:fld id="{5282F153-3F37-0F45-9E97-73ACFA13230C}" type="datetimeFigureOut">
-              <a:rPr lang="en-US"/>
-              <a:t>7/23/19</a:t>
-            </a:fld>
-            <a:endParaRPr lang="en-US"/>
-          </a:p>
-        </p:txBody>
-      </p:sp>
-      <p:sp>
-        <p:nvSpPr>
-          <p:cNvPr id="4" name="Slide Image Placeholder 3"/>
-          <p:cNvSpPr>
-            <a:spLocks noGrp="1" noRot="1" noChangeAspect="1"/>
-          </p:cNvSpPr>
-          <p:nvPr>
-            <p:ph type="sldImg" idx="2"/>
-          </p:nvPr>
-        </p:nvSpPr>
-        <p:spPr>
-          <a:xfrm>
-            <a:off x="685800" y="1143000"/>
-            <a:ext cx="5486400" cy="3086100"/>
-          </a:xfrm>
-          <a:prstGeom prst="rect">
-            <a:avLst/>
-          </a:prstGeom>
-          <a:noFill/>
-          <a:ln w="12700">
-            <a:solidFill>
-              <a:prstClr val="black"/>
-            </a:solidFill>
-          </a:ln>
-        </p:spPr>
-        <p:txBody>
-          <a:bodyPr vert="horz" lIns="91440" tIns="45720" rIns="91440" bIns="45720" rtlCol="0" anchor="ctr"/>
-          <a:lstStyle/>
-          <a:p>
-            <a:endParaRPr lang="en-US"/>
-          </a:p>
-        </p:txBody>
-      </p:sp>
-      <p:sp>
-        <p:nvSpPr>
-          <p:cNvPr id="5" name="Notes Placeholder 4"/>
-          <p:cNvSpPr>
-            <a:spLocks noGrp="1"/>
-          </p:cNvSpPr>
-          <p:nvPr>
-            <p:ph type="body" sz="quarter" idx="3"/>
-          </p:nvPr>
-        </p:nvSpPr>
-        <p:spPr>
-          <a:xfrm>
-            <a:off x="685800" y="4400550"/>
-            <a:ext cx="5486400" cy="3600450"/>
-          </a:xfrm>
-          <a:prstGeom prst="rect">
-            <a:avLst/>
-          </a:prstGeom>
-        </p:spPr>
-        <p:txBody>
-          <a:bodyPr vert="horz" lIns="91440" tIns="45720" rIns="91440" bIns="45720" rtlCol="0"/>
-          <a:lstStyle/>
-          <a:p>
-            <a:pPr lvl="0"/>
-            <a:r>
-              <a:rPr lang="en-US"/>
-              <a:t>Click to edit Master text styles</a:t>
-            </a:r>
-          </a:p>
-          <a:p>
-            <a:pPr lvl="1"/>
-            <a:r>
-              <a:rPr lang="en-US"/>
-              <a:t>Second level</a:t>
-            </a:r>
-          </a:p>
-          <a:p>
-            <a:pPr lvl="2"/>
-            <a:r>
-              <a:rPr lang="en-US"/>
-              <a:t>Third level</a:t>
-            </a:r>
-          </a:p>
-          <a:p>
-            <a:pPr lvl="3"/>
-            <a:r>
-              <a:rPr lang="en-US"/>
-              <a:t>Fourth level</a:t>
-            </a:r>
-          </a:p>
-          <a:p>
-            <a:pPr lvl="4"/>
-            <a:r>
-              <a:rPr lang="en-US"/>
-              <a:t>Fifth level</a:t>
-            </a:r>
-          </a:p>
-        </p:txBody>
-      </p:sp>
-      <p:sp>
-        <p:nvSpPr>
-          <p:cNvPr id="6" name="Footer Placeholder 5"/>
-          <p:cNvSpPr>
-            <a:spLocks noGrp="1"/>
-          </p:cNvSpPr>
-          <p:nvPr>
-            <p:ph type="ftr" sz="quarter" idx="4"/>
-          </p:nvPr>
-        </p:nvSpPr>
-        <p:spPr>
-          <a:xfrm>
-            <a:off x="0" y="8685213"/>
-            <a:ext cx="2971800" cy="458787"/>
-          </a:xfrm>
-          <a:prstGeom prst="rect">
-            <a:avLst/>
-          </a:prstGeom>
-        </p:spPr>
-        <p:txBody>
-          <a:bodyPr vert="horz" lIns="91440" tIns="45720" rIns="91440" bIns="45720" rtlCol="0" anchor="b"/>
-          <a:lstStyle>
-            <a:lvl1pPr algn="l">
-              <a:defRPr sz="1200"/>
-            </a:lvl1pPr>
-          </a:lstStyle>
-          <a:p>
-            <a:endParaRPr lang="en-US"/>
-          </a:p>
-        </p:txBody>
-      </p:sp>
-      <p:sp>
-        <p:nvSpPr>
-          <p:cNvPr id="7" name="Slide Number Placeholder 6"/>
-          <p:cNvSpPr>
-            <a:spLocks noGrp="1"/>
-          </p:cNvSpPr>
-          <p:nvPr>
-            <p:ph type="sldNum" sz="quarter" idx="5"/>
-          </p:nvPr>
-        </p:nvSpPr>
-        <p:spPr>
-          <a:xfrm>
-            <a:off x="3884613" y="8685213"/>
-            <a:ext cx="2971800" cy="458787"/>
-          </a:xfrm>
-          <a:prstGeom prst="rect">
-            <a:avLst/>
-          </a:prstGeom>
-        </p:spPr>
-        <p:txBody>
-          <a:bodyPr vert="horz" lIns="91440" tIns="45720" rIns="91440" bIns="45720" rtlCol="0" anchor="b"/>
-          <a:lstStyle>
-            <a:lvl1pPr algn="r">
-              <a:defRPr sz="1200"/>
-            </a:lvl1pPr>
-          </a:lstStyle>
-          <a:p>
-            <a:fld id="{CE5E9CC1-C706-0F49-92D6-E571CC5EEA8F}" type="slidenum">
-              <a:rPr lang="en-US"/>
-              <a:t>‹#›</a:t>
-            </a:fld>
-            <a:endParaRPr lang="en-US"/>
-          </a:p>
-        </p:txBody>
-      </p:sp>
     </p:spTree>
     <p:extLst>
       <p:ext uri="{BB962C8B-B14F-4D97-AF65-F5344CB8AC3E}">
-        <p14:creationId xmlns:p14="http://schemas.microsoft.com/office/powerpoint/2010/main" val="1024086991"/>
+        <p14:creationId xmlns:p14="http://schemas.microsoft.com/office/powerpoint/2010/main" val="2097768124"/>
       </p:ext>
     </p:extLst>
   </p:cSld>
@@ -526,7 +307,6 @@
               <a:rPr lang="en-US" dirty="0"/>
               <a:t>Welcome everyone! Today we'll go on a journey to understand how web applications actually work — from the moment you type a URL to seeing a page on your screen. No prior deep knowledge needed. Just curiosity!</a:t>
             </a:r>
-            <a:endParaRPr lang="en-US" dirty="0"/>
           </a:p>
         </p:txBody>
       </p:sp>
@@ -614,7 +394,6 @@
               <a:rPr lang="en-US" dirty="0"/>
               <a:t>Microservices = split the monolith into small, independent services. Like Amazon: User Service handles accounts, Order Service handles purchases, Payment Service handles billing — each can be updated/scaled independently. Netflix runs 700+ microservices! This is the modern industry standard for large apps.</a:t>
             </a:r>
-            <a:endParaRPr lang="en-US" dirty="0"/>
           </a:p>
         </p:txBody>
       </p:sp>
@@ -702,7 +481,6 @@
               <a:rPr lang="en-US" dirty="0"/>
               <a:t>Load balancing is why Amazon doesn't crash during Prime Day with millions of users shopping at once. Instead of one server dying, multiple servers share the load. The load balancer is the traffic cop. If one server fails, the balancer stops sending traffic to it automatically — users don't even notice.</a:t>
             </a:r>
-            <a:endParaRPr lang="en-US" dirty="0"/>
           </a:p>
         </p:txBody>
       </p:sp>
@@ -790,7 +568,6 @@
               <a:rPr lang="en-US" dirty="0"/>
               <a:t>API = a contract between two systems. You don't need to know how Google Maps works internally — you just call their API and get map data. APIs are everywhere: your weather app uses a Weather API, Ola uses Maps API, Zomato uses Restaurant APIs. They're the glue connecting the digital world.</a:t>
             </a:r>
-            <a:endParaRPr lang="en-US" dirty="0"/>
           </a:p>
         </p:txBody>
       </p:sp>
@@ -878,7 +655,6 @@
               <a:rPr lang="en-US" dirty="0"/>
               <a:t>REST is an architectural style (not a technology) for building APIs over HTTP. Think of it as a set of rules: every resource has a URL (/users, /products), you use verbs to act on them (GET, POST, DELETE), and requests are stateless (no memory of previous calls). It's the most popular API style in the industry today.</a:t>
             </a:r>
-            <a:endParaRPr lang="en-US" dirty="0"/>
           </a:p>
         </p:txBody>
       </p:sp>
@@ -966,7 +742,6 @@
               <a:rPr lang="en-US" dirty="0"/>
               <a:t>CRUD = Create, Read, Update, Delete — these are the four basic operations of any data-driven system. REST maps each to an HTTP verb. Memory trick: GET = Go get it, POST = Post a new letter, PUT = Put it in the right place, DELETE = Delete it. Every API you use follows this pattern.</a:t>
             </a:r>
-            <a:endParaRPr lang="en-US" dirty="0"/>
           </a:p>
         </p:txBody>
       </p:sp>
@@ -1054,7 +829,6 @@
               <a:rPr lang="en-US" dirty="0"/>
               <a:t>Status codes are like the server's way of texting back. '200 OK' = everything worked. '404 Not Found' = the page you're looking for doesn't exist (like a wrong address). '500 Internal Server Error' = the server itself broke. You've seen 404 pages on websites — now you know what that code means!</a:t>
             </a:r>
-            <a:endParaRPr lang="en-US" dirty="0"/>
           </a:p>
         </p:txBody>
       </p:sp>
@@ -1142,7 +916,6 @@
               <a:rPr lang="en-US" dirty="0"/>
               <a:t>The frontend collects data (like a login form), sends a JSON request to the backend via HTTP. The backend (your Java Spring Boot service) validates the data, queries the database, then sends back a JSON response. The frontend then reads that response and updates what the user sees. This 3-tier cycle is the backbone of every web app.</a:t>
             </a:r>
-            <a:endParaRPr lang="en-US" dirty="0"/>
           </a:p>
         </p:txBody>
       </p:sp>
@@ -1230,7 +1003,6 @@
               <a:rPr lang="en-US" dirty="0"/>
               <a:t>HTML is the skeleton — the structure. CSS is the skin and clothes — makes it look good. JavaScript is the brain and muscles — makes it move and react. Every website you've ever visited is built with these three. Modern frameworks like React (JS) and Tailwind (CSS) are built on top of these basics.</a:t>
             </a:r>
-            <a:endParaRPr lang="en-US" dirty="0"/>
           </a:p>
         </p:txBody>
       </p:sp>
@@ -1318,7 +1090,6 @@
               <a:rPr lang="en-US" dirty="0"/>
               <a:t>This is the full picture! The user's browser sends a request, it hits a CDN for static files, then the Load Balancer routes it to one of the App Servers. The App Server queries the Database. Supporting services like Cache (Redis), Message Queue, and Email run in the background. Monitoring watches everything 24/7.</a:t>
             </a:r>
-            <a:endParaRPr lang="en-US" dirty="0"/>
           </a:p>
         </p:txBody>
       </p:sp>
@@ -1406,7 +1177,6 @@
               <a:rPr lang="en-US" dirty="0"/>
               <a:t>This 8-step flow happens every time you visit a website. The whole cycle typically completes in 200-500ms. Step 1-2 is network-level, 3-5 is the server, 6 is database, 7-8 is the return journey. When Google serves results in under 200ms, they've optimised every single one of these steps.</a:t>
             </a:r>
-            <a:endParaRPr lang="en-US" dirty="0"/>
           </a:p>
         </p:txBody>
       </p:sp>
@@ -1494,7 +1264,6 @@
               <a:rPr lang="en-US" dirty="0"/>
               <a:t>Here's our agenda. We'll go through 8 major topics, each building on the previous. Think of it like building a house — foundation first, then walls, then the roof. Each module is about 5–7 minutes.</a:t>
             </a:r>
-            <a:endParaRPr lang="en-US" dirty="0"/>
           </a:p>
         </p:txBody>
       </p:sp>
@@ -1582,7 +1351,6 @@
               <a:rPr lang="en-US" dirty="0"/>
               <a:t>This is the exact flow that runs when you log in to ANY modern web app — Gmail, LinkedIn, your bank. Notice: passwords are NEVER stored in plain text (they're hashed). JWT tokens are used to keep you logged in without re-entering passwords every page. This is industry-standard authentication.</a:t>
             </a:r>
-            <a:endParaRPr lang="en-US" dirty="0"/>
           </a:p>
         </p:txBody>
       </p:sp>
@@ -1670,7 +1438,6 @@
               <a:rPr lang="en-US" dirty="0"/>
               <a:t>Use this slide as a quick cheatsheet. Each term appears constantly in industry. If you remember just these 10 concepts, you have a solid foundation to build upon. In interviews, being able to explain these with examples (like I've shown today) will impress any interviewer.</a:t>
             </a:r>
-            <a:endParaRPr lang="en-US" dirty="0"/>
           </a:p>
         </p:txBody>
       </p:sp>
@@ -1758,7 +1525,6 @@
               <a:rPr lang="en-US" dirty="0"/>
               <a:t>Learning is a journey. Start with the basics — don't jump straight to Kubernetes! Build a simple to-do app, then add a login system, then a database. Each project teaches you more than any course. Roadmap.sh has great visual learning paths for Backend, Frontend, and DevOps. Check it out after this session!</a:t>
             </a:r>
-            <a:endParaRPr lang="en-US" dirty="0"/>
           </a:p>
         </p:txBody>
       </p:sp>
@@ -1846,7 +1612,6 @@
               <a:rPr lang="en-US" dirty="0"/>
               <a:t>Great session! Encourage questions using the three prompts on screen. These are designed to check understanding at different levels. Good sign-off question: Ask each student to explain ONE thing they learned to the person next to them — peer teaching is the fastest way to solidify knowledge.</a:t>
             </a:r>
-            <a:endParaRPr lang="en-US" dirty="0"/>
           </a:p>
         </p:txBody>
       </p:sp>
@@ -1934,7 +1699,6 @@
               <a:rPr lang="en-US" dirty="0"/>
               <a:t>Explain: A regular website is like a brochure — it just displays info. A web application is interactive: you log in, it knows who you are, it shows YOU your data. Examples: Gmail shows YOUR emails, Amazon shows YOUR cart. These run in a browser but behave like full-fledged applications.</a:t>
             </a:r>
-            <a:endParaRPr lang="en-US" dirty="0"/>
           </a:p>
         </p:txBody>
       </p:sp>
@@ -2022,7 +1786,6 @@
               <a:rPr lang="en-US" dirty="0"/>
               <a:t>Website: Think of a newspaper online. You read it but can't change what others see. Web App: Think of a bank account. You log in, see YOUR balance, and can transfer money. The key difference is INTERACTIVITY and PERSONALIZATION.</a:t>
             </a:r>
-            <a:endParaRPr lang="en-US" dirty="0"/>
           </a:p>
         </p:txBody>
       </p:sp>
@@ -2110,7 +1873,6 @@
               <a:rPr lang="en-US" dirty="0"/>
               <a:t>Analogy: When you order pizza — you call a number (DNS lookup), they find your address (IP), send a delivery person (HTTP request), and you get pizza (response). The internet works the same way! Your browser is constantly having mini-conversations with servers.</a:t>
             </a:r>
-            <a:endParaRPr lang="en-US" dirty="0"/>
           </a:p>
         </p:txBody>
       </p:sp>
@@ -2198,7 +1960,6 @@
               <a:rPr lang="en-US" dirty="0"/>
               <a:t>Client = the person asking (your browser). Server = the one who does the work and answers. This is like a restaurant: you (client) place an order (request), kitchen (server) cooks it and sends back food (response). They communicate over the internet using HTTP protocol.</a:t>
             </a:r>
-            <a:endParaRPr lang="en-US" dirty="0"/>
           </a:p>
         </p:txBody>
       </p:sp>
@@ -2286,7 +2047,6 @@
               <a:rPr lang="en-US" dirty="0"/>
               <a:t>Every time you click a button or visit a page, this 9-step dance happens in milliseconds. Step 1-5 is the REQUEST journey. Step 6-9 is the RESPONSE journey back. The browser then paints what the server sent. This is the heartbeat of every web app!</a:t>
             </a:r>
-            <a:endParaRPr lang="en-US" dirty="0"/>
           </a:p>
         </p:txBody>
       </p:sp>
@@ -2374,7 +2134,6 @@
               <a:rPr lang="en-US" dirty="0"/>
               <a:t>A server isn't magic — it's just a computer with one job: wait for requests and respond. What makes it different from your laptop? It runs 24/7, has high memory and processing power, and is connected to the internet with high-speed links. Cloud servers are virtual servers rented from AWS, Azure, etc.</a:t>
             </a:r>
-            <a:endParaRPr lang="en-US" dirty="0"/>
           </a:p>
         </p:txBody>
       </p:sp>
@@ -2462,7 +2221,6 @@
               <a:rPr lang="en-US" dirty="0"/>
               <a:t>Monolithic = one big app where all features are bundled together. Think of early-stage startups — they usually start with a monolith because it's fast to build. The problem comes at scale: if the Payments module crashes, the whole app goes down. Netflix and Amazon started as monoliths before splitting into microservices.</a:t>
             </a:r>
-            <a:endParaRPr lang="en-US" dirty="0"/>
           </a:p>
         </p:txBody>
       </p:sp>
@@ -2535,6 +2293,11 @@
 <file path=ppt/slideMasters/slideMaster1.xml><?xml version="1.0" encoding="utf-8"?>
 <p:sldMaster xmlns:a="http://schemas.openxmlformats.org/drawingml/2006/main" xmlns:r="http://schemas.openxmlformats.org/officeDocument/2006/relationships" xmlns:p="http://schemas.openxmlformats.org/presentationml/2006/main">
   <p:cSld>
+    <p:bg>
+      <p:bgRef idx="1001">
+        <a:schemeClr val="bg1"/>
+      </p:bgRef>
+    </p:bg>
     <p:spTree>
       <p:nvGrpSpPr>
         <p:cNvPr id="1" name=""/>
@@ -2817,6 +2580,7 @@
         <a:solidFill>
           <a:srgbClr val="0D1B2A"/>
         </a:solidFill>
+        <a:effectLst/>
       </p:bgPr>
     </p:bg>
     <p:spTree>
@@ -2954,7 +2718,7 @@
           <a:bodyPr wrap="square" lIns="0" tIns="0" rIns="0" bIns="0" rtlCol="0" anchor="ctr"/>
           <a:lstStyle/>
           <a:p>
-            <a:pPr indent="0" marL="0">
+            <a:pPr marL="0" indent="0">
               <a:buNone/>
             </a:pPr>
             <a:r>
@@ -2993,7 +2757,7 @@
           <a:bodyPr wrap="square" lIns="0" tIns="0" rIns="0" bIns="0" rtlCol="0" anchor="ctr"/>
           <a:lstStyle/>
           <a:p>
-            <a:pPr indent="0" marL="0">
+            <a:pPr marL="0" indent="0">
               <a:buNone/>
             </a:pPr>
             <a:r>
@@ -3032,7 +2796,7 @@
           <a:bodyPr wrap="square" lIns="0" tIns="0" rIns="0" bIns="0" rtlCol="0" anchor="ctr"/>
           <a:lstStyle/>
           <a:p>
-            <a:pPr indent="0" marL="0">
+            <a:pPr marL="0" indent="0">
               <a:buNone/>
             </a:pPr>
             <a:r>
@@ -3071,7 +2835,7 @@
           <a:bodyPr wrap="square" lIns="0" tIns="0" rIns="0" bIns="0" rtlCol="0" anchor="ctr"/>
           <a:lstStyle/>
           <a:p>
-            <a:pPr indent="0" marL="0">
+            <a:pPr marL="0" indent="0">
               <a:buNone/>
             </a:pPr>
             <a:r>
@@ -3137,7 +2901,7 @@
           <a:bodyPr wrap="square" lIns="0" tIns="0" rIns="0" bIns="0" rtlCol="0" anchor="ctr"/>
           <a:lstStyle/>
           <a:p>
-            <a:pPr algn="ctr" indent="0" marL="0">
+            <a:pPr marL="0" indent="0" algn="ctr">
               <a:buNone/>
             </a:pPr>
             <a:r>
@@ -3203,7 +2967,7 @@
           <a:bodyPr wrap="square" lIns="0" tIns="0" rIns="0" bIns="0" rtlCol="0" anchor="ctr"/>
           <a:lstStyle/>
           <a:p>
-            <a:pPr algn="ctr" indent="0" marL="0">
+            <a:pPr marL="0" indent="0" algn="ctr">
               <a:buNone/>
             </a:pPr>
             <a:r>
@@ -3269,7 +3033,7 @@
           <a:bodyPr wrap="square" lIns="0" tIns="0" rIns="0" bIns="0" rtlCol="0" anchor="ctr"/>
           <a:lstStyle/>
           <a:p>
-            <a:pPr algn="ctr" indent="0" marL="0">
+            <a:pPr marL="0" indent="0" algn="ctr">
               <a:buNone/>
             </a:pPr>
             <a:r>
@@ -3335,7 +3099,7 @@
           <a:bodyPr wrap="square" lIns="0" tIns="0" rIns="0" bIns="0" rtlCol="0" anchor="ctr"/>
           <a:lstStyle/>
           <a:p>
-            <a:pPr algn="ctr" indent="0" marL="0">
+            <a:pPr marL="0" indent="0" algn="ctr">
               <a:buNone/>
             </a:pPr>
             <a:r>
@@ -3399,7 +3163,7 @@
           <a:bodyPr wrap="square" lIns="0" tIns="0" rIns="0" bIns="0" rtlCol="0" anchor="ctr"/>
           <a:lstStyle/>
           <a:p>
-            <a:pPr algn="ctr" indent="0" marL="0">
+            <a:pPr marL="0" indent="0" algn="ctr">
               <a:buNone/>
             </a:pPr>
             <a:r>
@@ -3433,6 +3197,7 @@
         <a:solidFill>
           <a:srgbClr val="0D1B2A"/>
         </a:solidFill>
+        <a:effectLst/>
       </p:bgPr>
     </p:bg>
     <p:spTree>
@@ -3495,7 +3260,7 @@
           <a:bodyPr wrap="square" lIns="0" tIns="0" rIns="0" bIns="0" rtlCol="0" anchor="ctr"/>
           <a:lstStyle/>
           <a:p>
-            <a:pPr indent="0" marL="0">
+            <a:pPr marL="0" indent="0">
               <a:buNone/>
             </a:pPr>
             <a:r>
@@ -3534,7 +3299,7 @@
           <a:bodyPr wrap="square" lIns="0" tIns="0" rIns="0" bIns="0" rtlCol="0" anchor="ctr"/>
           <a:lstStyle/>
           <a:p>
-            <a:pPr indent="0" marL="0">
+            <a:pPr marL="0" indent="0">
               <a:buNone/>
             </a:pPr>
             <a:r>
@@ -3576,7 +3341,7 @@
             <a:prstDash val="solid"/>
           </a:ln>
           <a:effectLst>
-            <a:outerShdw sx="100000" sy="100000" kx="0" ky="0" algn="bl" rotWithShape="0" blurRad="101600" dist="38100" dir="8100000">
+            <a:outerShdw blurRad="101600" dist="38100" dir="8100000" algn="bl" rotWithShape="0">
               <a:srgbClr val="000000">
                 <a:alpha val="25000"/>
               </a:srgbClr>
@@ -3630,7 +3395,7 @@
           <a:bodyPr wrap="square" lIns="0" tIns="0" rIns="0" bIns="0" rtlCol="0" anchor="ctr"/>
           <a:lstStyle/>
           <a:p>
-            <a:pPr algn="ctr" indent="0" marL="0">
+            <a:pPr marL="0" indent="0" algn="ctr">
               <a:buNone/>
             </a:pPr>
             <a:r>
@@ -3672,7 +3437,7 @@
             <a:prstDash val="solid"/>
           </a:ln>
           <a:effectLst>
-            <a:outerShdw sx="100000" sy="100000" kx="0" ky="0" algn="bl" rotWithShape="0" blurRad="101600" dist="38100" dir="8100000">
+            <a:outerShdw blurRad="101600" dist="38100" dir="8100000" algn="bl" rotWithShape="0">
               <a:srgbClr val="000000">
                 <a:alpha val="25000"/>
               </a:srgbClr>
@@ -3726,7 +3491,7 @@
           <a:bodyPr wrap="square" lIns="0" tIns="0" rIns="0" bIns="0" rtlCol="0" anchor="ctr"/>
           <a:lstStyle/>
           <a:p>
-            <a:pPr algn="ctr" indent="0" marL="0">
+            <a:pPr marL="0" indent="0" algn="ctr">
               <a:buNone/>
             </a:pPr>
             <a:r>
@@ -3743,7 +3508,7 @@
             <a:endParaRPr lang="en-US" sz="1250" dirty="0"/>
           </a:p>
           <a:p>
-            <a:pPr algn="ctr" indent="0" marL="0">
+            <a:pPr marL="0" indent="0" algn="ctr">
               <a:buNone/>
             </a:pPr>
             <a:r>
@@ -3808,7 +3573,7 @@
             <a:prstDash val="solid"/>
           </a:ln>
           <a:effectLst>
-            <a:outerShdw sx="100000" sy="100000" kx="0" ky="0" algn="bl" rotWithShape="0" blurRad="101600" dist="38100" dir="8100000">
+            <a:outerShdw blurRad="101600" dist="38100" dir="8100000" algn="bl" rotWithShape="0">
               <a:srgbClr val="000000">
                 <a:alpha val="25000"/>
               </a:srgbClr>
@@ -3862,7 +3627,7 @@
           <a:bodyPr wrap="square" lIns="0" tIns="0" rIns="0" bIns="0" rtlCol="0" anchor="ctr"/>
           <a:lstStyle/>
           <a:p>
-            <a:pPr algn="ctr" indent="0" marL="0">
+            <a:pPr marL="0" indent="0" algn="ctr">
               <a:buNone/>
             </a:pPr>
             <a:r>
@@ -3879,7 +3644,7 @@
             <a:endParaRPr lang="en-US" sz="1250" dirty="0"/>
           </a:p>
           <a:p>
-            <a:pPr algn="ctr" indent="0" marL="0">
+            <a:pPr marL="0" indent="0" algn="ctr">
               <a:buNone/>
             </a:pPr>
             <a:r>
@@ -3944,7 +3709,7 @@
             <a:prstDash val="solid"/>
           </a:ln>
           <a:effectLst>
-            <a:outerShdw sx="100000" sy="100000" kx="0" ky="0" algn="bl" rotWithShape="0" blurRad="101600" dist="38100" dir="8100000">
+            <a:outerShdw blurRad="101600" dist="38100" dir="8100000" algn="bl" rotWithShape="0">
               <a:srgbClr val="000000">
                 <a:alpha val="25000"/>
               </a:srgbClr>
@@ -3998,7 +3763,7 @@
           <a:bodyPr wrap="square" lIns="0" tIns="0" rIns="0" bIns="0" rtlCol="0" anchor="ctr"/>
           <a:lstStyle/>
           <a:p>
-            <a:pPr algn="ctr" indent="0" marL="0">
+            <a:pPr marL="0" indent="0" algn="ctr">
               <a:buNone/>
             </a:pPr>
             <a:r>
@@ -4015,7 +3780,7 @@
             <a:endParaRPr lang="en-US" sz="1250" dirty="0"/>
           </a:p>
           <a:p>
-            <a:pPr algn="ctr" indent="0" marL="0">
+            <a:pPr marL="0" indent="0" algn="ctr">
               <a:buNone/>
             </a:pPr>
             <a:r>
@@ -4080,7 +3845,7 @@
             <a:prstDash val="solid"/>
           </a:ln>
           <a:effectLst>
-            <a:outerShdw sx="100000" sy="100000" kx="0" ky="0" algn="bl" rotWithShape="0" blurRad="101600" dist="38100" dir="8100000">
+            <a:outerShdw blurRad="101600" dist="38100" dir="8100000" algn="bl" rotWithShape="0">
               <a:srgbClr val="000000">
                 <a:alpha val="25000"/>
               </a:srgbClr>
@@ -4134,7 +3899,7 @@
           <a:bodyPr wrap="square" lIns="0" tIns="0" rIns="0" bIns="0" rtlCol="0" anchor="ctr"/>
           <a:lstStyle/>
           <a:p>
-            <a:pPr algn="ctr" indent="0" marL="0">
+            <a:pPr marL="0" indent="0" algn="ctr">
               <a:buNone/>
             </a:pPr>
             <a:r>
@@ -4151,7 +3916,7 @@
             <a:endParaRPr lang="en-US" sz="1250" dirty="0"/>
           </a:p>
           <a:p>
-            <a:pPr algn="ctr" indent="0" marL="0">
+            <a:pPr marL="0" indent="0" algn="ctr">
               <a:buNone/>
             </a:pPr>
             <a:r>
@@ -4216,7 +3981,7 @@
             <a:prstDash val="solid"/>
           </a:ln>
           <a:effectLst>
-            <a:outerShdw sx="100000" sy="100000" kx="0" ky="0" algn="bl" rotWithShape="0" blurRad="101600" dist="38100" dir="8100000">
+            <a:outerShdw blurRad="101600" dist="38100" dir="8100000" algn="bl" rotWithShape="0">
               <a:srgbClr val="000000">
                 <a:alpha val="25000"/>
               </a:srgbClr>
@@ -4270,7 +4035,7 @@
           <a:bodyPr wrap="square" lIns="0" tIns="0" rIns="0" bIns="0" rtlCol="0" anchor="ctr"/>
           <a:lstStyle/>
           <a:p>
-            <a:pPr algn="ctr" indent="0" marL="0">
+            <a:pPr marL="0" indent="0" algn="ctr">
               <a:buNone/>
             </a:pPr>
             <a:r>
@@ -4287,7 +4052,7 @@
             <a:endParaRPr lang="en-US" sz="1250" dirty="0"/>
           </a:p>
           <a:p>
-            <a:pPr algn="ctr" indent="0" marL="0">
+            <a:pPr marL="0" indent="0" algn="ctr">
               <a:buNone/>
             </a:pPr>
             <a:r>
@@ -4374,7 +4139,7 @@
           <a:bodyPr wrap="square" lIns="0" tIns="0" rIns="0" bIns="0" rtlCol="0" anchor="ctr"/>
           <a:lstStyle/>
           <a:p>
-            <a:pPr algn="ctr" indent="0" marL="0">
+            <a:pPr marL="0" indent="0" algn="ctr">
               <a:buNone/>
             </a:pPr>
             <a:r>
@@ -4461,7 +4226,7 @@
           <a:bodyPr wrap="square" lIns="0" tIns="0" rIns="0" bIns="0" rtlCol="0" anchor="ctr"/>
           <a:lstStyle/>
           <a:p>
-            <a:pPr algn="ctr" indent="0" marL="0">
+            <a:pPr marL="0" indent="0" algn="ctr">
               <a:buNone/>
             </a:pPr>
             <a:r>
@@ -4548,7 +4313,7 @@
           <a:bodyPr wrap="square" lIns="0" tIns="0" rIns="0" bIns="0" rtlCol="0" anchor="ctr"/>
           <a:lstStyle/>
           <a:p>
-            <a:pPr algn="ctr" indent="0" marL="0">
+            <a:pPr marL="0" indent="0" algn="ctr">
               <a:buNone/>
             </a:pPr>
             <a:r>
@@ -4635,7 +4400,7 @@
           <a:bodyPr wrap="square" lIns="0" tIns="0" rIns="0" bIns="0" rtlCol="0" anchor="ctr"/>
           <a:lstStyle/>
           <a:p>
-            <a:pPr algn="ctr" indent="0" marL="0">
+            <a:pPr marL="0" indent="0" algn="ctr">
               <a:buNone/>
             </a:pPr>
             <a:r>
@@ -4722,7 +4487,7 @@
           <a:bodyPr wrap="square" lIns="0" tIns="0" rIns="0" bIns="0" rtlCol="0" anchor="ctr"/>
           <a:lstStyle/>
           <a:p>
-            <a:pPr algn="ctr" indent="0" marL="0">
+            <a:pPr marL="0" indent="0" algn="ctr">
               <a:buNone/>
             </a:pPr>
             <a:r>
@@ -4787,7 +4552,7 @@
             <a:prstDash val="solid"/>
           </a:ln>
           <a:effectLst>
-            <a:outerShdw sx="100000" sy="100000" kx="0" ky="0" algn="bl" rotWithShape="0" blurRad="101600" dist="38100" dir="8100000">
+            <a:outerShdw blurRad="101600" dist="38100" dir="8100000" algn="bl" rotWithShape="0">
               <a:srgbClr val="000000">
                 <a:alpha val="25000"/>
               </a:srgbClr>
@@ -4816,7 +4581,7 @@
           <a:bodyPr wrap="square" lIns="0" tIns="0" rIns="0" bIns="0" rtlCol="0" anchor="ctr"/>
           <a:lstStyle/>
           <a:p>
-            <a:pPr indent="0" marL="0">
+            <a:pPr marL="0" indent="0">
               <a:buNone/>
             </a:pPr>
             <a:r>
@@ -4855,7 +4620,7 @@
           <a:bodyPr wrap="square" lIns="0" tIns="0" rIns="0" bIns="0" rtlCol="0" anchor="ctr"/>
           <a:lstStyle/>
           <a:p>
-            <a:pPr indent="0" marL="0">
+            <a:pPr marL="0" indent="0">
               <a:buNone/>
             </a:pPr>
             <a:r>
@@ -4894,7 +4659,7 @@
           <a:bodyPr wrap="square" lIns="0" tIns="0" rIns="0" bIns="0" rtlCol="0" anchor="ctr"/>
           <a:lstStyle/>
           <a:p>
-            <a:pPr indent="0" marL="0">
+            <a:pPr marL="0" indent="0">
               <a:buNone/>
             </a:pPr>
             <a:r>
@@ -4933,7 +4698,7 @@
           <a:bodyPr wrap="square" lIns="0" tIns="0" rIns="0" bIns="0" rtlCol="0" anchor="ctr"/>
           <a:lstStyle/>
           <a:p>
-            <a:pPr indent="0" marL="0">
+            <a:pPr marL="0" indent="0">
               <a:buNone/>
             </a:pPr>
             <a:r>
@@ -4975,7 +4740,7 @@
             <a:prstDash val="solid"/>
           </a:ln>
           <a:effectLst>
-            <a:outerShdw sx="100000" sy="100000" kx="0" ky="0" algn="bl" rotWithShape="0" blurRad="101600" dist="38100" dir="8100000">
+            <a:outerShdw blurRad="101600" dist="38100" dir="8100000" algn="bl" rotWithShape="0">
               <a:srgbClr val="000000">
                 <a:alpha val="25000"/>
               </a:srgbClr>
@@ -5004,7 +4769,7 @@
           <a:bodyPr wrap="square" lIns="0" tIns="0" rIns="0" bIns="0" rtlCol="0" anchor="ctr"/>
           <a:lstStyle/>
           <a:p>
-            <a:pPr indent="0" marL="0">
+            <a:pPr marL="0" indent="0">
               <a:buNone/>
             </a:pPr>
             <a:r>
@@ -5043,7 +4808,7 @@
           <a:bodyPr wrap="square" lIns="0" tIns="0" rIns="0" bIns="0" rtlCol="0" anchor="ctr"/>
           <a:lstStyle/>
           <a:p>
-            <a:pPr indent="0" marL="0">
+            <a:pPr marL="0" indent="0">
               <a:buNone/>
             </a:pPr>
             <a:r>
@@ -5082,7 +4847,7 @@
           <a:bodyPr wrap="square" lIns="0" tIns="0" rIns="0" bIns="0" rtlCol="0" anchor="ctr"/>
           <a:lstStyle/>
           <a:p>
-            <a:pPr indent="0" marL="0">
+            <a:pPr marL="0" indent="0">
               <a:buNone/>
             </a:pPr>
             <a:r>
@@ -5121,7 +4886,7 @@
           <a:bodyPr wrap="square" lIns="0" tIns="0" rIns="0" bIns="0" rtlCol="0" anchor="ctr"/>
           <a:lstStyle/>
           <a:p>
-            <a:pPr indent="0" marL="0">
+            <a:pPr marL="0" indent="0">
               <a:buNone/>
             </a:pPr>
             <a:r>
@@ -5155,6 +4920,7 @@
         <a:solidFill>
           <a:srgbClr val="0D1B2A"/>
         </a:solidFill>
+        <a:effectLst/>
       </p:bgPr>
     </p:bg>
     <p:spTree>
@@ -5217,7 +4983,7 @@
           <a:bodyPr wrap="square" lIns="0" tIns="0" rIns="0" bIns="0" rtlCol="0" anchor="ctr"/>
           <a:lstStyle/>
           <a:p>
-            <a:pPr indent="0" marL="0">
+            <a:pPr marL="0" indent="0">
               <a:buNone/>
             </a:pPr>
             <a:r>
@@ -5256,7 +5022,7 @@
           <a:bodyPr wrap="square" lIns="0" tIns="0" rIns="0" bIns="0" rtlCol="0" anchor="ctr"/>
           <a:lstStyle/>
           <a:p>
-            <a:pPr indent="0" marL="0">
+            <a:pPr marL="0" indent="0">
               <a:buNone/>
             </a:pPr>
             <a:r>
@@ -5295,7 +5061,7 @@
           <a:bodyPr wrap="square" lIns="0" tIns="0" rIns="0" bIns="0" rtlCol="0" anchor="ctr"/>
           <a:lstStyle/>
           <a:p>
-            <a:pPr algn="ctr" indent="0" marL="0">
+            <a:pPr marL="0" indent="0" algn="ctr">
               <a:buNone/>
             </a:pPr>
             <a:r>
@@ -5331,7 +5097,7 @@
           <a:bodyPr wrap="square" lIns="0" tIns="0" rIns="0" bIns="0" rtlCol="0" anchor="ctr"/>
           <a:lstStyle/>
           <a:p>
-            <a:pPr algn="ctr" indent="0" marL="0">
+            <a:pPr marL="0" indent="0" algn="ctr">
               <a:buNone/>
             </a:pPr>
             <a:r>
@@ -5367,7 +5133,7 @@
           <a:bodyPr wrap="square" lIns="0" tIns="0" rIns="0" bIns="0" rtlCol="0" anchor="ctr"/>
           <a:lstStyle/>
           <a:p>
-            <a:pPr algn="ctr" indent="0" marL="0">
+            <a:pPr marL="0" indent="0" algn="ctr">
               <a:buNone/>
             </a:pPr>
             <a:r>
@@ -5403,7 +5169,7 @@
           <a:bodyPr wrap="square" lIns="0" tIns="0" rIns="0" bIns="0" rtlCol="0" anchor="ctr"/>
           <a:lstStyle/>
           <a:p>
-            <a:pPr algn="ctr" indent="0" marL="0">
+            <a:pPr marL="0" indent="0" algn="ctr">
               <a:buNone/>
             </a:pPr>
             <a:r>
@@ -5439,7 +5205,7 @@
           <a:bodyPr wrap="square" lIns="0" tIns="0" rIns="0" bIns="0" rtlCol="0" anchor="ctr"/>
           <a:lstStyle/>
           <a:p>
-            <a:pPr algn="ctr" indent="0" marL="0">
+            <a:pPr marL="0" indent="0" algn="ctr">
               <a:buNone/>
             </a:pPr>
             <a:r>
@@ -5475,7 +5241,7 @@
           <a:bodyPr wrap="square" lIns="0" tIns="0" rIns="0" bIns="0" rtlCol="0" anchor="ctr"/>
           <a:lstStyle/>
           <a:p>
-            <a:pPr algn="ctr" indent="0" marL="0">
+            <a:pPr marL="0" indent="0" algn="ctr">
               <a:buNone/>
             </a:pPr>
             <a:r>
@@ -5513,7 +5279,7 @@
               <a:srgbClr val="00D4FF"/>
             </a:solidFill>
             <a:prstDash val="solid"/>
-            <a:tailEnd type="open"/>
+            <a:tailEnd type="none"/>
           </a:ln>
         </p:spPr>
       </p:sp>
@@ -5541,7 +5307,7 @@
             <a:prstDash val="solid"/>
           </a:ln>
           <a:effectLst>
-            <a:outerShdw sx="100000" sy="100000" kx="0" ky="0" algn="bl" rotWithShape="0" blurRad="101600" dist="38100" dir="8100000">
+            <a:outerShdw blurRad="101600" dist="38100" dir="8100000" algn="bl" rotWithShape="0">
               <a:srgbClr val="000000">
                 <a:alpha val="25000"/>
               </a:srgbClr>
@@ -5595,7 +5361,7 @@
           <a:bodyPr wrap="square" lIns="0" tIns="0" rIns="0" bIns="0" rtlCol="0" anchor="ctr"/>
           <a:lstStyle/>
           <a:p>
-            <a:pPr algn="ctr" indent="0" marL="0">
+            <a:pPr marL="0" indent="0" algn="ctr">
               <a:buNone/>
             </a:pPr>
             <a:r>
@@ -5622,7 +5388,7 @@
         <p:spPr>
           <a:xfrm>
             <a:off x="5760720" y="1801368"/>
-            <a:ext cx="457200" cy="-292608"/>
+            <a:ext cx="457200" cy="0"/>
           </a:xfrm>
           <a:prstGeom prst="line">
             <a:avLst/>
@@ -5633,7 +5399,7 @@
               <a:srgbClr val="0EA5E9"/>
             </a:solidFill>
             <a:prstDash val="solid"/>
-            <a:tailEnd type="open"/>
+            <a:tailEnd type="none"/>
           </a:ln>
         </p:spPr>
       </p:sp>
@@ -5661,7 +5427,7 @@
             <a:prstDash val="solid"/>
           </a:ln>
           <a:effectLst>
-            <a:outerShdw sx="100000" sy="100000" kx="0" ky="0" algn="bl" rotWithShape="0" blurRad="101600" dist="38100" dir="8100000">
+            <a:outerShdw blurRad="101600" dist="38100" dir="8100000" algn="bl" rotWithShape="0">
               <a:srgbClr val="000000">
                 <a:alpha val="25000"/>
               </a:srgbClr>
@@ -5715,7 +5481,7 @@
           <a:bodyPr wrap="square" lIns="0" tIns="0" rIns="0" bIns="0" rtlCol="0" anchor="ctr"/>
           <a:lstStyle/>
           <a:p>
-            <a:pPr algn="ctr" indent="0" marL="0">
+            <a:pPr marL="0" indent="0" algn="ctr">
               <a:buNone/>
             </a:pPr>
             <a:r>
@@ -5753,7 +5519,7 @@
               <a:srgbClr val="10B981"/>
             </a:solidFill>
             <a:prstDash val="solid"/>
-            <a:tailEnd type="open"/>
+            <a:tailEnd type="none"/>
           </a:ln>
         </p:spPr>
       </p:sp>
@@ -5781,7 +5547,7 @@
             <a:prstDash val="solid"/>
           </a:ln>
           <a:effectLst>
-            <a:outerShdw sx="100000" sy="100000" kx="0" ky="0" algn="bl" rotWithShape="0" blurRad="101600" dist="38100" dir="8100000">
+            <a:outerShdw blurRad="101600" dist="38100" dir="8100000" algn="bl" rotWithShape="0">
               <a:srgbClr val="000000">
                 <a:alpha val="25000"/>
               </a:srgbClr>
@@ -5835,7 +5601,7 @@
           <a:bodyPr wrap="square" lIns="0" tIns="0" rIns="0" bIns="0" rtlCol="0" anchor="ctr"/>
           <a:lstStyle/>
           <a:p>
-            <a:pPr algn="ctr" indent="0" marL="0">
+            <a:pPr marL="0" indent="0" algn="ctr">
               <a:buNone/>
             </a:pPr>
             <a:r>
@@ -5873,7 +5639,7 @@
               <a:srgbClr val="7C3AED"/>
             </a:solidFill>
             <a:prstDash val="solid"/>
-            <a:tailEnd type="open"/>
+            <a:tailEnd type="none"/>
           </a:ln>
         </p:spPr>
       </p:sp>
@@ -5901,7 +5667,7 @@
             <a:prstDash val="solid"/>
           </a:ln>
           <a:effectLst>
-            <a:outerShdw sx="100000" sy="100000" kx="0" ky="0" algn="bl" rotWithShape="0" blurRad="101600" dist="38100" dir="8100000">
+            <a:outerShdw blurRad="101600" dist="38100" dir="8100000" algn="bl" rotWithShape="0">
               <a:srgbClr val="000000">
                 <a:alpha val="25000"/>
               </a:srgbClr>
@@ -5955,7 +5721,7 @@
           <a:bodyPr wrap="square" lIns="0" tIns="0" rIns="0" bIns="0" rtlCol="0" anchor="ctr"/>
           <a:lstStyle/>
           <a:p>
-            <a:pPr algn="ctr" indent="0" marL="0">
+            <a:pPr marL="0" indent="0" algn="ctr">
               <a:buNone/>
             </a:pPr>
             <a:r>
@@ -5997,7 +5763,7 @@
             <a:prstDash val="solid"/>
           </a:ln>
           <a:effectLst>
-            <a:outerShdw sx="100000" sy="100000" kx="0" ky="0" algn="bl" rotWithShape="0" blurRad="101600" dist="38100" dir="8100000">
+            <a:outerShdw blurRad="101600" dist="38100" dir="8100000" algn="bl" rotWithShape="0">
               <a:srgbClr val="000000">
                 <a:alpha val="25000"/>
               </a:srgbClr>
@@ -6051,7 +5817,7 @@
           <a:bodyPr wrap="square" lIns="0" tIns="0" rIns="0" bIns="0" rtlCol="0" anchor="ctr"/>
           <a:lstStyle/>
           <a:p>
-            <a:pPr indent="0" marL="0">
+            <a:pPr marL="0" indent="0">
               <a:buNone/>
             </a:pPr>
             <a:r>
@@ -6090,7 +5856,7 @@
           <a:bodyPr wrap="square" lIns="0" tIns="0" rIns="0" bIns="0" rtlCol="0" anchor="ctr"/>
           <a:lstStyle/>
           <a:p>
-            <a:pPr indent="0" marL="0">
+            <a:pPr marL="0" indent="0">
               <a:buNone/>
             </a:pPr>
             <a:r>
@@ -6132,7 +5898,7 @@
             <a:prstDash val="solid"/>
           </a:ln>
           <a:effectLst>
-            <a:outerShdw sx="100000" sy="100000" kx="0" ky="0" algn="bl" rotWithShape="0" blurRad="101600" dist="38100" dir="8100000">
+            <a:outerShdw blurRad="101600" dist="38100" dir="8100000" algn="bl" rotWithShape="0">
               <a:srgbClr val="000000">
                 <a:alpha val="25000"/>
               </a:srgbClr>
@@ -6186,7 +5952,7 @@
           <a:bodyPr wrap="square" lIns="0" tIns="0" rIns="0" bIns="0" rtlCol="0" anchor="ctr"/>
           <a:lstStyle/>
           <a:p>
-            <a:pPr indent="0" marL="0">
+            <a:pPr marL="0" indent="0">
               <a:buNone/>
             </a:pPr>
             <a:r>
@@ -6225,7 +5991,7 @@
           <a:bodyPr wrap="square" lIns="0" tIns="0" rIns="0" bIns="0" rtlCol="0" anchor="ctr"/>
           <a:lstStyle/>
           <a:p>
-            <a:pPr indent="0" marL="0">
+            <a:pPr marL="0" indent="0">
               <a:buNone/>
             </a:pPr>
             <a:r>
@@ -6267,7 +6033,7 @@
             <a:prstDash val="solid"/>
           </a:ln>
           <a:effectLst>
-            <a:outerShdw sx="100000" sy="100000" kx="0" ky="0" algn="bl" rotWithShape="0" blurRad="101600" dist="38100" dir="8100000">
+            <a:outerShdw blurRad="101600" dist="38100" dir="8100000" algn="bl" rotWithShape="0">
               <a:srgbClr val="000000">
                 <a:alpha val="25000"/>
               </a:srgbClr>
@@ -6321,7 +6087,7 @@
           <a:bodyPr wrap="square" lIns="0" tIns="0" rIns="0" bIns="0" rtlCol="0" anchor="ctr"/>
           <a:lstStyle/>
           <a:p>
-            <a:pPr indent="0" marL="0">
+            <a:pPr marL="0" indent="0">
               <a:buNone/>
             </a:pPr>
             <a:r>
@@ -6360,7 +6126,7 @@
           <a:bodyPr wrap="square" lIns="0" tIns="0" rIns="0" bIns="0" rtlCol="0" anchor="ctr"/>
           <a:lstStyle/>
           <a:p>
-            <a:pPr indent="0" marL="0">
+            <a:pPr marL="0" indent="0">
               <a:buNone/>
             </a:pPr>
             <a:r>
@@ -6399,7 +6165,7 @@
           <a:bodyPr wrap="square" lIns="0" tIns="0" rIns="0" bIns="0" rtlCol="0" anchor="ctr"/>
           <a:lstStyle/>
           <a:p>
-            <a:pPr indent="0" marL="0">
+            <a:pPr marL="0" indent="0">
               <a:buNone/>
             </a:pPr>
             <a:r>
@@ -6433,6 +6199,7 @@
         <a:solidFill>
           <a:srgbClr val="0D1B2A"/>
         </a:solidFill>
+        <a:effectLst/>
       </p:bgPr>
     </p:bg>
     <p:spTree>
@@ -6495,7 +6262,7 @@
           <a:bodyPr wrap="square" lIns="0" tIns="0" rIns="0" bIns="0" rtlCol="0" anchor="ctr"/>
           <a:lstStyle/>
           <a:p>
-            <a:pPr indent="0" marL="0">
+            <a:pPr marL="0" indent="0">
               <a:buNone/>
             </a:pPr>
             <a:r>
@@ -6534,7 +6301,7 @@
           <a:bodyPr wrap="square" lIns="0" tIns="0" rIns="0" bIns="0" rtlCol="0" anchor="ctr"/>
           <a:lstStyle/>
           <a:p>
-            <a:pPr indent="0" marL="0">
+            <a:pPr marL="0" indent="0">
               <a:buNone/>
             </a:pPr>
             <a:r>
@@ -6576,7 +6343,7 @@
             <a:prstDash val="solid"/>
           </a:ln>
           <a:effectLst>
-            <a:outerShdw sx="100000" sy="100000" kx="0" ky="0" algn="bl" rotWithShape="0" blurRad="101600" dist="38100" dir="8100000">
+            <a:outerShdw blurRad="101600" dist="38100" dir="8100000" algn="bl" rotWithShape="0">
               <a:srgbClr val="000000">
                 <a:alpha val="25000"/>
               </a:srgbClr>
@@ -6605,7 +6372,7 @@
           <a:bodyPr wrap="square" lIns="0" tIns="0" rIns="0" bIns="0" rtlCol="0" anchor="ctr"/>
           <a:lstStyle/>
           <a:p>
-            <a:pPr algn="ctr" indent="0" marL="0">
+            <a:pPr marL="0" indent="0" algn="ctr">
               <a:buNone/>
             </a:pPr>
             <a:r>
@@ -6644,7 +6411,7 @@
           <a:bodyPr wrap="square" lIns="0" tIns="0" rIns="0" bIns="0" rtlCol="0" anchor="ctr"/>
           <a:lstStyle/>
           <a:p>
-            <a:pPr algn="ctr" indent="0" marL="0">
+            <a:pPr marL="0" indent="0" algn="ctr">
               <a:buNone/>
             </a:pPr>
             <a:r>
@@ -6683,7 +6450,7 @@
           <a:bodyPr wrap="square" lIns="0" tIns="0" rIns="0" bIns="0" rtlCol="0" anchor="ctr"/>
           <a:lstStyle/>
           <a:p>
-            <a:pPr algn="ctr" indent="0" marL="0">
+            <a:pPr marL="0" indent="0" algn="ctr">
               <a:buNone/>
             </a:pPr>
             <a:r>
@@ -6722,7 +6489,7 @@
           <a:bodyPr wrap="square" lIns="0" tIns="0" rIns="0" bIns="0" rtlCol="0" anchor="ctr"/>
           <a:lstStyle/>
           <a:p>
-            <a:pPr algn="ctr" indent="0" marL="0">
+            <a:pPr marL="0" indent="0" algn="ctr">
               <a:buNone/>
             </a:pPr>
             <a:r>
@@ -6761,7 +6528,7 @@
           <a:bodyPr wrap="square" lIns="0" tIns="0" rIns="0" bIns="0" rtlCol="0" anchor="ctr"/>
           <a:lstStyle/>
           <a:p>
-            <a:pPr algn="ctr" indent="0" marL="0">
+            <a:pPr marL="0" indent="0" algn="ctr">
               <a:buNone/>
             </a:pPr>
             <a:r>
@@ -6800,7 +6567,7 @@
           <a:bodyPr wrap="square" lIns="0" tIns="0" rIns="0" bIns="0" rtlCol="0" anchor="ctr"/>
           <a:lstStyle/>
           <a:p>
-            <a:pPr algn="ctr" indent="0" marL="0">
+            <a:pPr marL="0" indent="0" algn="ctr">
               <a:buNone/>
             </a:pPr>
             <a:r>
@@ -6842,7 +6609,7 @@
             <a:prstDash val="solid"/>
           </a:ln>
           <a:effectLst>
-            <a:outerShdw sx="100000" sy="100000" kx="0" ky="0" algn="bl" rotWithShape="0" blurRad="101600" dist="38100" dir="8100000">
+            <a:outerShdw blurRad="101600" dist="38100" dir="8100000" algn="bl" rotWithShape="0">
               <a:srgbClr val="000000">
                 <a:alpha val="25000"/>
               </a:srgbClr>
@@ -6871,7 +6638,7 @@
           <a:bodyPr wrap="square" lIns="0" tIns="0" rIns="0" bIns="0" rtlCol="0" anchor="ctr"/>
           <a:lstStyle/>
           <a:p>
-            <a:pPr algn="ctr" indent="0" marL="0">
+            <a:pPr marL="0" indent="0" algn="ctr">
               <a:buNone/>
             </a:pPr>
             <a:r>
@@ -6907,7 +6674,7 @@
           <a:bodyPr wrap="square" lIns="0" tIns="0" rIns="0" bIns="0" rtlCol="0" anchor="ctr"/>
           <a:lstStyle/>
           <a:p>
-            <a:pPr algn="ctr" indent="0" marL="0">
+            <a:pPr marL="0" indent="0" algn="ctr">
               <a:buNone/>
             </a:pPr>
             <a:r>
@@ -6946,7 +6713,7 @@
           <a:bodyPr wrap="square" lIns="0" tIns="0" rIns="0" bIns="0" rtlCol="0" anchor="ctr"/>
           <a:lstStyle/>
           <a:p>
-            <a:pPr algn="ctr" indent="0" marL="0">
+            <a:pPr marL="0" indent="0" algn="ctr">
               <a:buNone/>
             </a:pPr>
             <a:r>
@@ -6963,7 +6730,7 @@
             <a:endParaRPr lang="en-US" sz="1200" dirty="0"/>
           </a:p>
           <a:p>
-            <a:pPr algn="ctr" indent="0" marL="0">
+            <a:pPr marL="0" indent="0" algn="ctr">
               <a:buNone/>
             </a:pPr>
             <a:r>
@@ -7005,7 +6772,7 @@
             <a:prstDash val="solid"/>
           </a:ln>
           <a:effectLst>
-            <a:outerShdw sx="100000" sy="100000" kx="0" ky="0" algn="bl" rotWithShape="0" blurRad="101600" dist="38100" dir="8100000">
+            <a:outerShdw blurRad="101600" dist="38100" dir="8100000" algn="bl" rotWithShape="0">
               <a:srgbClr val="000000">
                 <a:alpha val="25000"/>
               </a:srgbClr>
@@ -7034,7 +6801,7 @@
           <a:bodyPr wrap="square" lIns="0" tIns="0" rIns="0" bIns="0" rtlCol="0" anchor="ctr"/>
           <a:lstStyle/>
           <a:p>
-            <a:pPr algn="ctr" indent="0" marL="0">
+            <a:pPr marL="0" indent="0" algn="ctr">
               <a:buNone/>
             </a:pPr>
             <a:r>
@@ -7070,7 +6837,7 @@
           <a:bodyPr wrap="square" lIns="0" tIns="0" rIns="0" bIns="0" rtlCol="0" anchor="ctr"/>
           <a:lstStyle/>
           <a:p>
-            <a:pPr algn="ctr" indent="0" marL="0">
+            <a:pPr marL="0" indent="0" algn="ctr">
               <a:buNone/>
             </a:pPr>
             <a:r>
@@ -7109,7 +6876,7 @@
           <a:bodyPr wrap="square" lIns="0" tIns="0" rIns="0" bIns="0" rtlCol="0" anchor="ctr"/>
           <a:lstStyle/>
           <a:p>
-            <a:pPr algn="ctr" indent="0" marL="0">
+            <a:pPr marL="0" indent="0" algn="ctr">
               <a:buNone/>
             </a:pPr>
             <a:r>
@@ -7126,7 +6893,7 @@
             <a:endParaRPr lang="en-US" sz="1200" dirty="0"/>
           </a:p>
           <a:p>
-            <a:pPr algn="ctr" indent="0" marL="0">
+            <a:pPr marL="0" indent="0" algn="ctr">
               <a:buNone/>
             </a:pPr>
             <a:r>
@@ -7168,7 +6935,7 @@
             <a:prstDash val="solid"/>
           </a:ln>
           <a:effectLst>
-            <a:outerShdw sx="100000" sy="100000" kx="0" ky="0" algn="bl" rotWithShape="0" blurRad="101600" dist="38100" dir="8100000">
+            <a:outerShdw blurRad="101600" dist="38100" dir="8100000" algn="bl" rotWithShape="0">
               <a:srgbClr val="000000">
                 <a:alpha val="25000"/>
               </a:srgbClr>
@@ -7197,7 +6964,7 @@
           <a:bodyPr wrap="square" lIns="0" tIns="0" rIns="0" bIns="0" rtlCol="0" anchor="ctr"/>
           <a:lstStyle/>
           <a:p>
-            <a:pPr algn="ctr" indent="0" marL="0">
+            <a:pPr marL="0" indent="0" algn="ctr">
               <a:buNone/>
             </a:pPr>
             <a:r>
@@ -7233,7 +7000,7 @@
           <a:bodyPr wrap="square" lIns="0" tIns="0" rIns="0" bIns="0" rtlCol="0" anchor="ctr"/>
           <a:lstStyle/>
           <a:p>
-            <a:pPr algn="ctr" indent="0" marL="0">
+            <a:pPr marL="0" indent="0" algn="ctr">
               <a:buNone/>
             </a:pPr>
             <a:r>
@@ -7272,7 +7039,7 @@
           <a:bodyPr wrap="square" lIns="0" tIns="0" rIns="0" bIns="0" rtlCol="0" anchor="ctr"/>
           <a:lstStyle/>
           <a:p>
-            <a:pPr algn="ctr" indent="0" marL="0">
+            <a:pPr marL="0" indent="0" algn="ctr">
               <a:buNone/>
             </a:pPr>
             <a:r>
@@ -7289,7 +7056,7 @@
             <a:endParaRPr lang="en-US" sz="1200" dirty="0"/>
           </a:p>
           <a:p>
-            <a:pPr algn="ctr" indent="0" marL="0">
+            <a:pPr marL="0" indent="0" algn="ctr">
               <a:buNone/>
             </a:pPr>
             <a:r>
@@ -7323,6 +7090,7 @@
         <a:solidFill>
           <a:srgbClr val="0D1B2A"/>
         </a:solidFill>
+        <a:effectLst/>
       </p:bgPr>
     </p:bg>
     <p:spTree>
@@ -7385,7 +7153,7 @@
           <a:bodyPr wrap="square" lIns="0" tIns="0" rIns="0" bIns="0" rtlCol="0" anchor="ctr"/>
           <a:lstStyle/>
           <a:p>
-            <a:pPr indent="0" marL="0">
+            <a:pPr marL="0" indent="0">
               <a:buNone/>
             </a:pPr>
             <a:r>
@@ -7424,7 +7192,7 @@
           <a:bodyPr wrap="square" lIns="0" tIns="0" rIns="0" bIns="0" rtlCol="0" anchor="ctr"/>
           <a:lstStyle/>
           <a:p>
-            <a:pPr indent="0" marL="0">
+            <a:pPr marL="0" indent="0">
               <a:buNone/>
             </a:pPr>
             <a:r>
@@ -7466,7 +7234,7 @@
             <a:prstDash val="solid"/>
           </a:ln>
           <a:effectLst>
-            <a:outerShdw sx="100000" sy="100000" kx="0" ky="0" algn="bl" rotWithShape="0" blurRad="101600" dist="38100" dir="8100000">
+            <a:outerShdw blurRad="101600" dist="38100" dir="8100000" algn="bl" rotWithShape="0">
               <a:srgbClr val="000000">
                 <a:alpha val="25000"/>
               </a:srgbClr>
@@ -7495,7 +7263,7 @@
           <a:bodyPr wrap="square" lIns="0" tIns="0" rIns="0" bIns="0" rtlCol="0" anchor="ctr"/>
           <a:lstStyle/>
           <a:p>
-            <a:pPr algn="ctr" indent="0" marL="0">
+            <a:pPr marL="0" indent="0" algn="ctr">
               <a:buNone/>
             </a:pPr>
             <a:r>
@@ -7534,7 +7302,7 @@
           <a:bodyPr wrap="square" lIns="0" tIns="0" rIns="0" bIns="0" rtlCol="0" anchor="ctr"/>
           <a:lstStyle/>
           <a:p>
-            <a:pPr algn="ctr" indent="0" marL="0">
+            <a:pPr marL="0" indent="0" algn="ctr">
               <a:buNone/>
             </a:pPr>
             <a:r>
@@ -7573,7 +7341,7 @@
           <a:bodyPr wrap="square" lIns="0" tIns="0" rIns="0" bIns="0" rtlCol="0" anchor="ctr"/>
           <a:lstStyle/>
           <a:p>
-            <a:pPr algn="ctr" indent="0" marL="0">
+            <a:pPr marL="0" indent="0" algn="ctr">
               <a:buNone/>
             </a:pPr>
             <a:r>
@@ -7612,7 +7380,7 @@
           <a:bodyPr wrap="square" lIns="0" tIns="0" rIns="0" bIns="0" rtlCol="0" anchor="ctr"/>
           <a:lstStyle/>
           <a:p>
-            <a:pPr algn="ctr" indent="0" marL="0">
+            <a:pPr marL="0" indent="0" algn="ctr">
               <a:buNone/>
             </a:pPr>
             <a:r>
@@ -7654,7 +7422,7 @@
             <a:prstDash val="solid"/>
           </a:ln>
           <a:effectLst>
-            <a:outerShdw sx="100000" sy="100000" kx="0" ky="0" algn="bl" rotWithShape="0" blurRad="101600" dist="38100" dir="8100000">
+            <a:outerShdw blurRad="101600" dist="38100" dir="8100000" algn="bl" rotWithShape="0">
               <a:srgbClr val="000000">
                 <a:alpha val="25000"/>
               </a:srgbClr>
@@ -7683,7 +7451,7 @@
           <a:bodyPr wrap="square" lIns="0" tIns="0" rIns="0" bIns="0" rtlCol="0" anchor="ctr"/>
           <a:lstStyle/>
           <a:p>
-            <a:pPr indent="0" marL="0">
+            <a:pPr marL="0" indent="0">
               <a:buNone/>
             </a:pPr>
             <a:r>
@@ -7722,7 +7490,7 @@
           <a:bodyPr wrap="square" lIns="0" tIns="0" rIns="0" bIns="0" rtlCol="0" anchor="ctr"/>
           <a:lstStyle/>
           <a:p>
-            <a:pPr indent="0" marL="0">
+            <a:pPr marL="0" indent="0">
               <a:buNone/>
             </a:pPr>
             <a:r>
@@ -7764,7 +7532,7 @@
             <a:prstDash val="solid"/>
           </a:ln>
           <a:effectLst>
-            <a:outerShdw sx="100000" sy="100000" kx="0" ky="0" algn="bl" rotWithShape="0" blurRad="101600" dist="38100" dir="8100000">
+            <a:outerShdw blurRad="101600" dist="38100" dir="8100000" algn="bl" rotWithShape="0">
               <a:srgbClr val="000000">
                 <a:alpha val="25000"/>
               </a:srgbClr>
@@ -7793,7 +7561,7 @@
           <a:bodyPr wrap="square" lIns="0" tIns="0" rIns="0" bIns="0" rtlCol="0" anchor="ctr"/>
           <a:lstStyle/>
           <a:p>
-            <a:pPr indent="0" marL="0">
+            <a:pPr marL="0" indent="0">
               <a:buNone/>
             </a:pPr>
             <a:r>
@@ -7832,7 +7600,7 @@
           <a:bodyPr wrap="square" lIns="0" tIns="0" rIns="0" bIns="0" rtlCol="0" anchor="ctr"/>
           <a:lstStyle/>
           <a:p>
-            <a:pPr indent="0" marL="0">
+            <a:pPr marL="0" indent="0">
               <a:buNone/>
             </a:pPr>
             <a:r>
@@ -7874,7 +7642,7 @@
             <a:prstDash val="solid"/>
           </a:ln>
           <a:effectLst>
-            <a:outerShdw sx="100000" sy="100000" kx="0" ky="0" algn="bl" rotWithShape="0" blurRad="101600" dist="38100" dir="8100000">
+            <a:outerShdw blurRad="101600" dist="38100" dir="8100000" algn="bl" rotWithShape="0">
               <a:srgbClr val="000000">
                 <a:alpha val="25000"/>
               </a:srgbClr>
@@ -7903,7 +7671,7 @@
           <a:bodyPr wrap="square" lIns="0" tIns="0" rIns="0" bIns="0" rtlCol="0" anchor="ctr"/>
           <a:lstStyle/>
           <a:p>
-            <a:pPr indent="0" marL="0">
+            <a:pPr marL="0" indent="0">
               <a:buNone/>
             </a:pPr>
             <a:r>
@@ -7942,7 +7710,7 @@
           <a:bodyPr wrap="square" lIns="0" tIns="0" rIns="0" bIns="0" rtlCol="0" anchor="ctr"/>
           <a:lstStyle/>
           <a:p>
-            <a:pPr indent="0" marL="0">
+            <a:pPr marL="0" indent="0">
               <a:buNone/>
             </a:pPr>
             <a:r>
@@ -7984,7 +7752,7 @@
             <a:prstDash val="solid"/>
           </a:ln>
           <a:effectLst>
-            <a:outerShdw sx="100000" sy="100000" kx="0" ky="0" algn="bl" rotWithShape="0" blurRad="101600" dist="38100" dir="8100000">
+            <a:outerShdw blurRad="101600" dist="38100" dir="8100000" algn="bl" rotWithShape="0">
               <a:srgbClr val="000000">
                 <a:alpha val="25000"/>
               </a:srgbClr>
@@ -8013,7 +7781,7 @@
           <a:bodyPr wrap="square" lIns="0" tIns="0" rIns="0" bIns="0" rtlCol="0" anchor="ctr"/>
           <a:lstStyle/>
           <a:p>
-            <a:pPr indent="0" marL="0">
+            <a:pPr marL="0" indent="0">
               <a:buNone/>
             </a:pPr>
             <a:r>
@@ -8052,7 +7820,7 @@
           <a:bodyPr wrap="square" lIns="0" tIns="0" rIns="0" bIns="0" rtlCol="0" anchor="ctr"/>
           <a:lstStyle/>
           <a:p>
-            <a:pPr indent="0" marL="0">
+            <a:pPr marL="0" indent="0">
               <a:buNone/>
             </a:pPr>
             <a:r>
@@ -8094,7 +7862,7 @@
             <a:prstDash val="solid"/>
           </a:ln>
           <a:effectLst>
-            <a:outerShdw sx="100000" sy="100000" kx="0" ky="0" algn="bl" rotWithShape="0" blurRad="101600" dist="38100" dir="8100000">
+            <a:outerShdw blurRad="101600" dist="38100" dir="8100000" algn="bl" rotWithShape="0">
               <a:srgbClr val="000000">
                 <a:alpha val="25000"/>
               </a:srgbClr>
@@ -8148,7 +7916,7 @@
           <a:bodyPr wrap="square" lIns="0" tIns="0" rIns="0" bIns="0" rtlCol="0" anchor="ctr"/>
           <a:lstStyle/>
           <a:p>
-            <a:pPr indent="0" marL="0">
+            <a:pPr marL="0" indent="0">
               <a:buNone/>
             </a:pPr>
             <a:r>
@@ -8182,6 +7950,7 @@
         <a:solidFill>
           <a:srgbClr val="0D1B2A"/>
         </a:solidFill>
+        <a:effectLst/>
       </p:bgPr>
     </p:bg>
     <p:spTree>
@@ -8244,7 +8013,7 @@
           <a:bodyPr wrap="square" lIns="0" tIns="0" rIns="0" bIns="0" rtlCol="0" anchor="ctr"/>
           <a:lstStyle/>
           <a:p>
-            <a:pPr indent="0" marL="0">
+            <a:pPr marL="0" indent="0">
               <a:buNone/>
             </a:pPr>
             <a:r>
@@ -8283,7 +8052,7 @@
           <a:bodyPr wrap="square" lIns="0" tIns="0" rIns="0" bIns="0" rtlCol="0" anchor="ctr"/>
           <a:lstStyle/>
           <a:p>
-            <a:pPr indent="0" marL="0">
+            <a:pPr marL="0" indent="0">
               <a:buNone/>
             </a:pPr>
             <a:r>
@@ -8325,7 +8094,7 @@
             <a:prstDash val="solid"/>
           </a:ln>
           <a:effectLst>
-            <a:outerShdw sx="100000" sy="100000" kx="0" ky="0" algn="bl" rotWithShape="0" blurRad="101600" dist="38100" dir="8100000">
+            <a:outerShdw blurRad="101600" dist="38100" dir="8100000" algn="bl" rotWithShape="0">
               <a:srgbClr val="000000">
                 <a:alpha val="25000"/>
               </a:srgbClr>
@@ -8379,7 +8148,7 @@
           <a:bodyPr wrap="square" lIns="0" tIns="0" rIns="0" bIns="0" rtlCol="0" anchor="ctr"/>
           <a:lstStyle/>
           <a:p>
-            <a:pPr algn="ctr" indent="0" marL="0">
+            <a:pPr marL="0" indent="0" algn="ctr">
               <a:buNone/>
             </a:pPr>
             <a:r>
@@ -8418,7 +8187,7 @@
           <a:bodyPr wrap="square" lIns="0" tIns="0" rIns="0" bIns="0" rtlCol="0" anchor="ctr"/>
           <a:lstStyle/>
           <a:p>
-            <a:pPr indent="0" marL="0">
+            <a:pPr marL="0" indent="0">
               <a:buNone/>
             </a:pPr>
             <a:r>
@@ -8454,7 +8223,7 @@
           <a:bodyPr wrap="square" lIns="0" tIns="0" rIns="0" bIns="0" rtlCol="0" anchor="ctr"/>
           <a:lstStyle/>
           <a:p>
-            <a:pPr indent="0" marL="0">
+            <a:pPr marL="0" indent="0">
               <a:buNone/>
             </a:pPr>
             <a:r>
@@ -8493,7 +8262,7 @@
           <a:bodyPr wrap="square" lIns="0" tIns="0" rIns="0" bIns="0" rtlCol="0" anchor="ctr"/>
           <a:lstStyle/>
           <a:p>
-            <a:pPr indent="0" marL="0">
+            <a:pPr marL="0" indent="0">
               <a:buNone/>
             </a:pPr>
             <a:r>
@@ -8559,7 +8328,7 @@
           <a:bodyPr wrap="square" lIns="0" tIns="0" rIns="0" bIns="0" rtlCol="0" anchor="ctr"/>
           <a:lstStyle/>
           <a:p>
-            <a:pPr indent="0" marL="0">
+            <a:pPr marL="0" indent="0">
               <a:buNone/>
             </a:pPr>
             <a:r>
@@ -8601,7 +8370,7 @@
             <a:prstDash val="solid"/>
           </a:ln>
           <a:effectLst>
-            <a:outerShdw sx="100000" sy="100000" kx="0" ky="0" algn="bl" rotWithShape="0" blurRad="101600" dist="38100" dir="8100000">
+            <a:outerShdw blurRad="101600" dist="38100" dir="8100000" algn="bl" rotWithShape="0">
               <a:srgbClr val="000000">
                 <a:alpha val="25000"/>
               </a:srgbClr>
@@ -8655,7 +8424,7 @@
           <a:bodyPr wrap="square" lIns="0" tIns="0" rIns="0" bIns="0" rtlCol="0" anchor="ctr"/>
           <a:lstStyle/>
           <a:p>
-            <a:pPr algn="ctr" indent="0" marL="0">
+            <a:pPr marL="0" indent="0" algn="ctr">
               <a:buNone/>
             </a:pPr>
             <a:r>
@@ -8694,7 +8463,7 @@
           <a:bodyPr wrap="square" lIns="0" tIns="0" rIns="0" bIns="0" rtlCol="0" anchor="ctr"/>
           <a:lstStyle/>
           <a:p>
-            <a:pPr indent="0" marL="0">
+            <a:pPr marL="0" indent="0">
               <a:buNone/>
             </a:pPr>
             <a:r>
@@ -8730,7 +8499,7 @@
           <a:bodyPr wrap="square" lIns="0" tIns="0" rIns="0" bIns="0" rtlCol="0" anchor="ctr"/>
           <a:lstStyle/>
           <a:p>
-            <a:pPr indent="0" marL="0">
+            <a:pPr marL="0" indent="0">
               <a:buNone/>
             </a:pPr>
             <a:r>
@@ -8769,7 +8538,7 @@
           <a:bodyPr wrap="square" lIns="0" tIns="0" rIns="0" bIns="0" rtlCol="0" anchor="ctr"/>
           <a:lstStyle/>
           <a:p>
-            <a:pPr indent="0" marL="0">
+            <a:pPr marL="0" indent="0">
               <a:buNone/>
             </a:pPr>
             <a:r>
@@ -8835,7 +8604,7 @@
           <a:bodyPr wrap="square" lIns="0" tIns="0" rIns="0" bIns="0" rtlCol="0" anchor="ctr"/>
           <a:lstStyle/>
           <a:p>
-            <a:pPr indent="0" marL="0">
+            <a:pPr marL="0" indent="0">
               <a:buNone/>
             </a:pPr>
             <a:r>
@@ -8877,7 +8646,7 @@
             <a:prstDash val="solid"/>
           </a:ln>
           <a:effectLst>
-            <a:outerShdw sx="100000" sy="100000" kx="0" ky="0" algn="bl" rotWithShape="0" blurRad="101600" dist="38100" dir="8100000">
+            <a:outerShdw blurRad="101600" dist="38100" dir="8100000" algn="bl" rotWithShape="0">
               <a:srgbClr val="000000">
                 <a:alpha val="25000"/>
               </a:srgbClr>
@@ -8931,7 +8700,7 @@
           <a:bodyPr wrap="square" lIns="0" tIns="0" rIns="0" bIns="0" rtlCol="0" anchor="ctr"/>
           <a:lstStyle/>
           <a:p>
-            <a:pPr algn="ctr" indent="0" marL="0">
+            <a:pPr marL="0" indent="0" algn="ctr">
               <a:buNone/>
             </a:pPr>
             <a:r>
@@ -8970,7 +8739,7 @@
           <a:bodyPr wrap="square" lIns="0" tIns="0" rIns="0" bIns="0" rtlCol="0" anchor="ctr"/>
           <a:lstStyle/>
           <a:p>
-            <a:pPr indent="0" marL="0">
+            <a:pPr marL="0" indent="0">
               <a:buNone/>
             </a:pPr>
             <a:r>
@@ -9006,7 +8775,7 @@
           <a:bodyPr wrap="square" lIns="0" tIns="0" rIns="0" bIns="0" rtlCol="0" anchor="ctr"/>
           <a:lstStyle/>
           <a:p>
-            <a:pPr indent="0" marL="0">
+            <a:pPr marL="0" indent="0">
               <a:buNone/>
             </a:pPr>
             <a:r>
@@ -9045,7 +8814,7 @@
           <a:bodyPr wrap="square" lIns="0" tIns="0" rIns="0" bIns="0" rtlCol="0" anchor="ctr"/>
           <a:lstStyle/>
           <a:p>
-            <a:pPr indent="0" marL="0">
+            <a:pPr marL="0" indent="0">
               <a:buNone/>
             </a:pPr>
             <a:r>
@@ -9111,7 +8880,7 @@
           <a:bodyPr wrap="square" lIns="0" tIns="0" rIns="0" bIns="0" rtlCol="0" anchor="ctr"/>
           <a:lstStyle/>
           <a:p>
-            <a:pPr indent="0" marL="0">
+            <a:pPr marL="0" indent="0">
               <a:buNone/>
             </a:pPr>
             <a:r>
@@ -9153,7 +8922,7 @@
             <a:prstDash val="solid"/>
           </a:ln>
           <a:effectLst>
-            <a:outerShdw sx="100000" sy="100000" kx="0" ky="0" algn="bl" rotWithShape="0" blurRad="101600" dist="38100" dir="8100000">
+            <a:outerShdw blurRad="101600" dist="38100" dir="8100000" algn="bl" rotWithShape="0">
               <a:srgbClr val="000000">
                 <a:alpha val="25000"/>
               </a:srgbClr>
@@ -9207,7 +8976,7 @@
           <a:bodyPr wrap="square" lIns="0" tIns="0" rIns="0" bIns="0" rtlCol="0" anchor="ctr"/>
           <a:lstStyle/>
           <a:p>
-            <a:pPr algn="ctr" indent="0" marL="0">
+            <a:pPr marL="0" indent="0" algn="ctr">
               <a:buNone/>
             </a:pPr>
             <a:r>
@@ -9246,7 +9015,7 @@
           <a:bodyPr wrap="square" lIns="0" tIns="0" rIns="0" bIns="0" rtlCol="0" anchor="ctr"/>
           <a:lstStyle/>
           <a:p>
-            <a:pPr indent="0" marL="0">
+            <a:pPr marL="0" indent="0">
               <a:buNone/>
             </a:pPr>
             <a:r>
@@ -9282,7 +9051,7 @@
           <a:bodyPr wrap="square" lIns="0" tIns="0" rIns="0" bIns="0" rtlCol="0" anchor="ctr"/>
           <a:lstStyle/>
           <a:p>
-            <a:pPr indent="0" marL="0">
+            <a:pPr marL="0" indent="0">
               <a:buNone/>
             </a:pPr>
             <a:r>
@@ -9321,7 +9090,7 @@
           <a:bodyPr wrap="square" lIns="0" tIns="0" rIns="0" bIns="0" rtlCol="0" anchor="ctr"/>
           <a:lstStyle/>
           <a:p>
-            <a:pPr indent="0" marL="0">
+            <a:pPr marL="0" indent="0">
               <a:buNone/>
             </a:pPr>
             <a:r>
@@ -9387,7 +9156,7 @@
           <a:bodyPr wrap="square" lIns="0" tIns="0" rIns="0" bIns="0" rtlCol="0" anchor="ctr"/>
           <a:lstStyle/>
           <a:p>
-            <a:pPr indent="0" marL="0">
+            <a:pPr marL="0" indent="0">
               <a:buNone/>
             </a:pPr>
             <a:r>
@@ -9421,6 +9190,7 @@
         <a:solidFill>
           <a:srgbClr val="0D1B2A"/>
         </a:solidFill>
+        <a:effectLst/>
       </p:bgPr>
     </p:bg>
     <p:spTree>
@@ -9483,7 +9253,7 @@
           <a:bodyPr wrap="square" lIns="0" tIns="0" rIns="0" bIns="0" rtlCol="0" anchor="ctr"/>
           <a:lstStyle/>
           <a:p>
-            <a:pPr indent="0" marL="0">
+            <a:pPr marL="0" indent="0">
               <a:buNone/>
             </a:pPr>
             <a:r>
@@ -9522,7 +9292,7 @@
           <a:bodyPr wrap="square" lIns="0" tIns="0" rIns="0" bIns="0" rtlCol="0" anchor="ctr"/>
           <a:lstStyle/>
           <a:p>
-            <a:pPr indent="0" marL="0">
+            <a:pPr marL="0" indent="0">
               <a:buNone/>
             </a:pPr>
             <a:r>
@@ -9564,7 +9334,7 @@
             <a:prstDash val="solid"/>
           </a:ln>
           <a:effectLst>
-            <a:outerShdw sx="100000" sy="100000" kx="0" ky="0" algn="bl" rotWithShape="0" blurRad="101600" dist="38100" dir="8100000">
+            <a:outerShdw blurRad="101600" dist="38100" dir="8100000" algn="bl" rotWithShape="0">
               <a:srgbClr val="000000">
                 <a:alpha val="25000"/>
               </a:srgbClr>
@@ -9618,7 +9388,7 @@
           <a:bodyPr wrap="square" lIns="0" tIns="0" rIns="0" bIns="0" rtlCol="0" anchor="ctr"/>
           <a:lstStyle/>
           <a:p>
-            <a:pPr indent="0" marL="0">
+            <a:pPr marL="0" indent="0">
               <a:buNone/>
             </a:pPr>
             <a:r>
@@ -9682,7 +9452,7 @@
           <a:bodyPr wrap="square" lIns="0" tIns="0" rIns="0" bIns="0" rtlCol="0" anchor="ctr"/>
           <a:lstStyle/>
           <a:p>
-            <a:pPr indent="0" marL="0">
+            <a:pPr marL="0" indent="0">
               <a:buNone/>
             </a:pPr>
             <a:r>
@@ -9746,7 +9516,7 @@
           <a:bodyPr wrap="square" lIns="0" tIns="0" rIns="0" bIns="0" rtlCol="0" anchor="ctr"/>
           <a:lstStyle/>
           <a:p>
-            <a:pPr indent="0" marL="0">
+            <a:pPr marL="0" indent="0">
               <a:buNone/>
             </a:pPr>
             <a:r>
@@ -9810,7 +9580,7 @@
           <a:bodyPr wrap="square" lIns="0" tIns="0" rIns="0" bIns="0" rtlCol="0" anchor="ctr"/>
           <a:lstStyle/>
           <a:p>
-            <a:pPr indent="0" marL="0">
+            <a:pPr marL="0" indent="0">
               <a:buNone/>
             </a:pPr>
             <a:r>
@@ -9852,7 +9622,7 @@
             <a:prstDash val="solid"/>
           </a:ln>
           <a:effectLst>
-            <a:outerShdw sx="100000" sy="100000" kx="0" ky="0" algn="bl" rotWithShape="0" blurRad="101600" dist="38100" dir="8100000">
+            <a:outerShdw blurRad="101600" dist="38100" dir="8100000" algn="bl" rotWithShape="0">
               <a:srgbClr val="000000">
                 <a:alpha val="25000"/>
               </a:srgbClr>
@@ -9906,7 +9676,7 @@
           <a:bodyPr wrap="square" lIns="0" tIns="0" rIns="0" bIns="0" rtlCol="0" anchor="ctr"/>
           <a:lstStyle/>
           <a:p>
-            <a:pPr indent="0" marL="0">
+            <a:pPr marL="0" indent="0">
               <a:buNone/>
             </a:pPr>
             <a:r>
@@ -9970,7 +9740,7 @@
           <a:bodyPr wrap="square" lIns="0" tIns="0" rIns="0" bIns="0" rtlCol="0" anchor="ctr"/>
           <a:lstStyle/>
           <a:p>
-            <a:pPr indent="0" marL="0">
+            <a:pPr marL="0" indent="0">
               <a:buNone/>
             </a:pPr>
             <a:r>
@@ -10034,7 +9804,7 @@
           <a:bodyPr wrap="square" lIns="0" tIns="0" rIns="0" bIns="0" rtlCol="0" anchor="ctr"/>
           <a:lstStyle/>
           <a:p>
-            <a:pPr indent="0" marL="0">
+            <a:pPr marL="0" indent="0">
               <a:buNone/>
             </a:pPr>
             <a:r>
@@ -10098,7 +9868,7 @@
           <a:bodyPr wrap="square" lIns="0" tIns="0" rIns="0" bIns="0" rtlCol="0" anchor="ctr"/>
           <a:lstStyle/>
           <a:p>
-            <a:pPr indent="0" marL="0">
+            <a:pPr marL="0" indent="0">
               <a:buNone/>
             </a:pPr>
             <a:r>
@@ -10140,7 +9910,7 @@
             <a:prstDash val="solid"/>
           </a:ln>
           <a:effectLst>
-            <a:outerShdw sx="100000" sy="100000" kx="0" ky="0" algn="bl" rotWithShape="0" blurRad="101600" dist="38100" dir="8100000">
+            <a:outerShdw blurRad="101600" dist="38100" dir="8100000" algn="bl" rotWithShape="0">
               <a:srgbClr val="000000">
                 <a:alpha val="25000"/>
               </a:srgbClr>
@@ -10194,7 +9964,7 @@
           <a:bodyPr wrap="square" lIns="0" tIns="0" rIns="0" bIns="0" rtlCol="0" anchor="ctr"/>
           <a:lstStyle/>
           <a:p>
-            <a:pPr indent="0" marL="0">
+            <a:pPr marL="0" indent="0">
               <a:buNone/>
             </a:pPr>
             <a:r>
@@ -10258,7 +10028,7 @@
           <a:bodyPr wrap="square" lIns="0" tIns="0" rIns="0" bIns="0" rtlCol="0" anchor="ctr"/>
           <a:lstStyle/>
           <a:p>
-            <a:pPr indent="0" marL="0">
+            <a:pPr marL="0" indent="0">
               <a:buNone/>
             </a:pPr>
             <a:r>
@@ -10322,7 +10092,7 @@
           <a:bodyPr wrap="square" lIns="0" tIns="0" rIns="0" bIns="0" rtlCol="0" anchor="ctr"/>
           <a:lstStyle/>
           <a:p>
-            <a:pPr indent="0" marL="0">
+            <a:pPr marL="0" indent="0">
               <a:buNone/>
             </a:pPr>
             <a:r>
@@ -10386,7 +10156,7 @@
           <a:bodyPr wrap="square" lIns="0" tIns="0" rIns="0" bIns="0" rtlCol="0" anchor="ctr"/>
           <a:lstStyle/>
           <a:p>
-            <a:pPr indent="0" marL="0">
+            <a:pPr marL="0" indent="0">
               <a:buNone/>
             </a:pPr>
             <a:r>
@@ -10428,7 +10198,7 @@
             <a:prstDash val="solid"/>
           </a:ln>
           <a:effectLst>
-            <a:outerShdw sx="100000" sy="100000" kx="0" ky="0" algn="bl" rotWithShape="0" blurRad="101600" dist="38100" dir="8100000">
+            <a:outerShdw blurRad="101600" dist="38100" dir="8100000" algn="bl" rotWithShape="0">
               <a:srgbClr val="000000">
                 <a:alpha val="25000"/>
               </a:srgbClr>
@@ -10482,7 +10252,7 @@
           <a:bodyPr wrap="square" lIns="0" tIns="0" rIns="0" bIns="0" rtlCol="0" anchor="ctr"/>
           <a:lstStyle/>
           <a:p>
-            <a:pPr indent="0" marL="0">
+            <a:pPr marL="0" indent="0">
               <a:buNone/>
             </a:pPr>
             <a:r>
@@ -10546,7 +10316,7 @@
           <a:bodyPr wrap="square" lIns="0" tIns="0" rIns="0" bIns="0" rtlCol="0" anchor="ctr"/>
           <a:lstStyle/>
           <a:p>
-            <a:pPr indent="0" marL="0">
+            <a:pPr marL="0" indent="0">
               <a:buNone/>
             </a:pPr>
             <a:r>
@@ -10610,7 +10380,7 @@
           <a:bodyPr wrap="square" lIns="0" tIns="0" rIns="0" bIns="0" rtlCol="0" anchor="ctr"/>
           <a:lstStyle/>
           <a:p>
-            <a:pPr indent="0" marL="0">
+            <a:pPr marL="0" indent="0">
               <a:buNone/>
             </a:pPr>
             <a:r>
@@ -10674,7 +10444,7 @@
           <a:bodyPr wrap="square" lIns="0" tIns="0" rIns="0" bIns="0" rtlCol="0" anchor="ctr"/>
           <a:lstStyle/>
           <a:p>
-            <a:pPr indent="0" marL="0">
+            <a:pPr marL="0" indent="0">
               <a:buNone/>
             </a:pPr>
             <a:r>
@@ -10708,6 +10478,7 @@
         <a:solidFill>
           <a:srgbClr val="0D1B2A"/>
         </a:solidFill>
+        <a:effectLst/>
       </p:bgPr>
     </p:bg>
     <p:spTree>
@@ -10770,7 +10541,7 @@
           <a:bodyPr wrap="square" lIns="0" tIns="0" rIns="0" bIns="0" rtlCol="0" anchor="ctr"/>
           <a:lstStyle/>
           <a:p>
-            <a:pPr indent="0" marL="0">
+            <a:pPr marL="0" indent="0">
               <a:buNone/>
             </a:pPr>
             <a:r>
@@ -10809,7 +10580,7 @@
           <a:bodyPr wrap="square" lIns="0" tIns="0" rIns="0" bIns="0" rtlCol="0" anchor="ctr"/>
           <a:lstStyle/>
           <a:p>
-            <a:pPr indent="0" marL="0">
+            <a:pPr marL="0" indent="0">
               <a:buNone/>
             </a:pPr>
             <a:r>
@@ -10851,7 +10622,7 @@
             <a:prstDash val="solid"/>
           </a:ln>
           <a:effectLst>
-            <a:outerShdw sx="100000" sy="100000" kx="0" ky="0" algn="bl" rotWithShape="0" blurRad="101600" dist="38100" dir="8100000">
+            <a:outerShdw blurRad="101600" dist="38100" dir="8100000" algn="bl" rotWithShape="0">
               <a:srgbClr val="000000">
                 <a:alpha val="25000"/>
               </a:srgbClr>
@@ -10905,7 +10676,7 @@
           <a:bodyPr wrap="square" lIns="0" tIns="0" rIns="0" bIns="0" rtlCol="0" anchor="ctr"/>
           <a:lstStyle/>
           <a:p>
-            <a:pPr algn="ctr" indent="0" marL="0">
+            <a:pPr marL="0" indent="0" algn="ctr">
               <a:buNone/>
             </a:pPr>
             <a:r>
@@ -10941,7 +10712,7 @@
           <a:bodyPr wrap="square" lIns="0" tIns="0" rIns="0" bIns="0" rtlCol="0" anchor="ctr"/>
           <a:lstStyle/>
           <a:p>
-            <a:pPr algn="ctr" indent="0" marL="0">
+            <a:pPr marL="0" indent="0" algn="ctr">
               <a:buNone/>
             </a:pPr>
             <a:r>
@@ -10980,7 +10751,7 @@
           <a:bodyPr wrap="square" lIns="0" tIns="0" rIns="0" bIns="0" rtlCol="0" anchor="ctr"/>
           <a:lstStyle/>
           <a:p>
-            <a:pPr algn="ctr" indent="0" marL="0">
+            <a:pPr marL="0" indent="0" algn="ctr">
               <a:buNone/>
             </a:pPr>
             <a:r>
@@ -11022,7 +10793,7 @@
             <a:prstDash val="solid"/>
           </a:ln>
           <a:effectLst>
-            <a:outerShdw sx="100000" sy="100000" kx="0" ky="0" algn="bl" rotWithShape="0" blurRad="101600" dist="38100" dir="8100000">
+            <a:outerShdw blurRad="101600" dist="38100" dir="8100000" algn="bl" rotWithShape="0">
               <a:srgbClr val="000000">
                 <a:alpha val="25000"/>
               </a:srgbClr>
@@ -11076,7 +10847,7 @@
           <a:bodyPr wrap="square" lIns="0" tIns="0" rIns="0" bIns="0" rtlCol="0" anchor="ctr"/>
           <a:lstStyle/>
           <a:p>
-            <a:pPr algn="ctr" indent="0" marL="0">
+            <a:pPr marL="0" indent="0" algn="ctr">
               <a:buNone/>
             </a:pPr>
             <a:r>
@@ -11112,7 +10883,7 @@
           <a:bodyPr wrap="square" lIns="0" tIns="0" rIns="0" bIns="0" rtlCol="0" anchor="ctr"/>
           <a:lstStyle/>
           <a:p>
-            <a:pPr algn="ctr" indent="0" marL="0">
+            <a:pPr marL="0" indent="0" algn="ctr">
               <a:buNone/>
             </a:pPr>
             <a:r>
@@ -11151,7 +10922,7 @@
           <a:bodyPr wrap="square" lIns="0" tIns="0" rIns="0" bIns="0" rtlCol="0" anchor="ctr"/>
           <a:lstStyle/>
           <a:p>
-            <a:pPr algn="ctr" indent="0" marL="0">
+            <a:pPr marL="0" indent="0" algn="ctr">
               <a:buNone/>
             </a:pPr>
             <a:r>
@@ -11193,7 +10964,7 @@
             <a:prstDash val="solid"/>
           </a:ln>
           <a:effectLst>
-            <a:outerShdw sx="100000" sy="100000" kx="0" ky="0" algn="bl" rotWithShape="0" blurRad="101600" dist="38100" dir="8100000">
+            <a:outerShdw blurRad="101600" dist="38100" dir="8100000" algn="bl" rotWithShape="0">
               <a:srgbClr val="000000">
                 <a:alpha val="25000"/>
               </a:srgbClr>
@@ -11247,7 +11018,7 @@
           <a:bodyPr wrap="square" lIns="0" tIns="0" rIns="0" bIns="0" rtlCol="0" anchor="ctr"/>
           <a:lstStyle/>
           <a:p>
-            <a:pPr algn="ctr" indent="0" marL="0">
+            <a:pPr marL="0" indent="0" algn="ctr">
               <a:buNone/>
             </a:pPr>
             <a:r>
@@ -11283,7 +11054,7 @@
           <a:bodyPr wrap="square" lIns="0" tIns="0" rIns="0" bIns="0" rtlCol="0" anchor="ctr"/>
           <a:lstStyle/>
           <a:p>
-            <a:pPr algn="ctr" indent="0" marL="0">
+            <a:pPr marL="0" indent="0" algn="ctr">
               <a:buNone/>
             </a:pPr>
             <a:r>
@@ -11322,7 +11093,7 @@
           <a:bodyPr wrap="square" lIns="0" tIns="0" rIns="0" bIns="0" rtlCol="0" anchor="ctr"/>
           <a:lstStyle/>
           <a:p>
-            <a:pPr algn="ctr" indent="0" marL="0">
+            <a:pPr marL="0" indent="0" algn="ctr">
               <a:buNone/>
             </a:pPr>
             <a:r>
@@ -11360,7 +11131,7 @@
               <a:srgbClr val="00D4FF"/>
             </a:solidFill>
             <a:prstDash val="solid"/>
-            <a:tailEnd type="open"/>
+            <a:tailEnd type="none"/>
           </a:ln>
         </p:spPr>
       </p:sp>
@@ -11385,7 +11156,7 @@
           <a:bodyPr wrap="square" lIns="0" tIns="0" rIns="0" bIns="0" rtlCol="0" anchor="ctr"/>
           <a:lstStyle/>
           <a:p>
-            <a:pPr algn="ctr" indent="0" marL="0">
+            <a:pPr marL="0" indent="0" algn="ctr">
               <a:buNone/>
             </a:pPr>
             <a:r>
@@ -11402,7 +11173,7 @@
             <a:endParaRPr lang="en-US" sz="1000" dirty="0"/>
           </a:p>
           <a:p>
-            <a:pPr algn="ctr" indent="0" marL="0">
+            <a:pPr marL="0" indent="0" algn="ctr">
               <a:buNone/>
             </a:pPr>
             <a:r>
@@ -11440,7 +11211,7 @@
               <a:srgbClr val="00D4FF"/>
             </a:solidFill>
             <a:prstDash val="solid"/>
-            <a:tailEnd type="open"/>
+            <a:tailEnd type="none"/>
           </a:ln>
         </p:spPr>
       </p:sp>
@@ -11465,7 +11236,7 @@
           <a:bodyPr wrap="square" lIns="0" tIns="0" rIns="0" bIns="0" rtlCol="0" anchor="ctr"/>
           <a:lstStyle/>
           <a:p>
-            <a:pPr algn="ctr" indent="0" marL="0">
+            <a:pPr marL="0" indent="0" algn="ctr">
               <a:buNone/>
             </a:pPr>
             <a:r>
@@ -11482,7 +11253,7 @@
             <a:endParaRPr lang="en-US" sz="1000" dirty="0"/>
           </a:p>
           <a:p>
-            <a:pPr algn="ctr" indent="0" marL="0">
+            <a:pPr marL="0" indent="0" algn="ctr">
               <a:buNone/>
             </a:pPr>
             <a:r>
@@ -11509,7 +11280,7 @@
         <p:spPr>
           <a:xfrm>
             <a:off x="3447288" y="2514600"/>
-            <a:ext cx="-1005840" cy="0"/>
+            <a:ext cx="0" cy="0"/>
           </a:xfrm>
           <a:prstGeom prst="line">
             <a:avLst/>
@@ -11520,7 +11291,7 @@
               <a:srgbClr val="10B981"/>
             </a:solidFill>
             <a:prstDash val="solid"/>
-            <a:tailEnd type="open"/>
+            <a:tailEnd type="none"/>
           </a:ln>
         </p:spPr>
       </p:sp>
@@ -11545,7 +11316,7 @@
           <a:bodyPr wrap="square" lIns="0" tIns="0" rIns="0" bIns="0" rtlCol="0" anchor="ctr"/>
           <a:lstStyle/>
           <a:p>
-            <a:pPr algn="ctr" indent="0" marL="0">
+            <a:pPr marL="0" indent="0" algn="ctr">
               <a:buNone/>
             </a:pPr>
             <a:r>
@@ -11572,7 +11343,7 @@
         <p:spPr>
           <a:xfrm>
             <a:off x="6647688" y="2514600"/>
-            <a:ext cx="-1005840" cy="0"/>
+            <a:ext cx="0" cy="0"/>
           </a:xfrm>
           <a:prstGeom prst="line">
             <a:avLst/>
@@ -11583,7 +11354,7 @@
               <a:srgbClr val="10B981"/>
             </a:solidFill>
             <a:prstDash val="solid"/>
-            <a:tailEnd type="open"/>
+            <a:tailEnd type="none"/>
           </a:ln>
         </p:spPr>
       </p:sp>
@@ -11608,7 +11379,7 @@
           <a:bodyPr wrap="square" lIns="0" tIns="0" rIns="0" bIns="0" rtlCol="0" anchor="ctr"/>
           <a:lstStyle/>
           <a:p>
-            <a:pPr algn="ctr" indent="0" marL="0">
+            <a:pPr marL="0" indent="0" algn="ctr">
               <a:buNone/>
             </a:pPr>
             <a:r>
@@ -11650,7 +11421,7 @@
             <a:prstDash val="solid"/>
           </a:ln>
           <a:effectLst>
-            <a:outerShdw sx="100000" sy="100000" kx="0" ky="0" algn="bl" rotWithShape="0" blurRad="101600" dist="38100" dir="8100000">
+            <a:outerShdw blurRad="101600" dist="38100" dir="8100000" algn="bl" rotWithShape="0">
               <a:srgbClr val="000000">
                 <a:alpha val="25000"/>
               </a:srgbClr>
@@ -11679,7 +11450,7 @@
           <a:bodyPr wrap="square" lIns="0" tIns="0" rIns="0" bIns="0" rtlCol="0" anchor="ctr"/>
           <a:lstStyle/>
           <a:p>
-            <a:pPr indent="0" marL="0">
+            <a:pPr marL="0" indent="0">
               <a:buNone/>
             </a:pPr>
             <a:r>
@@ -11718,7 +11489,7 @@
           <a:bodyPr wrap="square" lIns="0" tIns="0" rIns="0" bIns="0" rtlCol="0" anchor="ctr"/>
           <a:lstStyle/>
           <a:p>
-            <a:pPr indent="0" marL="0">
+            <a:pPr marL="0" indent="0">
               <a:buNone/>
             </a:pPr>
             <a:r>
@@ -11735,7 +11506,7 @@
             <a:endParaRPr lang="en-US" sz="1150" dirty="0"/>
           </a:p>
           <a:p>
-            <a:pPr indent="0" marL="0">
+            <a:pPr marL="0" indent="0">
               <a:buNone/>
             </a:pPr>
             <a:r>
@@ -11752,7 +11523,7 @@
             <a:endParaRPr lang="en-US" sz="1150" dirty="0"/>
           </a:p>
           <a:p>
-            <a:pPr indent="0" marL="0">
+            <a:pPr marL="0" indent="0">
               <a:buNone/>
             </a:pPr>
             <a:r>
@@ -11769,7 +11540,7 @@
             <a:endParaRPr lang="en-US" sz="1150" dirty="0"/>
           </a:p>
           <a:p>
-            <a:pPr indent="0" marL="0">
+            <a:pPr marL="0" indent="0">
               <a:buNone/>
             </a:pPr>
             <a:r>
@@ -11786,7 +11557,7 @@
             <a:endParaRPr lang="en-US" sz="1150" dirty="0"/>
           </a:p>
           <a:p>
-            <a:pPr indent="0" marL="0">
+            <a:pPr marL="0" indent="0">
               <a:buNone/>
             </a:pPr>
             <a:r>
@@ -11828,7 +11599,7 @@
             <a:prstDash val="solid"/>
           </a:ln>
           <a:effectLst>
-            <a:outerShdw sx="100000" sy="100000" kx="0" ky="0" algn="bl" rotWithShape="0" blurRad="101600" dist="38100" dir="8100000">
+            <a:outerShdw blurRad="101600" dist="38100" dir="8100000" algn="bl" rotWithShape="0">
               <a:srgbClr val="000000">
                 <a:alpha val="25000"/>
               </a:srgbClr>
@@ -11857,7 +11628,7 @@
           <a:bodyPr wrap="square" lIns="0" tIns="0" rIns="0" bIns="0" rtlCol="0" anchor="ctr"/>
           <a:lstStyle/>
           <a:p>
-            <a:pPr indent="0" marL="0">
+            <a:pPr marL="0" indent="0">
               <a:buNone/>
             </a:pPr>
             <a:r>
@@ -11896,7 +11667,7 @@
           <a:bodyPr wrap="square" lIns="0" tIns="0" rIns="0" bIns="0" rtlCol="0" anchor="ctr"/>
           <a:lstStyle/>
           <a:p>
-            <a:pPr indent="0" marL="0">
+            <a:pPr marL="0" indent="0">
               <a:buNone/>
             </a:pPr>
             <a:r>
@@ -11913,7 +11684,7 @@
             <a:endParaRPr lang="en-US" sz="1150" dirty="0"/>
           </a:p>
           <a:p>
-            <a:pPr indent="0" marL="0">
+            <a:pPr marL="0" indent="0">
               <a:buNone/>
             </a:pPr>
             <a:r>
@@ -11930,7 +11701,7 @@
             <a:endParaRPr lang="en-US" sz="1150" dirty="0"/>
           </a:p>
           <a:p>
-            <a:pPr indent="0" marL="0">
+            <a:pPr marL="0" indent="0">
               <a:buNone/>
             </a:pPr>
             <a:r>
@@ -11947,7 +11718,7 @@
             <a:endParaRPr lang="en-US" sz="1150" dirty="0"/>
           </a:p>
           <a:p>
-            <a:pPr indent="0" marL="0">
+            <a:pPr marL="0" indent="0">
               <a:buNone/>
             </a:pPr>
             <a:r>
@@ -11964,7 +11735,7 @@
             <a:endParaRPr lang="en-US" sz="1150" dirty="0"/>
           </a:p>
           <a:p>
-            <a:pPr indent="0" marL="0">
+            <a:pPr marL="0" indent="0">
               <a:buNone/>
             </a:pPr>
             <a:r>
@@ -11998,6 +11769,7 @@
         <a:solidFill>
           <a:srgbClr val="0D1B2A"/>
         </a:solidFill>
+        <a:effectLst/>
       </p:bgPr>
     </p:bg>
     <p:spTree>
@@ -12060,7 +11832,7 @@
           <a:bodyPr wrap="square" lIns="0" tIns="0" rIns="0" bIns="0" rtlCol="0" anchor="ctr"/>
           <a:lstStyle/>
           <a:p>
-            <a:pPr indent="0" marL="0">
+            <a:pPr marL="0" indent="0">
               <a:buNone/>
             </a:pPr>
             <a:r>
@@ -12099,7 +11871,7 @@
           <a:bodyPr wrap="square" lIns="0" tIns="0" rIns="0" bIns="0" rtlCol="0" anchor="ctr"/>
           <a:lstStyle/>
           <a:p>
-            <a:pPr indent="0" marL="0">
+            <a:pPr marL="0" indent="0">
               <a:buNone/>
             </a:pPr>
             <a:r>
@@ -12163,7 +11935,7 @@
           <a:bodyPr wrap="square" lIns="0" tIns="0" rIns="0" bIns="0" rtlCol="0" anchor="ctr"/>
           <a:lstStyle/>
           <a:p>
-            <a:pPr algn="ctr" indent="0" marL="0">
+            <a:pPr marL="0" indent="0" algn="ctr">
               <a:buNone/>
             </a:pPr>
             <a:r>
@@ -12180,7 +11952,7 @@
             <a:endParaRPr lang="en-US" sz="1050" dirty="0"/>
           </a:p>
           <a:p>
-            <a:pPr algn="ctr" indent="0" marL="0">
+            <a:pPr marL="0" indent="0" algn="ctr">
               <a:buNone/>
             </a:pPr>
             <a:r>
@@ -12244,7 +12016,7 @@
           <a:bodyPr wrap="square" lIns="0" tIns="0" rIns="0" bIns="0" rtlCol="0" anchor="ctr"/>
           <a:lstStyle/>
           <a:p>
-            <a:pPr algn="ctr" indent="0" marL="0">
+            <a:pPr marL="0" indent="0" algn="ctr">
               <a:buNone/>
             </a:pPr>
             <a:r>
@@ -12261,7 +12033,7 @@
             <a:endParaRPr lang="en-US" sz="1050" dirty="0"/>
           </a:p>
           <a:p>
-            <a:pPr algn="ctr" indent="0" marL="0">
+            <a:pPr marL="0" indent="0" algn="ctr">
               <a:buNone/>
             </a:pPr>
             <a:r>
@@ -12325,7 +12097,7 @@
           <a:bodyPr wrap="square" lIns="0" tIns="0" rIns="0" bIns="0" rtlCol="0" anchor="ctr"/>
           <a:lstStyle/>
           <a:p>
-            <a:pPr algn="ctr" indent="0" marL="0">
+            <a:pPr marL="0" indent="0" algn="ctr">
               <a:buNone/>
             </a:pPr>
             <a:r>
@@ -12342,7 +12114,7 @@
             <a:endParaRPr lang="en-US" sz="1050" dirty="0"/>
           </a:p>
           <a:p>
-            <a:pPr algn="ctr" indent="0" marL="0">
+            <a:pPr marL="0" indent="0" algn="ctr">
               <a:buNone/>
             </a:pPr>
             <a:r>
@@ -12381,7 +12153,7 @@
           <a:bodyPr wrap="square" lIns="0" tIns="0" rIns="0" bIns="0" rtlCol="0" anchor="ctr"/>
           <a:lstStyle/>
           <a:p>
-            <a:pPr algn="ctr" indent="0" marL="0">
+            <a:pPr marL="0" indent="0" algn="ctr">
               <a:buNone/>
             </a:pPr>
             <a:r>
@@ -12423,7 +12195,7 @@
             <a:prstDash val="solid"/>
           </a:ln>
           <a:effectLst>
-            <a:outerShdw sx="100000" sy="100000" kx="0" ky="0" algn="bl" rotWithShape="0" blurRad="101600" dist="38100" dir="8100000">
+            <a:outerShdw blurRad="101600" dist="38100" dir="8100000" algn="bl" rotWithShape="0">
               <a:srgbClr val="000000">
                 <a:alpha val="25000"/>
               </a:srgbClr>
@@ -12477,7 +12249,7 @@
           <a:bodyPr wrap="square" lIns="0" tIns="0" rIns="0" bIns="0" rtlCol="0" anchor="ctr"/>
           <a:lstStyle/>
           <a:p>
-            <a:pPr algn="ctr" indent="0" marL="0">
+            <a:pPr marL="0" indent="0" algn="ctr">
               <a:buNone/>
             </a:pPr>
             <a:r>
@@ -12513,7 +12285,7 @@
           <a:bodyPr wrap="square" lIns="0" tIns="0" rIns="0" bIns="0" rtlCol="0" anchor="ctr"/>
           <a:lstStyle/>
           <a:p>
-            <a:pPr algn="ctr" indent="0" marL="0">
+            <a:pPr marL="0" indent="0" algn="ctr">
               <a:buNone/>
             </a:pPr>
             <a:r>
@@ -12552,7 +12324,7 @@
           <a:bodyPr wrap="square" lIns="0" tIns="0" rIns="0" bIns="0" rtlCol="0" anchor="ctr"/>
           <a:lstStyle/>
           <a:p>
-            <a:pPr algn="ctr" indent="0" marL="0">
+            <a:pPr marL="0" indent="0" algn="ctr">
               <a:buNone/>
             </a:pPr>
             <a:r>
@@ -12616,7 +12388,7 @@
           <a:bodyPr wrap="square" lIns="0" tIns="0" rIns="0" bIns="0" rtlCol="0" anchor="ctr"/>
           <a:lstStyle/>
           <a:p>
-            <a:pPr indent="0" marL="0">
+            <a:pPr marL="0" indent="0">
               <a:buNone/>
             </a:pPr>
             <a:r>
@@ -12680,7 +12452,7 @@
           <a:bodyPr wrap="square" lIns="0" tIns="0" rIns="0" bIns="0" rtlCol="0" anchor="ctr"/>
           <a:lstStyle/>
           <a:p>
-            <a:pPr indent="0" marL="0">
+            <a:pPr marL="0" indent="0">
               <a:buNone/>
             </a:pPr>
             <a:r>
@@ -12744,7 +12516,7 @@
           <a:bodyPr wrap="square" lIns="0" tIns="0" rIns="0" bIns="0" rtlCol="0" anchor="ctr"/>
           <a:lstStyle/>
           <a:p>
-            <a:pPr indent="0" marL="0">
+            <a:pPr marL="0" indent="0">
               <a:buNone/>
             </a:pPr>
             <a:r>
@@ -12808,7 +12580,7 @@
           <a:bodyPr wrap="square" lIns="0" tIns="0" rIns="0" bIns="0" rtlCol="0" anchor="ctr"/>
           <a:lstStyle/>
           <a:p>
-            <a:pPr algn="ctr" indent="0" marL="0">
+            <a:pPr marL="0" indent="0" algn="ctr">
               <a:buNone/>
             </a:pPr>
             <a:r>
@@ -12850,7 +12622,7 @@
             <a:prstDash val="solid"/>
           </a:ln>
           <a:effectLst>
-            <a:outerShdw sx="100000" sy="100000" kx="0" ky="0" algn="bl" rotWithShape="0" blurRad="101600" dist="38100" dir="8100000">
+            <a:outerShdw blurRad="101600" dist="38100" dir="8100000" algn="bl" rotWithShape="0">
               <a:srgbClr val="000000">
                 <a:alpha val="25000"/>
               </a:srgbClr>
@@ -12904,7 +12676,7 @@
           <a:bodyPr wrap="square" lIns="0" tIns="0" rIns="0" bIns="0" rtlCol="0" anchor="ctr"/>
           <a:lstStyle/>
           <a:p>
-            <a:pPr algn="ctr" indent="0" marL="0">
+            <a:pPr marL="0" indent="0" algn="ctr">
               <a:buNone/>
             </a:pPr>
             <a:r>
@@ -12940,7 +12712,7 @@
           <a:bodyPr wrap="square" lIns="0" tIns="0" rIns="0" bIns="0" rtlCol="0" anchor="ctr"/>
           <a:lstStyle/>
           <a:p>
-            <a:pPr algn="ctr" indent="0" marL="0">
+            <a:pPr marL="0" indent="0" algn="ctr">
               <a:buNone/>
             </a:pPr>
             <a:r>
@@ -12979,7 +12751,7 @@
           <a:bodyPr wrap="square" lIns="0" tIns="0" rIns="0" bIns="0" rtlCol="0" anchor="ctr"/>
           <a:lstStyle/>
           <a:p>
-            <a:pPr algn="ctr" indent="0" marL="0">
+            <a:pPr marL="0" indent="0" algn="ctr">
               <a:buNone/>
             </a:pPr>
             <a:r>
@@ -13043,7 +12815,7 @@
           <a:bodyPr wrap="square" lIns="0" tIns="0" rIns="0" bIns="0" rtlCol="0" anchor="ctr"/>
           <a:lstStyle/>
           <a:p>
-            <a:pPr indent="0" marL="0">
+            <a:pPr marL="0" indent="0">
               <a:buNone/>
             </a:pPr>
             <a:r>
@@ -13107,7 +12879,7 @@
           <a:bodyPr wrap="square" lIns="0" tIns="0" rIns="0" bIns="0" rtlCol="0" anchor="ctr"/>
           <a:lstStyle/>
           <a:p>
-            <a:pPr indent="0" marL="0">
+            <a:pPr marL="0" indent="0">
               <a:buNone/>
             </a:pPr>
             <a:r>
@@ -13171,7 +12943,7 @@
           <a:bodyPr wrap="square" lIns="0" tIns="0" rIns="0" bIns="0" rtlCol="0" anchor="ctr"/>
           <a:lstStyle/>
           <a:p>
-            <a:pPr indent="0" marL="0">
+            <a:pPr marL="0" indent="0">
               <a:buNone/>
             </a:pPr>
             <a:r>
@@ -13235,7 +13007,7 @@
           <a:bodyPr wrap="square" lIns="0" tIns="0" rIns="0" bIns="0" rtlCol="0" anchor="ctr"/>
           <a:lstStyle/>
           <a:p>
-            <a:pPr algn="ctr" indent="0" marL="0">
+            <a:pPr marL="0" indent="0" algn="ctr">
               <a:buNone/>
             </a:pPr>
             <a:r>
@@ -13277,7 +13049,7 @@
             <a:prstDash val="solid"/>
           </a:ln>
           <a:effectLst>
-            <a:outerShdw sx="100000" sy="100000" kx="0" ky="0" algn="bl" rotWithShape="0" blurRad="101600" dist="38100" dir="8100000">
+            <a:outerShdw blurRad="101600" dist="38100" dir="8100000" algn="bl" rotWithShape="0">
               <a:srgbClr val="000000">
                 <a:alpha val="25000"/>
               </a:srgbClr>
@@ -13331,7 +13103,7 @@
           <a:bodyPr wrap="square" lIns="0" tIns="0" rIns="0" bIns="0" rtlCol="0" anchor="ctr"/>
           <a:lstStyle/>
           <a:p>
-            <a:pPr algn="ctr" indent="0" marL="0">
+            <a:pPr marL="0" indent="0" algn="ctr">
               <a:buNone/>
             </a:pPr>
             <a:r>
@@ -13367,7 +13139,7 @@
           <a:bodyPr wrap="square" lIns="0" tIns="0" rIns="0" bIns="0" rtlCol="0" anchor="ctr"/>
           <a:lstStyle/>
           <a:p>
-            <a:pPr algn="ctr" indent="0" marL="0">
+            <a:pPr marL="0" indent="0" algn="ctr">
               <a:buNone/>
             </a:pPr>
             <a:r>
@@ -13406,7 +13178,7 @@
           <a:bodyPr wrap="square" lIns="0" tIns="0" rIns="0" bIns="0" rtlCol="0" anchor="ctr"/>
           <a:lstStyle/>
           <a:p>
-            <a:pPr algn="ctr" indent="0" marL="0">
+            <a:pPr marL="0" indent="0" algn="ctr">
               <a:buNone/>
             </a:pPr>
             <a:r>
@@ -13470,7 +13242,7 @@
           <a:bodyPr wrap="square" lIns="0" tIns="0" rIns="0" bIns="0" rtlCol="0" anchor="ctr"/>
           <a:lstStyle/>
           <a:p>
-            <a:pPr indent="0" marL="0">
+            <a:pPr marL="0" indent="0">
               <a:buNone/>
             </a:pPr>
             <a:r>
@@ -13534,7 +13306,7 @@
           <a:bodyPr wrap="square" lIns="0" tIns="0" rIns="0" bIns="0" rtlCol="0" anchor="ctr"/>
           <a:lstStyle/>
           <a:p>
-            <a:pPr indent="0" marL="0">
+            <a:pPr marL="0" indent="0">
               <a:buNone/>
             </a:pPr>
             <a:r>
@@ -13598,7 +13370,7 @@
           <a:bodyPr wrap="square" lIns="0" tIns="0" rIns="0" bIns="0" rtlCol="0" anchor="ctr"/>
           <a:lstStyle/>
           <a:p>
-            <a:pPr indent="0" marL="0">
+            <a:pPr marL="0" indent="0">
               <a:buNone/>
             </a:pPr>
             <a:r>
@@ -13662,7 +13434,7 @@
           <a:bodyPr wrap="square" lIns="0" tIns="0" rIns="0" bIns="0" rtlCol="0" anchor="ctr"/>
           <a:lstStyle/>
           <a:p>
-            <a:pPr algn="ctr" indent="0" marL="0">
+            <a:pPr marL="0" indent="0" algn="ctr">
               <a:buNone/>
             </a:pPr>
             <a:r>
@@ -13696,6 +13468,7 @@
         <a:solidFill>
           <a:srgbClr val="0D1B2A"/>
         </a:solidFill>
+        <a:effectLst/>
       </p:bgPr>
     </p:bg>
     <p:spTree>
@@ -13758,7 +13531,7 @@
           <a:bodyPr wrap="square" lIns="0" tIns="0" rIns="0" bIns="0" rtlCol="0" anchor="ctr"/>
           <a:lstStyle/>
           <a:p>
-            <a:pPr indent="0" marL="0">
+            <a:pPr marL="0" indent="0">
               <a:buNone/>
             </a:pPr>
             <a:r>
@@ -13797,7 +13570,7 @@
           <a:bodyPr wrap="square" lIns="0" tIns="0" rIns="0" bIns="0" rtlCol="0" anchor="ctr"/>
           <a:lstStyle/>
           <a:p>
-            <a:pPr indent="0" marL="0">
+            <a:pPr marL="0" indent="0">
               <a:buNone/>
             </a:pPr>
             <a:r>
@@ -13836,7 +13609,7 @@
           <a:bodyPr wrap="square" lIns="0" tIns="0" rIns="0" bIns="0" rtlCol="0" anchor="ctr"/>
           <a:lstStyle/>
           <a:p>
-            <a:pPr algn="ctr" indent="0" marL="0">
+            <a:pPr marL="0" indent="0" algn="ctr">
               <a:buNone/>
             </a:pPr>
             <a:r>
@@ -13872,7 +13645,7 @@
           <a:bodyPr wrap="square" lIns="0" tIns="0" rIns="0" bIns="0" rtlCol="0" anchor="ctr"/>
           <a:lstStyle/>
           <a:p>
-            <a:pPr algn="ctr" indent="0" marL="0">
+            <a:pPr marL="0" indent="0" algn="ctr">
               <a:buNone/>
             </a:pPr>
             <a:r>
@@ -13914,7 +13687,7 @@
             <a:prstDash val="solid"/>
           </a:ln>
           <a:effectLst>
-            <a:outerShdw sx="100000" sy="100000" kx="0" ky="0" algn="bl" rotWithShape="0" blurRad="101600" dist="38100" dir="8100000">
+            <a:outerShdw blurRad="101600" dist="38100" dir="8100000" algn="bl" rotWithShape="0">
               <a:srgbClr val="000000">
                 <a:alpha val="25000"/>
               </a:srgbClr>
@@ -13968,7 +13741,7 @@
           <a:bodyPr wrap="square" lIns="0" tIns="0" rIns="0" bIns="0" rtlCol="0" anchor="ctr"/>
           <a:lstStyle/>
           <a:p>
-            <a:pPr algn="ctr" indent="0" marL="0">
+            <a:pPr marL="0" indent="0" algn="ctr">
               <a:buNone/>
             </a:pPr>
             <a:r>
@@ -13985,7 +13758,7 @@
             <a:endParaRPr lang="en-US" sz="1150" dirty="0"/>
           </a:p>
           <a:p>
-            <a:pPr algn="ctr" indent="0" marL="0">
+            <a:pPr marL="0" indent="0" algn="ctr">
               <a:buNone/>
             </a:pPr>
             <a:r>
@@ -14023,7 +13796,7 @@
               <a:srgbClr val="00D4FF"/>
             </a:solidFill>
             <a:prstDash val="solid"/>
-            <a:tailEnd type="open"/>
+            <a:tailEnd type="none"/>
           </a:ln>
         </p:spPr>
       </p:sp>
@@ -14051,7 +13824,7 @@
             <a:prstDash val="solid"/>
           </a:ln>
           <a:effectLst>
-            <a:outerShdw sx="100000" sy="100000" kx="0" ky="0" algn="bl" rotWithShape="0" blurRad="101600" dist="38100" dir="8100000">
+            <a:outerShdw blurRad="101600" dist="38100" dir="8100000" algn="bl" rotWithShape="0">
               <a:srgbClr val="000000">
                 <a:alpha val="25000"/>
               </a:srgbClr>
@@ -14105,7 +13878,7 @@
           <a:bodyPr wrap="square" lIns="0" tIns="0" rIns="0" bIns="0" rtlCol="0" anchor="ctr"/>
           <a:lstStyle/>
           <a:p>
-            <a:pPr algn="ctr" indent="0" marL="0">
+            <a:pPr marL="0" indent="0" algn="ctr">
               <a:buNone/>
             </a:pPr>
             <a:r>
@@ -14122,7 +13895,7 @@
             <a:endParaRPr lang="en-US" sz="1150" dirty="0"/>
           </a:p>
           <a:p>
-            <a:pPr algn="ctr" indent="0" marL="0">
+            <a:pPr marL="0" indent="0" algn="ctr">
               <a:buNone/>
             </a:pPr>
             <a:r>
@@ -14160,7 +13933,7 @@
               <a:srgbClr val="00D4FF"/>
             </a:solidFill>
             <a:prstDash val="solid"/>
-            <a:tailEnd type="open"/>
+            <a:tailEnd type="none"/>
           </a:ln>
         </p:spPr>
       </p:sp>
@@ -14188,7 +13961,7 @@
             <a:prstDash val="solid"/>
           </a:ln>
           <a:effectLst>
-            <a:outerShdw sx="100000" sy="100000" kx="0" ky="0" algn="bl" rotWithShape="0" blurRad="101600" dist="38100" dir="8100000">
+            <a:outerShdw blurRad="101600" dist="38100" dir="8100000" algn="bl" rotWithShape="0">
               <a:srgbClr val="000000">
                 <a:alpha val="25000"/>
               </a:srgbClr>
@@ -14242,7 +14015,7 @@
           <a:bodyPr wrap="square" lIns="0" tIns="0" rIns="0" bIns="0" rtlCol="0" anchor="ctr"/>
           <a:lstStyle/>
           <a:p>
-            <a:pPr algn="ctr" indent="0" marL="0">
+            <a:pPr marL="0" indent="0" algn="ctr">
               <a:buNone/>
             </a:pPr>
             <a:r>
@@ -14259,7 +14032,7 @@
             <a:endParaRPr lang="en-US" sz="1100" dirty="0"/>
           </a:p>
           <a:p>
-            <a:pPr algn="ctr" indent="0" marL="0">
+            <a:pPr marL="0" indent="0" algn="ctr">
               <a:buNone/>
             </a:pPr>
             <a:r>
@@ -14297,7 +14070,7 @@
               <a:srgbClr val="00D4FF"/>
             </a:solidFill>
             <a:prstDash val="solid"/>
-            <a:tailEnd type="open"/>
+            <a:tailEnd type="none"/>
           </a:ln>
         </p:spPr>
       </p:sp>
@@ -14325,7 +14098,7 @@
             <a:prstDash val="solid"/>
           </a:ln>
           <a:effectLst>
-            <a:outerShdw sx="100000" sy="100000" kx="0" ky="0" algn="bl" rotWithShape="0" blurRad="101600" dist="38100" dir="8100000">
+            <a:outerShdw blurRad="101600" dist="38100" dir="8100000" algn="bl" rotWithShape="0">
               <a:srgbClr val="000000">
                 <a:alpha val="25000"/>
               </a:srgbClr>
@@ -14379,7 +14152,7 @@
           <a:bodyPr wrap="square" lIns="0" tIns="0" rIns="0" bIns="0" rtlCol="0" anchor="ctr"/>
           <a:lstStyle/>
           <a:p>
-            <a:pPr algn="ctr" indent="0" marL="0">
+            <a:pPr marL="0" indent="0" algn="ctr">
               <a:buNone/>
             </a:pPr>
             <a:r>
@@ -14396,7 +14169,7 @@
             <a:endParaRPr lang="en-US" sz="1100" dirty="0"/>
           </a:p>
           <a:p>
-            <a:pPr algn="ctr" indent="0" marL="0">
+            <a:pPr marL="0" indent="0" algn="ctr">
               <a:buNone/>
             </a:pPr>
             <a:r>
@@ -14434,7 +14207,7 @@
               <a:srgbClr val="00D4FF"/>
             </a:solidFill>
             <a:prstDash val="solid"/>
-            <a:tailEnd type="open"/>
+            <a:tailEnd type="none"/>
           </a:ln>
         </p:spPr>
       </p:sp>
@@ -14462,7 +14235,7 @@
             <a:prstDash val="solid"/>
           </a:ln>
           <a:effectLst>
-            <a:outerShdw sx="100000" sy="100000" kx="0" ky="0" algn="bl" rotWithShape="0" blurRad="101600" dist="38100" dir="8100000">
+            <a:outerShdw blurRad="101600" dist="38100" dir="8100000" algn="bl" rotWithShape="0">
               <a:srgbClr val="000000">
                 <a:alpha val="25000"/>
               </a:srgbClr>
@@ -14516,7 +14289,7 @@
           <a:bodyPr wrap="square" lIns="0" tIns="0" rIns="0" bIns="0" rtlCol="0" anchor="ctr"/>
           <a:lstStyle/>
           <a:p>
-            <a:pPr algn="ctr" indent="0" marL="0">
+            <a:pPr marL="0" indent="0" algn="ctr">
               <a:buNone/>
             </a:pPr>
             <a:r>
@@ -14533,7 +14306,7 @@
             <a:endParaRPr lang="en-US" sz="1100" dirty="0"/>
           </a:p>
           <a:p>
-            <a:pPr algn="ctr" indent="0" marL="0">
+            <a:pPr marL="0" indent="0" algn="ctr">
               <a:buNone/>
             </a:pPr>
             <a:r>
@@ -14571,7 +14344,7 @@
               <a:srgbClr val="10B981"/>
             </a:solidFill>
             <a:prstDash val="solid"/>
-            <a:tailEnd type="open"/>
+            <a:tailEnd type="none"/>
           </a:ln>
         </p:spPr>
       </p:sp>
@@ -14595,7 +14368,7 @@
               <a:srgbClr val="10B981"/>
             </a:solidFill>
             <a:prstDash val="solid"/>
-            <a:tailEnd type="open"/>
+            <a:tailEnd type="none"/>
           </a:ln>
         </p:spPr>
       </p:sp>
@@ -14623,7 +14396,7 @@
             <a:prstDash val="solid"/>
           </a:ln>
           <a:effectLst>
-            <a:outerShdw sx="100000" sy="100000" kx="0" ky="0" algn="bl" rotWithShape="0" blurRad="101600" dist="38100" dir="8100000">
+            <a:outerShdw blurRad="101600" dist="38100" dir="8100000" algn="bl" rotWithShape="0">
               <a:srgbClr val="000000">
                 <a:alpha val="25000"/>
               </a:srgbClr>
@@ -14677,7 +14450,7 @@
           <a:bodyPr wrap="square" lIns="0" tIns="0" rIns="0" bIns="0" rtlCol="0" anchor="ctr"/>
           <a:lstStyle/>
           <a:p>
-            <a:pPr algn="ctr" indent="0" marL="0">
+            <a:pPr marL="0" indent="0" algn="ctr">
               <a:buNone/>
             </a:pPr>
             <a:r>
@@ -14694,7 +14467,7 @@
             <a:endParaRPr lang="en-US" sz="1150" dirty="0"/>
           </a:p>
           <a:p>
-            <a:pPr algn="ctr" indent="0" marL="0">
+            <a:pPr marL="0" indent="0" algn="ctr">
               <a:buNone/>
             </a:pPr>
             <a:r>
@@ -14736,7 +14509,7 @@
             <a:prstDash val="solid"/>
           </a:ln>
           <a:effectLst>
-            <a:outerShdw sx="100000" sy="100000" kx="0" ky="0" algn="bl" rotWithShape="0" blurRad="101600" dist="38100" dir="8100000">
+            <a:outerShdw blurRad="101600" dist="38100" dir="8100000" algn="bl" rotWithShape="0">
               <a:srgbClr val="000000">
                 <a:alpha val="25000"/>
               </a:srgbClr>
@@ -14790,7 +14563,7 @@
           <a:bodyPr wrap="square" lIns="0" tIns="0" rIns="0" bIns="0" rtlCol="0" anchor="ctr"/>
           <a:lstStyle/>
           <a:p>
-            <a:pPr algn="ctr" indent="0" marL="0">
+            <a:pPr marL="0" indent="0" algn="ctr">
               <a:buNone/>
             </a:pPr>
             <a:r>
@@ -14807,7 +14580,7 @@
             <a:endParaRPr lang="en-US" sz="1150" dirty="0"/>
           </a:p>
           <a:p>
-            <a:pPr algn="ctr" indent="0" marL="0">
+            <a:pPr marL="0" indent="0" algn="ctr">
               <a:buNone/>
             </a:pPr>
             <a:r>
@@ -14849,7 +14622,7 @@
             <a:prstDash val="solid"/>
           </a:ln>
           <a:effectLst>
-            <a:outerShdw sx="100000" sy="100000" kx="0" ky="0" algn="bl" rotWithShape="0" blurRad="101600" dist="38100" dir="8100000">
+            <a:outerShdw blurRad="101600" dist="38100" dir="8100000" algn="bl" rotWithShape="0">
               <a:srgbClr val="000000">
                 <a:alpha val="25000"/>
               </a:srgbClr>
@@ -14903,7 +14676,7 @@
           <a:bodyPr wrap="square" lIns="0" tIns="0" rIns="0" bIns="0" rtlCol="0" anchor="ctr"/>
           <a:lstStyle/>
           <a:p>
-            <a:pPr algn="ctr" indent="0" marL="0">
+            <a:pPr marL="0" indent="0" algn="ctr">
               <a:buNone/>
             </a:pPr>
             <a:r>
@@ -14920,7 +14693,7 @@
             <a:endParaRPr lang="en-US" sz="1150" dirty="0"/>
           </a:p>
           <a:p>
-            <a:pPr algn="ctr" indent="0" marL="0">
+            <a:pPr marL="0" indent="0" algn="ctr">
               <a:buNone/>
             </a:pPr>
             <a:r>
@@ -14962,7 +14735,7 @@
             <a:prstDash val="solid"/>
           </a:ln>
           <a:effectLst>
-            <a:outerShdw sx="100000" sy="100000" kx="0" ky="0" algn="bl" rotWithShape="0" blurRad="101600" dist="38100" dir="8100000">
+            <a:outerShdw blurRad="101600" dist="38100" dir="8100000" algn="bl" rotWithShape="0">
               <a:srgbClr val="000000">
                 <a:alpha val="25000"/>
               </a:srgbClr>
@@ -15016,7 +14789,7 @@
           <a:bodyPr wrap="square" lIns="0" tIns="0" rIns="0" bIns="0" rtlCol="0" anchor="ctr"/>
           <a:lstStyle/>
           <a:p>
-            <a:pPr algn="ctr" indent="0" marL="0">
+            <a:pPr marL="0" indent="0" algn="ctr">
               <a:buNone/>
             </a:pPr>
             <a:r>
@@ -15033,7 +14806,7 @@
             <a:endParaRPr lang="en-US" sz="1150" dirty="0"/>
           </a:p>
           <a:p>
-            <a:pPr algn="ctr" indent="0" marL="0">
+            <a:pPr marL="0" indent="0" algn="ctr">
               <a:buNone/>
             </a:pPr>
             <a:r>
@@ -15075,7 +14848,7 @@
             <a:prstDash val="solid"/>
           </a:ln>
           <a:effectLst>
-            <a:outerShdw sx="100000" sy="100000" kx="0" ky="0" algn="bl" rotWithShape="0" blurRad="101600" dist="38100" dir="8100000">
+            <a:outerShdw blurRad="101600" dist="38100" dir="8100000" algn="bl" rotWithShape="0">
               <a:srgbClr val="000000">
                 <a:alpha val="25000"/>
               </a:srgbClr>
@@ -15129,7 +14902,7 @@
           <a:bodyPr wrap="square" lIns="0" tIns="0" rIns="0" bIns="0" rtlCol="0" anchor="ctr"/>
           <a:lstStyle/>
           <a:p>
-            <a:pPr algn="ctr" indent="0" marL="0">
+            <a:pPr marL="0" indent="0" algn="ctr">
               <a:buNone/>
             </a:pPr>
             <a:r>
@@ -15146,7 +14919,7 @@
             <a:endParaRPr lang="en-US" sz="1150" dirty="0"/>
           </a:p>
           <a:p>
-            <a:pPr algn="ctr" indent="0" marL="0">
+            <a:pPr marL="0" indent="0" algn="ctr">
               <a:buNone/>
             </a:pPr>
             <a:r>
@@ -15185,7 +14958,7 @@
           <a:bodyPr wrap="square" lIns="0" tIns="0" rIns="0" bIns="0" rtlCol="0" anchor="ctr"/>
           <a:lstStyle/>
           <a:p>
-            <a:pPr algn="ctr" indent="0" marL="0">
+            <a:pPr marL="0" indent="0" algn="ctr">
               <a:buNone/>
             </a:pPr>
             <a:r>
@@ -15224,7 +14997,7 @@
           <a:bodyPr wrap="square" lIns="0" tIns="0" rIns="0" bIns="0" rtlCol="0" anchor="ctr"/>
           <a:lstStyle/>
           <a:p>
-            <a:pPr algn="ctr" indent="0" marL="0">
+            <a:pPr marL="0" indent="0" algn="ctr">
               <a:buNone/>
             </a:pPr>
             <a:r>
@@ -15263,7 +15036,7 @@
           <a:bodyPr wrap="square" lIns="0" tIns="0" rIns="0" bIns="0" rtlCol="0" anchor="ctr"/>
           <a:lstStyle/>
           <a:p>
-            <a:pPr algn="ctr" indent="0" marL="0">
+            <a:pPr marL="0" indent="0" algn="ctr">
               <a:buNone/>
             </a:pPr>
             <a:r>
@@ -15297,6 +15070,7 @@
         <a:solidFill>
           <a:srgbClr val="0D1B2A"/>
         </a:solidFill>
+        <a:effectLst/>
       </p:bgPr>
     </p:bg>
     <p:spTree>
@@ -15359,7 +15133,7 @@
           <a:bodyPr wrap="square" lIns="0" tIns="0" rIns="0" bIns="0" rtlCol="0" anchor="ctr"/>
           <a:lstStyle/>
           <a:p>
-            <a:pPr indent="0" marL="0">
+            <a:pPr marL="0" indent="0">
               <a:buNone/>
             </a:pPr>
             <a:r>
@@ -15398,7 +15172,7 @@
           <a:bodyPr wrap="square" lIns="0" tIns="0" rIns="0" bIns="0" rtlCol="0" anchor="ctr"/>
           <a:lstStyle/>
           <a:p>
-            <a:pPr indent="0" marL="0">
+            <a:pPr marL="0" indent="0">
               <a:buNone/>
             </a:pPr>
             <a:r>
@@ -15440,7 +15214,7 @@
             <a:prstDash val="solid"/>
           </a:ln>
           <a:effectLst>
-            <a:outerShdw sx="100000" sy="100000" kx="0" ky="0" algn="bl" rotWithShape="0" blurRad="101600" dist="38100" dir="8100000">
+            <a:outerShdw blurRad="101600" dist="38100" dir="8100000" algn="bl" rotWithShape="0">
               <a:srgbClr val="000000">
                 <a:alpha val="25000"/>
               </a:srgbClr>
@@ -15494,7 +15268,7 @@
           <a:bodyPr wrap="square" lIns="0" tIns="0" rIns="0" bIns="0" rtlCol="0" anchor="ctr"/>
           <a:lstStyle/>
           <a:p>
-            <a:pPr algn="ctr" indent="0" marL="0">
+            <a:pPr marL="0" indent="0" algn="ctr">
               <a:buNone/>
             </a:pPr>
             <a:r>
@@ -15533,7 +15307,7 @@
           <a:bodyPr wrap="square" lIns="0" tIns="0" rIns="0" bIns="0" rtlCol="0" anchor="ctr"/>
           <a:lstStyle/>
           <a:p>
-            <a:pPr indent="0" marL="0">
+            <a:pPr marL="0" indent="0">
               <a:buNone/>
             </a:pPr>
             <a:r>
@@ -15572,7 +15346,7 @@
           <a:bodyPr wrap="square" lIns="0" tIns="0" rIns="0" bIns="0" rtlCol="0" anchor="ctr"/>
           <a:lstStyle/>
           <a:p>
-            <a:pPr indent="0" marL="0">
+            <a:pPr marL="0" indent="0">
               <a:buNone/>
             </a:pPr>
             <a:r>
@@ -15637,7 +15411,7 @@
             <a:prstDash val="solid"/>
           </a:ln>
           <a:effectLst>
-            <a:outerShdw sx="100000" sy="100000" kx="0" ky="0" algn="bl" rotWithShape="0" blurRad="101600" dist="38100" dir="8100000">
+            <a:outerShdw blurRad="101600" dist="38100" dir="8100000" algn="bl" rotWithShape="0">
               <a:srgbClr val="000000">
                 <a:alpha val="25000"/>
               </a:srgbClr>
@@ -15691,7 +15465,7 @@
           <a:bodyPr wrap="square" lIns="0" tIns="0" rIns="0" bIns="0" rtlCol="0" anchor="ctr"/>
           <a:lstStyle/>
           <a:p>
-            <a:pPr algn="ctr" indent="0" marL="0">
+            <a:pPr marL="0" indent="0" algn="ctr">
               <a:buNone/>
             </a:pPr>
             <a:r>
@@ -15730,7 +15504,7 @@
           <a:bodyPr wrap="square" lIns="0" tIns="0" rIns="0" bIns="0" rtlCol="0" anchor="ctr"/>
           <a:lstStyle/>
           <a:p>
-            <a:pPr indent="0" marL="0">
+            <a:pPr marL="0" indent="0">
               <a:buNone/>
             </a:pPr>
             <a:r>
@@ -15769,7 +15543,7 @@
           <a:bodyPr wrap="square" lIns="0" tIns="0" rIns="0" bIns="0" rtlCol="0" anchor="ctr"/>
           <a:lstStyle/>
           <a:p>
-            <a:pPr indent="0" marL="0">
+            <a:pPr marL="0" indent="0">
               <a:buNone/>
             </a:pPr>
             <a:r>
@@ -15811,7 +15585,7 @@
             <a:prstDash val="solid"/>
           </a:ln>
           <a:effectLst>
-            <a:outerShdw sx="100000" sy="100000" kx="0" ky="0" algn="bl" rotWithShape="0" blurRad="101600" dist="38100" dir="8100000">
+            <a:outerShdw blurRad="101600" dist="38100" dir="8100000" algn="bl" rotWithShape="0">
               <a:srgbClr val="000000">
                 <a:alpha val="25000"/>
               </a:srgbClr>
@@ -15865,7 +15639,7 @@
           <a:bodyPr wrap="square" lIns="0" tIns="0" rIns="0" bIns="0" rtlCol="0" anchor="ctr"/>
           <a:lstStyle/>
           <a:p>
-            <a:pPr algn="ctr" indent="0" marL="0">
+            <a:pPr marL="0" indent="0" algn="ctr">
               <a:buNone/>
             </a:pPr>
             <a:r>
@@ -15904,7 +15678,7 @@
           <a:bodyPr wrap="square" lIns="0" tIns="0" rIns="0" bIns="0" rtlCol="0" anchor="ctr"/>
           <a:lstStyle/>
           <a:p>
-            <a:pPr indent="0" marL="0">
+            <a:pPr marL="0" indent="0">
               <a:buNone/>
             </a:pPr>
             <a:r>
@@ -15943,7 +15717,7 @@
           <a:bodyPr wrap="square" lIns="0" tIns="0" rIns="0" bIns="0" rtlCol="0" anchor="ctr"/>
           <a:lstStyle/>
           <a:p>
-            <a:pPr indent="0" marL="0">
+            <a:pPr marL="0" indent="0">
               <a:buNone/>
             </a:pPr>
             <a:r>
@@ -16008,7 +15782,7 @@
             <a:prstDash val="solid"/>
           </a:ln>
           <a:effectLst>
-            <a:outerShdw sx="100000" sy="100000" kx="0" ky="0" algn="bl" rotWithShape="0" blurRad="101600" dist="38100" dir="8100000">
+            <a:outerShdw blurRad="101600" dist="38100" dir="8100000" algn="bl" rotWithShape="0">
               <a:srgbClr val="000000">
                 <a:alpha val="25000"/>
               </a:srgbClr>
@@ -16062,7 +15836,7 @@
           <a:bodyPr wrap="square" lIns="0" tIns="0" rIns="0" bIns="0" rtlCol="0" anchor="ctr"/>
           <a:lstStyle/>
           <a:p>
-            <a:pPr algn="ctr" indent="0" marL="0">
+            <a:pPr marL="0" indent="0" algn="ctr">
               <a:buNone/>
             </a:pPr>
             <a:r>
@@ -16101,7 +15875,7 @@
           <a:bodyPr wrap="square" lIns="0" tIns="0" rIns="0" bIns="0" rtlCol="0" anchor="ctr"/>
           <a:lstStyle/>
           <a:p>
-            <a:pPr indent="0" marL="0">
+            <a:pPr marL="0" indent="0">
               <a:buNone/>
             </a:pPr>
             <a:r>
@@ -16140,7 +15914,7 @@
           <a:bodyPr wrap="square" lIns="0" tIns="0" rIns="0" bIns="0" rtlCol="0" anchor="ctr"/>
           <a:lstStyle/>
           <a:p>
-            <a:pPr indent="0" marL="0">
+            <a:pPr marL="0" indent="0">
               <a:buNone/>
             </a:pPr>
             <a:r>
@@ -16182,7 +15956,7 @@
             <a:prstDash val="solid"/>
           </a:ln>
           <a:effectLst>
-            <a:outerShdw sx="100000" sy="100000" kx="0" ky="0" algn="bl" rotWithShape="0" blurRad="101600" dist="38100" dir="8100000">
+            <a:outerShdw blurRad="101600" dist="38100" dir="8100000" algn="bl" rotWithShape="0">
               <a:srgbClr val="000000">
                 <a:alpha val="25000"/>
               </a:srgbClr>
@@ -16236,7 +16010,7 @@
           <a:bodyPr wrap="square" lIns="0" tIns="0" rIns="0" bIns="0" rtlCol="0" anchor="ctr"/>
           <a:lstStyle/>
           <a:p>
-            <a:pPr algn="ctr" indent="0" marL="0">
+            <a:pPr marL="0" indent="0" algn="ctr">
               <a:buNone/>
             </a:pPr>
             <a:r>
@@ -16275,7 +16049,7 @@
           <a:bodyPr wrap="square" lIns="0" tIns="0" rIns="0" bIns="0" rtlCol="0" anchor="ctr"/>
           <a:lstStyle/>
           <a:p>
-            <a:pPr indent="0" marL="0">
+            <a:pPr marL="0" indent="0">
               <a:buNone/>
             </a:pPr>
             <a:r>
@@ -16314,7 +16088,7 @@
           <a:bodyPr wrap="square" lIns="0" tIns="0" rIns="0" bIns="0" rtlCol="0" anchor="ctr"/>
           <a:lstStyle/>
           <a:p>
-            <a:pPr indent="0" marL="0">
+            <a:pPr marL="0" indent="0">
               <a:buNone/>
             </a:pPr>
             <a:r>
@@ -16379,7 +16153,7 @@
             <a:prstDash val="solid"/>
           </a:ln>
           <a:effectLst>
-            <a:outerShdw sx="100000" sy="100000" kx="0" ky="0" algn="bl" rotWithShape="0" blurRad="101600" dist="38100" dir="8100000">
+            <a:outerShdw blurRad="101600" dist="38100" dir="8100000" algn="bl" rotWithShape="0">
               <a:srgbClr val="000000">
                 <a:alpha val="25000"/>
               </a:srgbClr>
@@ -16433,7 +16207,7 @@
           <a:bodyPr wrap="square" lIns="0" tIns="0" rIns="0" bIns="0" rtlCol="0" anchor="ctr"/>
           <a:lstStyle/>
           <a:p>
-            <a:pPr algn="ctr" indent="0" marL="0">
+            <a:pPr marL="0" indent="0" algn="ctr">
               <a:buNone/>
             </a:pPr>
             <a:r>
@@ -16472,7 +16246,7 @@
           <a:bodyPr wrap="square" lIns="0" tIns="0" rIns="0" bIns="0" rtlCol="0" anchor="ctr"/>
           <a:lstStyle/>
           <a:p>
-            <a:pPr indent="0" marL="0">
+            <a:pPr marL="0" indent="0">
               <a:buNone/>
             </a:pPr>
             <a:r>
@@ -16511,7 +16285,7 @@
           <a:bodyPr wrap="square" lIns="0" tIns="0" rIns="0" bIns="0" rtlCol="0" anchor="ctr"/>
           <a:lstStyle/>
           <a:p>
-            <a:pPr indent="0" marL="0">
+            <a:pPr marL="0" indent="0">
               <a:buNone/>
             </a:pPr>
             <a:r>
@@ -16553,7 +16327,7 @@
             <a:prstDash val="solid"/>
           </a:ln>
           <a:effectLst>
-            <a:outerShdw sx="100000" sy="100000" kx="0" ky="0" algn="bl" rotWithShape="0" blurRad="101600" dist="38100" dir="8100000">
+            <a:outerShdw blurRad="101600" dist="38100" dir="8100000" algn="bl" rotWithShape="0">
               <a:srgbClr val="000000">
                 <a:alpha val="25000"/>
               </a:srgbClr>
@@ -16607,7 +16381,7 @@
           <a:bodyPr wrap="square" lIns="0" tIns="0" rIns="0" bIns="0" rtlCol="0" anchor="ctr"/>
           <a:lstStyle/>
           <a:p>
-            <a:pPr algn="ctr" indent="0" marL="0">
+            <a:pPr marL="0" indent="0" algn="ctr">
               <a:buNone/>
             </a:pPr>
             <a:r>
@@ -16646,7 +16420,7 @@
           <a:bodyPr wrap="square" lIns="0" tIns="0" rIns="0" bIns="0" rtlCol="0" anchor="ctr"/>
           <a:lstStyle/>
           <a:p>
-            <a:pPr indent="0" marL="0">
+            <a:pPr marL="0" indent="0">
               <a:buNone/>
             </a:pPr>
             <a:r>
@@ -16685,7 +16459,7 @@
           <a:bodyPr wrap="square" lIns="0" tIns="0" rIns="0" bIns="0" rtlCol="0" anchor="ctr"/>
           <a:lstStyle/>
           <a:p>
-            <a:pPr indent="0" marL="0">
+            <a:pPr marL="0" indent="0">
               <a:buNone/>
             </a:pPr>
             <a:r>
@@ -16727,7 +16501,7 @@
             <a:prstDash val="solid"/>
           </a:ln>
           <a:effectLst>
-            <a:outerShdw sx="100000" sy="100000" kx="0" ky="0" algn="bl" rotWithShape="0" blurRad="101600" dist="38100" dir="8100000">
+            <a:outerShdw blurRad="101600" dist="38100" dir="8100000" algn="bl" rotWithShape="0">
               <a:srgbClr val="000000">
                 <a:alpha val="25000"/>
               </a:srgbClr>
@@ -16781,7 +16555,7 @@
           <a:bodyPr wrap="square" lIns="0" tIns="0" rIns="0" bIns="0" rtlCol="0" anchor="ctr"/>
           <a:lstStyle/>
           <a:p>
-            <a:pPr algn="ctr" indent="0" marL="0">
+            <a:pPr marL="0" indent="0" algn="ctr">
               <a:buNone/>
             </a:pPr>
             <a:r>
@@ -16820,7 +16594,7 @@
           <a:bodyPr wrap="square" lIns="0" tIns="0" rIns="0" bIns="0" rtlCol="0" anchor="ctr"/>
           <a:lstStyle/>
           <a:p>
-            <a:pPr indent="0" marL="0">
+            <a:pPr marL="0" indent="0">
               <a:buNone/>
             </a:pPr>
             <a:r>
@@ -16859,7 +16633,7 @@
           <a:bodyPr wrap="square" lIns="0" tIns="0" rIns="0" bIns="0" rtlCol="0" anchor="ctr"/>
           <a:lstStyle/>
           <a:p>
-            <a:pPr indent="0" marL="0">
+            <a:pPr marL="0" indent="0">
               <a:buNone/>
             </a:pPr>
             <a:r>
@@ -16893,6 +16667,7 @@
         <a:solidFill>
           <a:srgbClr val="0D1B2A"/>
         </a:solidFill>
+        <a:effectLst/>
       </p:bgPr>
     </p:bg>
     <p:spTree>
@@ -16955,7 +16730,7 @@
           <a:bodyPr wrap="square" lIns="0" tIns="0" rIns="0" bIns="0" rtlCol="0" anchor="ctr"/>
           <a:lstStyle/>
           <a:p>
-            <a:pPr indent="0" marL="0">
+            <a:pPr marL="0" indent="0">
               <a:buNone/>
             </a:pPr>
             <a:r>
@@ -16994,7 +16769,7 @@
           <a:bodyPr wrap="square" lIns="0" tIns="0" rIns="0" bIns="0" rtlCol="0" anchor="ctr"/>
           <a:lstStyle/>
           <a:p>
-            <a:pPr indent="0" marL="0">
+            <a:pPr marL="0" indent="0">
               <a:buNone/>
             </a:pPr>
             <a:r>
@@ -17036,7 +16811,7 @@
             <a:prstDash val="solid"/>
           </a:ln>
           <a:effectLst>
-            <a:outerShdw sx="100000" sy="100000" kx="0" ky="0" algn="bl" rotWithShape="0" blurRad="101600" dist="38100" dir="8100000">
+            <a:outerShdw blurRad="101600" dist="38100" dir="8100000" algn="bl" rotWithShape="0">
               <a:srgbClr val="000000">
                 <a:alpha val="25000"/>
               </a:srgbClr>
@@ -17090,7 +16865,7 @@
           <a:bodyPr wrap="square" lIns="0" tIns="0" rIns="0" bIns="0" rtlCol="0" anchor="ctr"/>
           <a:lstStyle/>
           <a:p>
-            <a:pPr algn="ctr" indent="0" marL="0">
+            <a:pPr marL="0" indent="0" algn="ctr">
               <a:buNone/>
             </a:pPr>
             <a:r>
@@ -17129,7 +16904,7 @@
           <a:bodyPr wrap="square" lIns="0" tIns="0" rIns="0" bIns="0" rtlCol="0" anchor="ctr"/>
           <a:lstStyle/>
           <a:p>
-            <a:pPr indent="0" marL="0">
+            <a:pPr marL="0" indent="0">
               <a:buNone/>
             </a:pPr>
             <a:r>
@@ -17171,7 +16946,7 @@
             <a:prstDash val="solid"/>
           </a:ln>
           <a:effectLst>
-            <a:outerShdw sx="100000" sy="100000" kx="0" ky="0" algn="bl" rotWithShape="0" blurRad="101600" dist="38100" dir="8100000">
+            <a:outerShdw blurRad="101600" dist="38100" dir="8100000" algn="bl" rotWithShape="0">
               <a:srgbClr val="000000">
                 <a:alpha val="25000"/>
               </a:srgbClr>
@@ -17225,7 +17000,7 @@
           <a:bodyPr wrap="square" lIns="0" tIns="0" rIns="0" bIns="0" rtlCol="0" anchor="ctr"/>
           <a:lstStyle/>
           <a:p>
-            <a:pPr algn="ctr" indent="0" marL="0">
+            <a:pPr marL="0" indent="0" algn="ctr">
               <a:buNone/>
             </a:pPr>
             <a:r>
@@ -17264,7 +17039,7 @@
           <a:bodyPr wrap="square" lIns="0" tIns="0" rIns="0" bIns="0" rtlCol="0" anchor="ctr"/>
           <a:lstStyle/>
           <a:p>
-            <a:pPr indent="0" marL="0">
+            <a:pPr marL="0" indent="0">
               <a:buNone/>
             </a:pPr>
             <a:r>
@@ -17306,7 +17081,7 @@
             <a:prstDash val="solid"/>
           </a:ln>
           <a:effectLst>
-            <a:outerShdw sx="100000" sy="100000" kx="0" ky="0" algn="bl" rotWithShape="0" blurRad="101600" dist="38100" dir="8100000">
+            <a:outerShdw blurRad="101600" dist="38100" dir="8100000" algn="bl" rotWithShape="0">
               <a:srgbClr val="000000">
                 <a:alpha val="25000"/>
               </a:srgbClr>
@@ -17360,7 +17135,7 @@
           <a:bodyPr wrap="square" lIns="0" tIns="0" rIns="0" bIns="0" rtlCol="0" anchor="ctr"/>
           <a:lstStyle/>
           <a:p>
-            <a:pPr algn="ctr" indent="0" marL="0">
+            <a:pPr marL="0" indent="0" algn="ctr">
               <a:buNone/>
             </a:pPr>
             <a:r>
@@ -17399,7 +17174,7 @@
           <a:bodyPr wrap="square" lIns="0" tIns="0" rIns="0" bIns="0" rtlCol="0" anchor="ctr"/>
           <a:lstStyle/>
           <a:p>
-            <a:pPr indent="0" marL="0">
+            <a:pPr marL="0" indent="0">
               <a:buNone/>
             </a:pPr>
             <a:r>
@@ -17441,7 +17216,7 @@
             <a:prstDash val="solid"/>
           </a:ln>
           <a:effectLst>
-            <a:outerShdw sx="100000" sy="100000" kx="0" ky="0" algn="bl" rotWithShape="0" blurRad="101600" dist="38100" dir="8100000">
+            <a:outerShdw blurRad="101600" dist="38100" dir="8100000" algn="bl" rotWithShape="0">
               <a:srgbClr val="000000">
                 <a:alpha val="25000"/>
               </a:srgbClr>
@@ -17495,7 +17270,7 @@
           <a:bodyPr wrap="square" lIns="0" tIns="0" rIns="0" bIns="0" rtlCol="0" anchor="ctr"/>
           <a:lstStyle/>
           <a:p>
-            <a:pPr algn="ctr" indent="0" marL="0">
+            <a:pPr marL="0" indent="0" algn="ctr">
               <a:buNone/>
             </a:pPr>
             <a:r>
@@ -17534,7 +17309,7 @@
           <a:bodyPr wrap="square" lIns="0" tIns="0" rIns="0" bIns="0" rtlCol="0" anchor="ctr"/>
           <a:lstStyle/>
           <a:p>
-            <a:pPr indent="0" marL="0">
+            <a:pPr marL="0" indent="0">
               <a:buNone/>
             </a:pPr>
             <a:r>
@@ -17576,7 +17351,7 @@
             <a:prstDash val="solid"/>
           </a:ln>
           <a:effectLst>
-            <a:outerShdw sx="100000" sy="100000" kx="0" ky="0" algn="bl" rotWithShape="0" blurRad="101600" dist="38100" dir="8100000">
+            <a:outerShdw blurRad="101600" dist="38100" dir="8100000" algn="bl" rotWithShape="0">
               <a:srgbClr val="000000">
                 <a:alpha val="25000"/>
               </a:srgbClr>
@@ -17630,7 +17405,7 @@
           <a:bodyPr wrap="square" lIns="0" tIns="0" rIns="0" bIns="0" rtlCol="0" anchor="ctr"/>
           <a:lstStyle/>
           <a:p>
-            <a:pPr algn="ctr" indent="0" marL="0">
+            <a:pPr marL="0" indent="0" algn="ctr">
               <a:buNone/>
             </a:pPr>
             <a:r>
@@ -17669,7 +17444,7 @@
           <a:bodyPr wrap="square" lIns="0" tIns="0" rIns="0" bIns="0" rtlCol="0" anchor="ctr"/>
           <a:lstStyle/>
           <a:p>
-            <a:pPr indent="0" marL="0">
+            <a:pPr marL="0" indent="0">
               <a:buNone/>
             </a:pPr>
             <a:r>
@@ -17711,7 +17486,7 @@
             <a:prstDash val="solid"/>
           </a:ln>
           <a:effectLst>
-            <a:outerShdw sx="100000" sy="100000" kx="0" ky="0" algn="bl" rotWithShape="0" blurRad="101600" dist="38100" dir="8100000">
+            <a:outerShdw blurRad="101600" dist="38100" dir="8100000" algn="bl" rotWithShape="0">
               <a:srgbClr val="000000">
                 <a:alpha val="25000"/>
               </a:srgbClr>
@@ -17765,7 +17540,7 @@
           <a:bodyPr wrap="square" lIns="0" tIns="0" rIns="0" bIns="0" rtlCol="0" anchor="ctr"/>
           <a:lstStyle/>
           <a:p>
-            <a:pPr algn="ctr" indent="0" marL="0">
+            <a:pPr marL="0" indent="0" algn="ctr">
               <a:buNone/>
             </a:pPr>
             <a:r>
@@ -17804,7 +17579,7 @@
           <a:bodyPr wrap="square" lIns="0" tIns="0" rIns="0" bIns="0" rtlCol="0" anchor="ctr"/>
           <a:lstStyle/>
           <a:p>
-            <a:pPr indent="0" marL="0">
+            <a:pPr marL="0" indent="0">
               <a:buNone/>
             </a:pPr>
             <a:r>
@@ -17846,7 +17621,7 @@
             <a:prstDash val="solid"/>
           </a:ln>
           <a:effectLst>
-            <a:outerShdw sx="100000" sy="100000" kx="0" ky="0" algn="bl" rotWithShape="0" blurRad="101600" dist="38100" dir="8100000">
+            <a:outerShdw blurRad="101600" dist="38100" dir="8100000" algn="bl" rotWithShape="0">
               <a:srgbClr val="000000">
                 <a:alpha val="25000"/>
               </a:srgbClr>
@@ -17900,7 +17675,7 @@
           <a:bodyPr wrap="square" lIns="0" tIns="0" rIns="0" bIns="0" rtlCol="0" anchor="ctr"/>
           <a:lstStyle/>
           <a:p>
-            <a:pPr algn="ctr" indent="0" marL="0">
+            <a:pPr marL="0" indent="0" algn="ctr">
               <a:buNone/>
             </a:pPr>
             <a:r>
@@ -17939,7 +17714,7 @@
           <a:bodyPr wrap="square" lIns="0" tIns="0" rIns="0" bIns="0" rtlCol="0" anchor="ctr"/>
           <a:lstStyle/>
           <a:p>
-            <a:pPr indent="0" marL="0">
+            <a:pPr marL="0" indent="0">
               <a:buNone/>
             </a:pPr>
             <a:r>
@@ -17981,7 +17756,7 @@
             <a:prstDash val="solid"/>
           </a:ln>
           <a:effectLst>
-            <a:outerShdw sx="100000" sy="100000" kx="0" ky="0" algn="bl" rotWithShape="0" blurRad="101600" dist="38100" dir="8100000">
+            <a:outerShdw blurRad="101600" dist="38100" dir="8100000" algn="bl" rotWithShape="0">
               <a:srgbClr val="000000">
                 <a:alpha val="25000"/>
               </a:srgbClr>
@@ -18035,7 +17810,7 @@
           <a:bodyPr wrap="square" lIns="0" tIns="0" rIns="0" bIns="0" rtlCol="0" anchor="ctr"/>
           <a:lstStyle/>
           <a:p>
-            <a:pPr algn="ctr" indent="0" marL="0">
+            <a:pPr marL="0" indent="0" algn="ctr">
               <a:buNone/>
             </a:pPr>
             <a:r>
@@ -18074,7 +17849,7 @@
           <a:bodyPr wrap="square" lIns="0" tIns="0" rIns="0" bIns="0" rtlCol="0" anchor="ctr"/>
           <a:lstStyle/>
           <a:p>
-            <a:pPr indent="0" marL="0">
+            <a:pPr marL="0" indent="0">
               <a:buNone/>
             </a:pPr>
             <a:r>
@@ -18108,6 +17883,7 @@
         <a:solidFill>
           <a:srgbClr val="0D1B2A"/>
         </a:solidFill>
+        <a:effectLst/>
       </p:bgPr>
     </p:bg>
     <p:spTree>
@@ -18170,7 +17946,7 @@
           <a:bodyPr wrap="square" lIns="0" tIns="0" rIns="0" bIns="0" rtlCol="0" anchor="ctr"/>
           <a:lstStyle/>
           <a:p>
-            <a:pPr indent="0" marL="0">
+            <a:pPr marL="0" indent="0">
               <a:buNone/>
             </a:pPr>
             <a:r>
@@ -18209,7 +17985,7 @@
           <a:bodyPr wrap="square" lIns="0" tIns="0" rIns="0" bIns="0" rtlCol="0" anchor="ctr"/>
           <a:lstStyle/>
           <a:p>
-            <a:pPr indent="0" marL="0">
+            <a:pPr marL="0" indent="0">
               <a:buNone/>
             </a:pPr>
             <a:r>
@@ -18273,7 +18049,7 @@
           <a:bodyPr wrap="square" lIns="0" tIns="0" rIns="0" bIns="0" rtlCol="0" anchor="ctr"/>
           <a:lstStyle/>
           <a:p>
-            <a:pPr algn="ctr" indent="0" marL="0">
+            <a:pPr marL="0" indent="0" algn="ctr">
               <a:buNone/>
             </a:pPr>
             <a:r>
@@ -18339,7 +18115,7 @@
           <a:bodyPr wrap="square" lIns="0" tIns="0" rIns="0" bIns="0" rtlCol="0" anchor="ctr"/>
           <a:lstStyle/>
           <a:p>
-            <a:pPr algn="ctr" indent="0" marL="0">
+            <a:pPr marL="0" indent="0" algn="ctr">
               <a:buNone/>
             </a:pPr>
             <a:r>
@@ -18378,7 +18154,7 @@
           <a:bodyPr wrap="square" lIns="0" tIns="0" rIns="0" bIns="0" rtlCol="0" anchor="ctr"/>
           <a:lstStyle/>
           <a:p>
-            <a:pPr indent="0" marL="0">
+            <a:pPr marL="0" indent="0">
               <a:buNone/>
             </a:pPr>
             <a:r>
@@ -18465,7 +18241,7 @@
           <a:bodyPr wrap="square" lIns="0" tIns="0" rIns="0" bIns="0" rtlCol="0" anchor="ctr"/>
           <a:lstStyle/>
           <a:p>
-            <a:pPr algn="ctr" indent="0" marL="0">
+            <a:pPr marL="0" indent="0" algn="ctr">
               <a:buNone/>
             </a:pPr>
             <a:r>
@@ -18531,7 +18307,7 @@
           <a:bodyPr wrap="square" lIns="0" tIns="0" rIns="0" bIns="0" rtlCol="0" anchor="ctr"/>
           <a:lstStyle/>
           <a:p>
-            <a:pPr algn="ctr" indent="0" marL="0">
+            <a:pPr marL="0" indent="0" algn="ctr">
               <a:buNone/>
             </a:pPr>
             <a:r>
@@ -18570,7 +18346,7 @@
           <a:bodyPr wrap="square" lIns="0" tIns="0" rIns="0" bIns="0" rtlCol="0" anchor="ctr"/>
           <a:lstStyle/>
           <a:p>
-            <a:pPr indent="0" marL="0">
+            <a:pPr marL="0" indent="0">
               <a:buNone/>
             </a:pPr>
             <a:r>
@@ -18657,7 +18433,7 @@
           <a:bodyPr wrap="square" lIns="0" tIns="0" rIns="0" bIns="0" rtlCol="0" anchor="ctr"/>
           <a:lstStyle/>
           <a:p>
-            <a:pPr algn="ctr" indent="0" marL="0">
+            <a:pPr marL="0" indent="0" algn="ctr">
               <a:buNone/>
             </a:pPr>
             <a:r>
@@ -18723,7 +18499,7 @@
           <a:bodyPr wrap="square" lIns="0" tIns="0" rIns="0" bIns="0" rtlCol="0" anchor="ctr"/>
           <a:lstStyle/>
           <a:p>
-            <a:pPr algn="ctr" indent="0" marL="0">
+            <a:pPr marL="0" indent="0" algn="ctr">
               <a:buNone/>
             </a:pPr>
             <a:r>
@@ -18762,7 +18538,7 @@
           <a:bodyPr wrap="square" lIns="0" tIns="0" rIns="0" bIns="0" rtlCol="0" anchor="ctr"/>
           <a:lstStyle/>
           <a:p>
-            <a:pPr indent="0" marL="0">
+            <a:pPr marL="0" indent="0">
               <a:buNone/>
             </a:pPr>
             <a:r>
@@ -18849,7 +18625,7 @@
           <a:bodyPr wrap="square" lIns="0" tIns="0" rIns="0" bIns="0" rtlCol="0" anchor="ctr"/>
           <a:lstStyle/>
           <a:p>
-            <a:pPr algn="ctr" indent="0" marL="0">
+            <a:pPr marL="0" indent="0" algn="ctr">
               <a:buNone/>
             </a:pPr>
             <a:r>
@@ -18915,7 +18691,7 @@
           <a:bodyPr wrap="square" lIns="0" tIns="0" rIns="0" bIns="0" rtlCol="0" anchor="ctr"/>
           <a:lstStyle/>
           <a:p>
-            <a:pPr algn="ctr" indent="0" marL="0">
+            <a:pPr marL="0" indent="0" algn="ctr">
               <a:buNone/>
             </a:pPr>
             <a:r>
@@ -18954,7 +18730,7 @@
           <a:bodyPr wrap="square" lIns="0" tIns="0" rIns="0" bIns="0" rtlCol="0" anchor="ctr"/>
           <a:lstStyle/>
           <a:p>
-            <a:pPr indent="0" marL="0">
+            <a:pPr marL="0" indent="0">
               <a:buNone/>
             </a:pPr>
             <a:r>
@@ -19041,7 +18817,7 @@
           <a:bodyPr wrap="square" lIns="0" tIns="0" rIns="0" bIns="0" rtlCol="0" anchor="ctr"/>
           <a:lstStyle/>
           <a:p>
-            <a:pPr algn="ctr" indent="0" marL="0">
+            <a:pPr marL="0" indent="0" algn="ctr">
               <a:buNone/>
             </a:pPr>
             <a:r>
@@ -19107,7 +18883,7 @@
           <a:bodyPr wrap="square" lIns="0" tIns="0" rIns="0" bIns="0" rtlCol="0" anchor="ctr"/>
           <a:lstStyle/>
           <a:p>
-            <a:pPr algn="ctr" indent="0" marL="0">
+            <a:pPr marL="0" indent="0" algn="ctr">
               <a:buNone/>
             </a:pPr>
             <a:r>
@@ -19146,7 +18922,7 @@
           <a:bodyPr wrap="square" lIns="0" tIns="0" rIns="0" bIns="0" rtlCol="0" anchor="ctr"/>
           <a:lstStyle/>
           <a:p>
-            <a:pPr indent="0" marL="0">
+            <a:pPr marL="0" indent="0">
               <a:buNone/>
             </a:pPr>
             <a:r>
@@ -19233,7 +19009,7 @@
           <a:bodyPr wrap="square" lIns="0" tIns="0" rIns="0" bIns="0" rtlCol="0" anchor="ctr"/>
           <a:lstStyle/>
           <a:p>
-            <a:pPr algn="ctr" indent="0" marL="0">
+            <a:pPr marL="0" indent="0" algn="ctr">
               <a:buNone/>
             </a:pPr>
             <a:r>
@@ -19299,7 +19075,7 @@
           <a:bodyPr wrap="square" lIns="0" tIns="0" rIns="0" bIns="0" rtlCol="0" anchor="ctr"/>
           <a:lstStyle/>
           <a:p>
-            <a:pPr algn="ctr" indent="0" marL="0">
+            <a:pPr marL="0" indent="0" algn="ctr">
               <a:buNone/>
             </a:pPr>
             <a:r>
@@ -19338,7 +19114,7 @@
           <a:bodyPr wrap="square" lIns="0" tIns="0" rIns="0" bIns="0" rtlCol="0" anchor="ctr"/>
           <a:lstStyle/>
           <a:p>
-            <a:pPr indent="0" marL="0">
+            <a:pPr marL="0" indent="0">
               <a:buNone/>
             </a:pPr>
             <a:r>
@@ -19425,7 +19201,7 @@
           <a:bodyPr wrap="square" lIns="0" tIns="0" rIns="0" bIns="0" rtlCol="0" anchor="ctr"/>
           <a:lstStyle/>
           <a:p>
-            <a:pPr algn="ctr" indent="0" marL="0">
+            <a:pPr marL="0" indent="0" algn="ctr">
               <a:buNone/>
             </a:pPr>
             <a:r>
@@ -19491,7 +19267,7 @@
           <a:bodyPr wrap="square" lIns="0" tIns="0" rIns="0" bIns="0" rtlCol="0" anchor="ctr"/>
           <a:lstStyle/>
           <a:p>
-            <a:pPr algn="ctr" indent="0" marL="0">
+            <a:pPr marL="0" indent="0" algn="ctr">
               <a:buNone/>
             </a:pPr>
             <a:r>
@@ -19530,7 +19306,7 @@
           <a:bodyPr wrap="square" lIns="0" tIns="0" rIns="0" bIns="0" rtlCol="0" anchor="ctr"/>
           <a:lstStyle/>
           <a:p>
-            <a:pPr indent="0" marL="0">
+            <a:pPr marL="0" indent="0">
               <a:buNone/>
             </a:pPr>
             <a:r>
@@ -19617,7 +19393,7 @@
           <a:bodyPr wrap="square" lIns="0" tIns="0" rIns="0" bIns="0" rtlCol="0" anchor="ctr"/>
           <a:lstStyle/>
           <a:p>
-            <a:pPr algn="ctr" indent="0" marL="0">
+            <a:pPr marL="0" indent="0" algn="ctr">
               <a:buNone/>
             </a:pPr>
             <a:r>
@@ -19683,7 +19459,7 @@
           <a:bodyPr wrap="square" lIns="0" tIns="0" rIns="0" bIns="0" rtlCol="0" anchor="ctr"/>
           <a:lstStyle/>
           <a:p>
-            <a:pPr algn="ctr" indent="0" marL="0">
+            <a:pPr marL="0" indent="0" algn="ctr">
               <a:buNone/>
             </a:pPr>
             <a:r>
@@ -19722,7 +19498,7 @@
           <a:bodyPr wrap="square" lIns="0" tIns="0" rIns="0" bIns="0" rtlCol="0" anchor="ctr"/>
           <a:lstStyle/>
           <a:p>
-            <a:pPr indent="0" marL="0">
+            <a:pPr marL="0" indent="0">
               <a:buNone/>
             </a:pPr>
             <a:r>
@@ -19756,6 +19532,7 @@
         <a:solidFill>
           <a:srgbClr val="0D1B2A"/>
         </a:solidFill>
+        <a:effectLst/>
       </p:bgPr>
     </p:bg>
     <p:spTree>
@@ -19818,7 +19595,7 @@
           <a:bodyPr wrap="square" lIns="0" tIns="0" rIns="0" bIns="0" rtlCol="0" anchor="ctr"/>
           <a:lstStyle/>
           <a:p>
-            <a:pPr indent="0" marL="0">
+            <a:pPr marL="0" indent="0">
               <a:buNone/>
             </a:pPr>
             <a:r>
@@ -19857,7 +19634,7 @@
           <a:bodyPr wrap="square" lIns="0" tIns="0" rIns="0" bIns="0" rtlCol="0" anchor="ctr"/>
           <a:lstStyle/>
           <a:p>
-            <a:pPr indent="0" marL="0">
+            <a:pPr marL="0" indent="0">
               <a:buNone/>
             </a:pPr>
             <a:r>
@@ -19899,7 +19676,7 @@
             <a:prstDash val="solid"/>
           </a:ln>
           <a:effectLst>
-            <a:outerShdw sx="100000" sy="100000" kx="0" ky="0" algn="bl" rotWithShape="0" blurRad="101600" dist="38100" dir="8100000">
+            <a:outerShdw blurRad="101600" dist="38100" dir="8100000" algn="bl" rotWithShape="0">
               <a:srgbClr val="000000">
                 <a:alpha val="25000"/>
               </a:srgbClr>
@@ -19953,7 +19730,7 @@
           <a:bodyPr wrap="square" lIns="0" tIns="0" rIns="0" bIns="0" rtlCol="0" anchor="ctr"/>
           <a:lstStyle/>
           <a:p>
-            <a:pPr indent="0" marL="0">
+            <a:pPr marL="0" indent="0">
               <a:buNone/>
             </a:pPr>
             <a:r>
@@ -19992,7 +19769,7 @@
           <a:bodyPr wrap="square" lIns="0" tIns="0" rIns="0" bIns="0" rtlCol="0" anchor="ctr"/>
           <a:lstStyle/>
           <a:p>
-            <a:pPr indent="0" marL="0">
+            <a:pPr marL="0" indent="0">
               <a:buNone/>
             </a:pPr>
             <a:r>
@@ -20034,7 +19811,7 @@
             <a:prstDash val="solid"/>
           </a:ln>
           <a:effectLst>
-            <a:outerShdw sx="100000" sy="100000" kx="0" ky="0" algn="bl" rotWithShape="0" blurRad="101600" dist="38100" dir="8100000">
+            <a:outerShdw blurRad="101600" dist="38100" dir="8100000" algn="bl" rotWithShape="0">
               <a:srgbClr val="000000">
                 <a:alpha val="25000"/>
               </a:srgbClr>
@@ -20088,7 +19865,7 @@
           <a:bodyPr wrap="square" lIns="0" tIns="0" rIns="0" bIns="0" rtlCol="0" anchor="ctr"/>
           <a:lstStyle/>
           <a:p>
-            <a:pPr indent="0" marL="0">
+            <a:pPr marL="0" indent="0">
               <a:buNone/>
             </a:pPr>
             <a:r>
@@ -20127,7 +19904,7 @@
           <a:bodyPr wrap="square" lIns="0" tIns="0" rIns="0" bIns="0" rtlCol="0" anchor="ctr"/>
           <a:lstStyle/>
           <a:p>
-            <a:pPr indent="0" marL="0">
+            <a:pPr marL="0" indent="0">
               <a:buNone/>
             </a:pPr>
             <a:r>
@@ -20169,7 +19946,7 @@
             <a:prstDash val="solid"/>
           </a:ln>
           <a:effectLst>
-            <a:outerShdw sx="100000" sy="100000" kx="0" ky="0" algn="bl" rotWithShape="0" blurRad="101600" dist="38100" dir="8100000">
+            <a:outerShdw blurRad="101600" dist="38100" dir="8100000" algn="bl" rotWithShape="0">
               <a:srgbClr val="000000">
                 <a:alpha val="25000"/>
               </a:srgbClr>
@@ -20223,7 +20000,7 @@
           <a:bodyPr wrap="square" lIns="0" tIns="0" rIns="0" bIns="0" rtlCol="0" anchor="ctr"/>
           <a:lstStyle/>
           <a:p>
-            <a:pPr indent="0" marL="0">
+            <a:pPr marL="0" indent="0">
               <a:buNone/>
             </a:pPr>
             <a:r>
@@ -20262,7 +20039,7 @@
           <a:bodyPr wrap="square" lIns="0" tIns="0" rIns="0" bIns="0" rtlCol="0" anchor="ctr"/>
           <a:lstStyle/>
           <a:p>
-            <a:pPr indent="0" marL="0">
+            <a:pPr marL="0" indent="0">
               <a:buNone/>
             </a:pPr>
             <a:r>
@@ -20304,7 +20081,7 @@
             <a:prstDash val="solid"/>
           </a:ln>
           <a:effectLst>
-            <a:outerShdw sx="100000" sy="100000" kx="0" ky="0" algn="bl" rotWithShape="0" blurRad="101600" dist="38100" dir="8100000">
+            <a:outerShdw blurRad="101600" dist="38100" dir="8100000" algn="bl" rotWithShape="0">
               <a:srgbClr val="000000">
                 <a:alpha val="25000"/>
               </a:srgbClr>
@@ -20358,7 +20135,7 @@
           <a:bodyPr wrap="square" lIns="0" tIns="0" rIns="0" bIns="0" rtlCol="0" anchor="ctr"/>
           <a:lstStyle/>
           <a:p>
-            <a:pPr indent="0" marL="0">
+            <a:pPr marL="0" indent="0">
               <a:buNone/>
             </a:pPr>
             <a:r>
@@ -20397,7 +20174,7 @@
           <a:bodyPr wrap="square" lIns="0" tIns="0" rIns="0" bIns="0" rtlCol="0" anchor="ctr"/>
           <a:lstStyle/>
           <a:p>
-            <a:pPr indent="0" marL="0">
+            <a:pPr marL="0" indent="0">
               <a:buNone/>
             </a:pPr>
             <a:r>
@@ -20439,7 +20216,7 @@
             <a:prstDash val="solid"/>
           </a:ln>
           <a:effectLst>
-            <a:outerShdw sx="100000" sy="100000" kx="0" ky="0" algn="bl" rotWithShape="0" blurRad="101600" dist="38100" dir="8100000">
+            <a:outerShdw blurRad="101600" dist="38100" dir="8100000" algn="bl" rotWithShape="0">
               <a:srgbClr val="000000">
                 <a:alpha val="25000"/>
               </a:srgbClr>
@@ -20493,7 +20270,7 @@
           <a:bodyPr wrap="square" lIns="0" tIns="0" rIns="0" bIns="0" rtlCol="0" anchor="ctr"/>
           <a:lstStyle/>
           <a:p>
-            <a:pPr indent="0" marL="0">
+            <a:pPr marL="0" indent="0">
               <a:buNone/>
             </a:pPr>
             <a:r>
@@ -20532,7 +20309,7 @@
           <a:bodyPr wrap="square" lIns="0" tIns="0" rIns="0" bIns="0" rtlCol="0" anchor="ctr"/>
           <a:lstStyle/>
           <a:p>
-            <a:pPr indent="0" marL="0">
+            <a:pPr marL="0" indent="0">
               <a:buNone/>
             </a:pPr>
             <a:r>
@@ -20574,7 +20351,7 @@
             <a:prstDash val="solid"/>
           </a:ln>
           <a:effectLst>
-            <a:outerShdw sx="100000" sy="100000" kx="0" ky="0" algn="bl" rotWithShape="0" blurRad="101600" dist="38100" dir="8100000">
+            <a:outerShdw blurRad="101600" dist="38100" dir="8100000" algn="bl" rotWithShape="0">
               <a:srgbClr val="000000">
                 <a:alpha val="25000"/>
               </a:srgbClr>
@@ -20628,7 +20405,7 @@
           <a:bodyPr wrap="square" lIns="0" tIns="0" rIns="0" bIns="0" rtlCol="0" anchor="ctr"/>
           <a:lstStyle/>
           <a:p>
-            <a:pPr indent="0" marL="0">
+            <a:pPr marL="0" indent="0">
               <a:buNone/>
             </a:pPr>
             <a:r>
@@ -20667,7 +20444,7 @@
           <a:bodyPr wrap="square" lIns="0" tIns="0" rIns="0" bIns="0" rtlCol="0" anchor="ctr"/>
           <a:lstStyle/>
           <a:p>
-            <a:pPr indent="0" marL="0">
+            <a:pPr marL="0" indent="0">
               <a:buNone/>
             </a:pPr>
             <a:r>
@@ -20709,7 +20486,7 @@
             <a:prstDash val="solid"/>
           </a:ln>
           <a:effectLst>
-            <a:outerShdw sx="100000" sy="100000" kx="0" ky="0" algn="bl" rotWithShape="0" blurRad="101600" dist="38100" dir="8100000">
+            <a:outerShdw blurRad="101600" dist="38100" dir="8100000" algn="bl" rotWithShape="0">
               <a:srgbClr val="000000">
                 <a:alpha val="25000"/>
               </a:srgbClr>
@@ -20763,7 +20540,7 @@
           <a:bodyPr wrap="square" lIns="0" tIns="0" rIns="0" bIns="0" rtlCol="0" anchor="ctr"/>
           <a:lstStyle/>
           <a:p>
-            <a:pPr indent="0" marL="0">
+            <a:pPr marL="0" indent="0">
               <a:buNone/>
             </a:pPr>
             <a:r>
@@ -20802,7 +20579,7 @@
           <a:bodyPr wrap="square" lIns="0" tIns="0" rIns="0" bIns="0" rtlCol="0" anchor="ctr"/>
           <a:lstStyle/>
           <a:p>
-            <a:pPr indent="0" marL="0">
+            <a:pPr marL="0" indent="0">
               <a:buNone/>
             </a:pPr>
             <a:r>
@@ -20844,7 +20621,7 @@
             <a:prstDash val="solid"/>
           </a:ln>
           <a:effectLst>
-            <a:outerShdw sx="100000" sy="100000" kx="0" ky="0" algn="bl" rotWithShape="0" blurRad="101600" dist="38100" dir="8100000">
+            <a:outerShdw blurRad="101600" dist="38100" dir="8100000" algn="bl" rotWithShape="0">
               <a:srgbClr val="000000">
                 <a:alpha val="25000"/>
               </a:srgbClr>
@@ -20898,7 +20675,7 @@
           <a:bodyPr wrap="square" lIns="0" tIns="0" rIns="0" bIns="0" rtlCol="0" anchor="ctr"/>
           <a:lstStyle/>
           <a:p>
-            <a:pPr indent="0" marL="0">
+            <a:pPr marL="0" indent="0">
               <a:buNone/>
             </a:pPr>
             <a:r>
@@ -20937,7 +20714,7 @@
           <a:bodyPr wrap="square" lIns="0" tIns="0" rIns="0" bIns="0" rtlCol="0" anchor="ctr"/>
           <a:lstStyle/>
           <a:p>
-            <a:pPr indent="0" marL="0">
+            <a:pPr marL="0" indent="0">
               <a:buNone/>
             </a:pPr>
             <a:r>
@@ -20979,7 +20756,7 @@
             <a:prstDash val="solid"/>
           </a:ln>
           <a:effectLst>
-            <a:outerShdw sx="100000" sy="100000" kx="0" ky="0" algn="bl" rotWithShape="0" blurRad="101600" dist="38100" dir="8100000">
+            <a:outerShdw blurRad="101600" dist="38100" dir="8100000" algn="bl" rotWithShape="0">
               <a:srgbClr val="000000">
                 <a:alpha val="25000"/>
               </a:srgbClr>
@@ -21033,7 +20810,7 @@
           <a:bodyPr wrap="square" lIns="0" tIns="0" rIns="0" bIns="0" rtlCol="0" anchor="ctr"/>
           <a:lstStyle/>
           <a:p>
-            <a:pPr indent="0" marL="0">
+            <a:pPr marL="0" indent="0">
               <a:buNone/>
             </a:pPr>
             <a:r>
@@ -21072,7 +20849,7 @@
           <a:bodyPr wrap="square" lIns="0" tIns="0" rIns="0" bIns="0" rtlCol="0" anchor="ctr"/>
           <a:lstStyle/>
           <a:p>
-            <a:pPr indent="0" marL="0">
+            <a:pPr marL="0" indent="0">
               <a:buNone/>
             </a:pPr>
             <a:r>
@@ -21114,7 +20891,7 @@
             <a:prstDash val="solid"/>
           </a:ln>
           <a:effectLst>
-            <a:outerShdw sx="100000" sy="100000" kx="0" ky="0" algn="bl" rotWithShape="0" blurRad="101600" dist="38100" dir="8100000">
+            <a:outerShdw blurRad="101600" dist="38100" dir="8100000" algn="bl" rotWithShape="0">
               <a:srgbClr val="000000">
                 <a:alpha val="25000"/>
               </a:srgbClr>
@@ -21168,7 +20945,7 @@
           <a:bodyPr wrap="square" lIns="0" tIns="0" rIns="0" bIns="0" rtlCol="0" anchor="ctr"/>
           <a:lstStyle/>
           <a:p>
-            <a:pPr indent="0" marL="0">
+            <a:pPr marL="0" indent="0">
               <a:buNone/>
             </a:pPr>
             <a:r>
@@ -21207,7 +20984,7 @@
           <a:bodyPr wrap="square" lIns="0" tIns="0" rIns="0" bIns="0" rtlCol="0" anchor="ctr"/>
           <a:lstStyle/>
           <a:p>
-            <a:pPr indent="0" marL="0">
+            <a:pPr marL="0" indent="0">
               <a:buNone/>
             </a:pPr>
             <a:r>
@@ -21241,6 +21018,7 @@
         <a:solidFill>
           <a:srgbClr val="0D1B2A"/>
         </a:solidFill>
+        <a:effectLst/>
       </p:bgPr>
     </p:bg>
     <p:spTree>
@@ -21303,7 +21081,7 @@
           <a:bodyPr wrap="square" lIns="0" tIns="0" rIns="0" bIns="0" rtlCol="0" anchor="ctr"/>
           <a:lstStyle/>
           <a:p>
-            <a:pPr indent="0" marL="0">
+            <a:pPr marL="0" indent="0">
               <a:buNone/>
             </a:pPr>
             <a:r>
@@ -21342,7 +21120,7 @@
           <a:bodyPr wrap="square" lIns="0" tIns="0" rIns="0" bIns="0" rtlCol="0" anchor="ctr"/>
           <a:lstStyle/>
           <a:p>
-            <a:pPr indent="0" marL="0">
+            <a:pPr marL="0" indent="0">
               <a:buNone/>
             </a:pPr>
             <a:r>
@@ -21384,7 +21162,7 @@
             <a:prstDash val="solid"/>
           </a:ln>
           <a:effectLst>
-            <a:outerShdw sx="100000" sy="100000" kx="0" ky="0" algn="bl" rotWithShape="0" blurRad="101600" dist="38100" dir="8100000">
+            <a:outerShdw blurRad="101600" dist="38100" dir="8100000" algn="bl" rotWithShape="0">
               <a:srgbClr val="000000">
                 <a:alpha val="25000"/>
               </a:srgbClr>
@@ -21438,7 +21216,7 @@
           <a:bodyPr wrap="square" lIns="0" tIns="0" rIns="0" bIns="0" rtlCol="0" anchor="ctr"/>
           <a:lstStyle/>
           <a:p>
-            <a:pPr algn="ctr" indent="0" marL="0">
+            <a:pPr marL="0" indent="0" algn="ctr">
               <a:buNone/>
             </a:pPr>
             <a:r>
@@ -21474,7 +21252,7 @@
           <a:bodyPr wrap="square" lIns="0" tIns="0" rIns="0" bIns="0" rtlCol="0" anchor="ctr"/>
           <a:lstStyle/>
           <a:p>
-            <a:pPr algn="ctr" indent="0" marL="0">
+            <a:pPr marL="0" indent="0" algn="ctr">
               <a:buNone/>
             </a:pPr>
             <a:r>
@@ -21538,7 +21316,7 @@
           <a:bodyPr wrap="square" lIns="0" tIns="0" rIns="0" bIns="0" rtlCol="0" anchor="ctr"/>
           <a:lstStyle/>
           <a:p>
-            <a:pPr indent="0" marL="0">
+            <a:pPr marL="0" indent="0">
               <a:buNone/>
             </a:pPr>
             <a:r>
@@ -21602,7 +21380,7 @@
           <a:bodyPr wrap="square" lIns="0" tIns="0" rIns="0" bIns="0" rtlCol="0" anchor="ctr"/>
           <a:lstStyle/>
           <a:p>
-            <a:pPr indent="0" marL="0">
+            <a:pPr marL="0" indent="0">
               <a:buNone/>
             </a:pPr>
             <a:r>
@@ -21666,7 +21444,7 @@
           <a:bodyPr wrap="square" lIns="0" tIns="0" rIns="0" bIns="0" rtlCol="0" anchor="ctr"/>
           <a:lstStyle/>
           <a:p>
-            <a:pPr indent="0" marL="0">
+            <a:pPr marL="0" indent="0">
               <a:buNone/>
             </a:pPr>
             <a:r>
@@ -21708,7 +21486,7 @@
             <a:prstDash val="solid"/>
           </a:ln>
           <a:effectLst>
-            <a:outerShdw sx="100000" sy="100000" kx="0" ky="0" algn="bl" rotWithShape="0" blurRad="101600" dist="38100" dir="8100000">
+            <a:outerShdw blurRad="101600" dist="38100" dir="8100000" algn="bl" rotWithShape="0">
               <a:srgbClr val="000000">
                 <a:alpha val="25000"/>
               </a:srgbClr>
@@ -21762,7 +21540,7 @@
           <a:bodyPr wrap="square" lIns="0" tIns="0" rIns="0" bIns="0" rtlCol="0" anchor="ctr"/>
           <a:lstStyle/>
           <a:p>
-            <a:pPr algn="ctr" indent="0" marL="0">
+            <a:pPr marL="0" indent="0" algn="ctr">
               <a:buNone/>
             </a:pPr>
             <a:r>
@@ -21798,7 +21576,7 @@
           <a:bodyPr wrap="square" lIns="0" tIns="0" rIns="0" bIns="0" rtlCol="0" anchor="ctr"/>
           <a:lstStyle/>
           <a:p>
-            <a:pPr algn="ctr" indent="0" marL="0">
+            <a:pPr marL="0" indent="0" algn="ctr">
               <a:buNone/>
             </a:pPr>
             <a:r>
@@ -21862,7 +21640,7 @@
           <a:bodyPr wrap="square" lIns="0" tIns="0" rIns="0" bIns="0" rtlCol="0" anchor="ctr"/>
           <a:lstStyle/>
           <a:p>
-            <a:pPr indent="0" marL="0">
+            <a:pPr marL="0" indent="0">
               <a:buNone/>
             </a:pPr>
             <a:r>
@@ -21926,7 +21704,7 @@
           <a:bodyPr wrap="square" lIns="0" tIns="0" rIns="0" bIns="0" rtlCol="0" anchor="ctr"/>
           <a:lstStyle/>
           <a:p>
-            <a:pPr indent="0" marL="0">
+            <a:pPr marL="0" indent="0">
               <a:buNone/>
             </a:pPr>
             <a:r>
@@ -21990,7 +21768,7 @@
           <a:bodyPr wrap="square" lIns="0" tIns="0" rIns="0" bIns="0" rtlCol="0" anchor="ctr"/>
           <a:lstStyle/>
           <a:p>
-            <a:pPr indent="0" marL="0">
+            <a:pPr marL="0" indent="0">
               <a:buNone/>
             </a:pPr>
             <a:r>
@@ -22032,7 +21810,7 @@
             <a:prstDash val="solid"/>
           </a:ln>
           <a:effectLst>
-            <a:outerShdw sx="100000" sy="100000" kx="0" ky="0" algn="bl" rotWithShape="0" blurRad="101600" dist="38100" dir="8100000">
+            <a:outerShdw blurRad="101600" dist="38100" dir="8100000" algn="bl" rotWithShape="0">
               <a:srgbClr val="000000">
                 <a:alpha val="25000"/>
               </a:srgbClr>
@@ -22086,7 +21864,7 @@
           <a:bodyPr wrap="square" lIns="0" tIns="0" rIns="0" bIns="0" rtlCol="0" anchor="ctr"/>
           <a:lstStyle/>
           <a:p>
-            <a:pPr algn="ctr" indent="0" marL="0">
+            <a:pPr marL="0" indent="0" algn="ctr">
               <a:buNone/>
             </a:pPr>
             <a:r>
@@ -22122,7 +21900,7 @@
           <a:bodyPr wrap="square" lIns="0" tIns="0" rIns="0" bIns="0" rtlCol="0" anchor="ctr"/>
           <a:lstStyle/>
           <a:p>
-            <a:pPr algn="ctr" indent="0" marL="0">
+            <a:pPr marL="0" indent="0" algn="ctr">
               <a:buNone/>
             </a:pPr>
             <a:r>
@@ -22186,7 +21964,7 @@
           <a:bodyPr wrap="square" lIns="0" tIns="0" rIns="0" bIns="0" rtlCol="0" anchor="ctr"/>
           <a:lstStyle/>
           <a:p>
-            <a:pPr indent="0" marL="0">
+            <a:pPr marL="0" indent="0">
               <a:buNone/>
             </a:pPr>
             <a:r>
@@ -22250,7 +22028,7 @@
           <a:bodyPr wrap="square" lIns="0" tIns="0" rIns="0" bIns="0" rtlCol="0" anchor="ctr"/>
           <a:lstStyle/>
           <a:p>
-            <a:pPr indent="0" marL="0">
+            <a:pPr marL="0" indent="0">
               <a:buNone/>
             </a:pPr>
             <a:r>
@@ -22314,7 +22092,7 @@
           <a:bodyPr wrap="square" lIns="0" tIns="0" rIns="0" bIns="0" rtlCol="0" anchor="ctr"/>
           <a:lstStyle/>
           <a:p>
-            <a:pPr indent="0" marL="0">
+            <a:pPr marL="0" indent="0">
               <a:buNone/>
             </a:pPr>
             <a:r>
@@ -22356,7 +22134,7 @@
             <a:prstDash val="solid"/>
           </a:ln>
           <a:effectLst>
-            <a:outerShdw sx="100000" sy="100000" kx="0" ky="0" algn="bl" rotWithShape="0" blurRad="101600" dist="38100" dir="8100000">
+            <a:outerShdw blurRad="101600" dist="38100" dir="8100000" algn="bl" rotWithShape="0">
               <a:srgbClr val="000000">
                 <a:alpha val="25000"/>
               </a:srgbClr>
@@ -22410,7 +22188,7 @@
           <a:bodyPr wrap="square" lIns="0" tIns="0" rIns="0" bIns="0" rtlCol="0" anchor="ctr"/>
           <a:lstStyle/>
           <a:p>
-            <a:pPr indent="0" marL="0">
+            <a:pPr marL="0" indent="0">
               <a:buNone/>
             </a:pPr>
             <a:r>
@@ -22444,6 +22222,7 @@
         <a:solidFill>
           <a:srgbClr val="0D1B2A"/>
         </a:solidFill>
+        <a:effectLst/>
       </p:bgPr>
     </p:bg>
     <p:spTree>
@@ -22556,7 +22335,7 @@
           <a:bodyPr wrap="square" lIns="0" tIns="0" rIns="0" bIns="0" rtlCol="0" anchor="ctr"/>
           <a:lstStyle/>
           <a:p>
-            <a:pPr algn="ctr" indent="0" marL="0">
+            <a:pPr marL="0" indent="0" algn="ctr">
               <a:buNone/>
             </a:pPr>
             <a:r>
@@ -22592,7 +22371,7 @@
           <a:bodyPr wrap="square" lIns="0" tIns="0" rIns="0" bIns="0" rtlCol="0" anchor="ctr"/>
           <a:lstStyle/>
           <a:p>
-            <a:pPr algn="ctr" indent="0" marL="0">
+            <a:pPr marL="0" indent="0" algn="ctr">
               <a:buNone/>
             </a:pPr>
             <a:r>
@@ -22631,7 +22410,7 @@
           <a:bodyPr wrap="square" lIns="0" tIns="0" rIns="0" bIns="0" rtlCol="0" anchor="ctr"/>
           <a:lstStyle/>
           <a:p>
-            <a:pPr algn="ctr" indent="0" marL="0">
+            <a:pPr marL="0" indent="0" algn="ctr">
               <a:buNone/>
             </a:pPr>
             <a:r>
@@ -22697,7 +22476,7 @@
           <a:bodyPr wrap="square" lIns="0" tIns="0" rIns="0" bIns="0" rtlCol="0" anchor="ctr"/>
           <a:lstStyle/>
           <a:p>
-            <a:pPr indent="0" marL="0">
+            <a:pPr marL="0" indent="0">
               <a:buNone/>
             </a:pPr>
             <a:r>
@@ -22763,7 +22542,7 @@
           <a:bodyPr wrap="square" lIns="0" tIns="0" rIns="0" bIns="0" rtlCol="0" anchor="ctr"/>
           <a:lstStyle/>
           <a:p>
-            <a:pPr indent="0" marL="0">
+            <a:pPr marL="0" indent="0">
               <a:buNone/>
             </a:pPr>
             <a:r>
@@ -22829,7 +22608,7 @@
           <a:bodyPr wrap="square" lIns="0" tIns="0" rIns="0" bIns="0" rtlCol="0" anchor="ctr"/>
           <a:lstStyle/>
           <a:p>
-            <a:pPr indent="0" marL="0">
+            <a:pPr marL="0" indent="0">
               <a:buNone/>
             </a:pPr>
             <a:r>
@@ -22893,7 +22672,7 @@
           <a:bodyPr wrap="square" lIns="0" tIns="0" rIns="0" bIns="0" rtlCol="0" anchor="ctr"/>
           <a:lstStyle/>
           <a:p>
-            <a:pPr algn="ctr" indent="0" marL="0">
+            <a:pPr marL="0" indent="0" algn="ctr">
               <a:buNone/>
             </a:pPr>
             <a:r>
@@ -22927,6 +22706,7 @@
         <a:solidFill>
           <a:srgbClr val="0D1B2A"/>
         </a:solidFill>
+        <a:effectLst/>
       </p:bgPr>
     </p:bg>
     <p:spTree>
@@ -22989,7 +22769,7 @@
           <a:bodyPr wrap="square" lIns="0" tIns="0" rIns="0" bIns="0" rtlCol="0" anchor="ctr"/>
           <a:lstStyle/>
           <a:p>
-            <a:pPr indent="0" marL="0">
+            <a:pPr marL="0" indent="0">
               <a:buNone/>
             </a:pPr>
             <a:r>
@@ -23028,7 +22808,7 @@
           <a:bodyPr wrap="square" lIns="0" tIns="0" rIns="0" bIns="0" rtlCol="0" anchor="ctr"/>
           <a:lstStyle/>
           <a:p>
-            <a:pPr indent="0" marL="0">
+            <a:pPr marL="0" indent="0">
               <a:buNone/>
             </a:pPr>
             <a:r>
@@ -23070,7 +22850,7 @@
             <a:prstDash val="solid"/>
           </a:ln>
           <a:effectLst>
-            <a:outerShdw sx="100000" sy="100000" kx="0" ky="0" algn="bl" rotWithShape="0" blurRad="101600" dist="38100" dir="8100000">
+            <a:outerShdw blurRad="101600" dist="38100" dir="8100000" algn="bl" rotWithShape="0">
               <a:srgbClr val="000000">
                 <a:alpha val="25000"/>
               </a:srgbClr>
@@ -23099,7 +22879,7 @@
           <a:bodyPr wrap="square" lIns="0" tIns="0" rIns="0" bIns="0" rtlCol="0" anchor="ctr"/>
           <a:lstStyle/>
           <a:p>
-            <a:pPr indent="0" marL="0">
+            <a:pPr marL="0" indent="0">
               <a:buNone/>
             </a:pPr>
             <a:r>
@@ -23138,7 +22918,7 @@
           <a:bodyPr wrap="square" rtlCol="0" anchor="t"/>
           <a:lstStyle/>
           <a:p>
-            <a:pPr indent="0" marL="0">
+            <a:pPr marL="0" indent="0">
               <a:buNone/>
             </a:pPr>
             <a:r>
@@ -23152,9 +22932,6 @@
               </a:rPr>
               <a:t>A web application is software that </a:t>
             </a:r>
-            <a:pPr indent="0" marL="0">
-              <a:buNone/>
-            </a:pPr>
             <a:r>
               <a:rPr lang="en-US" sz="1350" b="1" dirty="0">
                 <a:solidFill>
@@ -23166,9 +22943,6 @@
               </a:rPr>
               <a:t>runs in a browser</a:t>
             </a:r>
-            <a:pPr indent="0" marL="0">
-              <a:buNone/>
-            </a:pPr>
             <a:r>
               <a:rPr lang="en-US" sz="1350" dirty="0">
                 <a:solidFill>
@@ -23180,9 +22954,6 @@
               </a:rPr>
               <a:t> and delivers </a:t>
             </a:r>
-            <a:pPr indent="0" marL="0">
-              <a:buNone/>
-            </a:pPr>
             <a:r>
               <a:rPr lang="en-US" sz="1350" b="1" dirty="0">
                 <a:solidFill>
@@ -23194,9 +22965,6 @@
               </a:rPr>
               <a:t>dynamic, interactive experiences</a:t>
             </a:r>
-            <a:pPr indent="0" marL="0">
-              <a:buNone/>
-            </a:pPr>
             <a:r>
               <a:rPr lang="en-US" sz="1350" dirty="0">
                 <a:solidFill>
@@ -23236,7 +23004,7 @@
             <a:prstDash val="solid"/>
           </a:ln>
           <a:effectLst>
-            <a:outerShdw sx="100000" sy="100000" kx="0" ky="0" algn="bl" rotWithShape="0" blurRad="101600" dist="38100" dir="8100000">
+            <a:outerShdw blurRad="101600" dist="38100" dir="8100000" algn="bl" rotWithShape="0">
               <a:srgbClr val="000000">
                 <a:alpha val="25000"/>
               </a:srgbClr>
@@ -23265,7 +23033,7 @@
           <a:bodyPr wrap="square" lIns="0" tIns="0" rIns="0" bIns="0" rtlCol="0" anchor="ctr"/>
           <a:lstStyle/>
           <a:p>
-            <a:pPr indent="0" marL="0">
+            <a:pPr marL="0" indent="0">
               <a:buNone/>
             </a:pPr>
             <a:r>
@@ -23304,7 +23072,7 @@
           <a:bodyPr wrap="square" lIns="0" tIns="0" rIns="0" bIns="0" rtlCol="0" anchor="ctr"/>
           <a:lstStyle/>
           <a:p>
-            <a:pPr indent="0" marL="0">
+            <a:pPr marL="0" indent="0">
               <a:buNone/>
             </a:pPr>
             <a:r>
@@ -23343,7 +23111,7 @@
           <a:bodyPr wrap="square" lIns="0" tIns="0" rIns="0" bIns="0" rtlCol="0" anchor="ctr"/>
           <a:lstStyle/>
           <a:p>
-            <a:pPr indent="0" marL="0">
+            <a:pPr marL="0" indent="0">
               <a:buNone/>
             </a:pPr>
             <a:r>
@@ -23382,7 +23150,7 @@
           <a:bodyPr wrap="square" lIns="0" tIns="0" rIns="0" bIns="0" rtlCol="0" anchor="ctr"/>
           <a:lstStyle/>
           <a:p>
-            <a:pPr indent="0" marL="0">
+            <a:pPr marL="0" indent="0">
               <a:buNone/>
             </a:pPr>
             <a:r>
@@ -23421,7 +23189,7 @@
           <a:bodyPr wrap="square" lIns="0" tIns="0" rIns="0" bIns="0" rtlCol="0" anchor="ctr"/>
           <a:lstStyle/>
           <a:p>
-            <a:pPr indent="0" marL="0">
+            <a:pPr marL="0" indent="0">
               <a:buNone/>
             </a:pPr>
             <a:r>
@@ -23463,7 +23231,7 @@
             <a:prstDash val="solid"/>
           </a:ln>
           <a:effectLst>
-            <a:outerShdw sx="100000" sy="100000" kx="0" ky="0" algn="bl" rotWithShape="0" blurRad="101600" dist="38100" dir="8100000">
+            <a:outerShdw blurRad="101600" dist="38100" dir="8100000" algn="bl" rotWithShape="0">
               <a:srgbClr val="000000">
                 <a:alpha val="25000"/>
               </a:srgbClr>
@@ -23517,7 +23285,7 @@
           <a:bodyPr wrap="square" lIns="0" tIns="0" rIns="0" bIns="0" rtlCol="0" anchor="ctr"/>
           <a:lstStyle/>
           <a:p>
-            <a:pPr indent="0" marL="0">
+            <a:pPr marL="0" indent="0">
               <a:buNone/>
             </a:pPr>
             <a:r>
@@ -23556,7 +23324,7 @@
           <a:bodyPr wrap="square" lIns="0" tIns="0" rIns="0" bIns="0" rtlCol="0" anchor="ctr"/>
           <a:lstStyle/>
           <a:p>
-            <a:pPr indent="0" marL="0">
+            <a:pPr marL="0" indent="0">
               <a:buNone/>
             </a:pPr>
             <a:r>
@@ -23590,6 +23358,7 @@
         <a:solidFill>
           <a:srgbClr val="0D1B2A"/>
         </a:solidFill>
+        <a:effectLst/>
       </p:bgPr>
     </p:bg>
     <p:spTree>
@@ -23652,7 +23421,7 @@
           <a:bodyPr wrap="square" lIns="0" tIns="0" rIns="0" bIns="0" rtlCol="0" anchor="ctr"/>
           <a:lstStyle/>
           <a:p>
-            <a:pPr indent="0" marL="0">
+            <a:pPr marL="0" indent="0">
               <a:buNone/>
             </a:pPr>
             <a:r>
@@ -23691,7 +23460,7 @@
           <a:bodyPr wrap="square" lIns="0" tIns="0" rIns="0" bIns="0" rtlCol="0" anchor="ctr"/>
           <a:lstStyle/>
           <a:p>
-            <a:pPr indent="0" marL="0">
+            <a:pPr marL="0" indent="0">
               <a:buNone/>
             </a:pPr>
             <a:r>
@@ -23733,7 +23502,7 @@
             <a:prstDash val="solid"/>
           </a:ln>
           <a:effectLst>
-            <a:outerShdw sx="100000" sy="100000" kx="0" ky="0" algn="bl" rotWithShape="0" blurRad="101600" dist="38100" dir="8100000">
+            <a:outerShdw blurRad="101600" dist="38100" dir="8100000" algn="bl" rotWithShape="0">
               <a:srgbClr val="000000">
                 <a:alpha val="25000"/>
               </a:srgbClr>
@@ -23762,7 +23531,7 @@
           <a:bodyPr wrap="square" lIns="0" tIns="0" rIns="0" bIns="0" rtlCol="0" anchor="ctr"/>
           <a:lstStyle/>
           <a:p>
-            <a:pPr algn="ctr" indent="0" marL="0">
+            <a:pPr marL="0" indent="0" algn="ctr">
               <a:buNone/>
             </a:pPr>
             <a:r>
@@ -23804,7 +23573,7 @@
             <a:prstDash val="solid"/>
           </a:ln>
           <a:effectLst>
-            <a:outerShdw sx="100000" sy="100000" kx="0" ky="0" algn="bl" rotWithShape="0" blurRad="101600" dist="38100" dir="8100000">
+            <a:outerShdw blurRad="101600" dist="38100" dir="8100000" algn="bl" rotWithShape="0">
               <a:srgbClr val="000000">
                 <a:alpha val="25000"/>
               </a:srgbClr>
@@ -23833,7 +23602,7 @@
           <a:bodyPr wrap="square" lIns="0" tIns="0" rIns="0" bIns="0" rtlCol="0" anchor="ctr"/>
           <a:lstStyle/>
           <a:p>
-            <a:pPr algn="ctr" indent="0" marL="0">
+            <a:pPr marL="0" indent="0" algn="ctr">
               <a:buNone/>
             </a:pPr>
             <a:r>
@@ -23875,7 +23644,7 @@
             <a:prstDash val="solid"/>
           </a:ln>
           <a:effectLst>
-            <a:outerShdw sx="100000" sy="100000" kx="0" ky="0" algn="bl" rotWithShape="0" blurRad="101600" dist="38100" dir="8100000">
+            <a:outerShdw blurRad="101600" dist="38100" dir="8100000" algn="bl" rotWithShape="0">
               <a:srgbClr val="000000">
                 <a:alpha val="25000"/>
               </a:srgbClr>
@@ -23904,7 +23673,7 @@
           <a:bodyPr wrap="square" lIns="0" tIns="0" rIns="0" bIns="0" rtlCol="0" anchor="ctr"/>
           <a:lstStyle/>
           <a:p>
-            <a:pPr indent="0" marL="0">
+            <a:pPr marL="0" indent="0">
               <a:buNone/>
             </a:pPr>
             <a:r>
@@ -23946,7 +23715,7 @@
             <a:prstDash val="solid"/>
           </a:ln>
           <a:effectLst>
-            <a:outerShdw sx="100000" sy="100000" kx="0" ky="0" algn="bl" rotWithShape="0" blurRad="101600" dist="38100" dir="8100000">
+            <a:outerShdw blurRad="101600" dist="38100" dir="8100000" algn="bl" rotWithShape="0">
               <a:srgbClr val="000000">
                 <a:alpha val="25000"/>
               </a:srgbClr>
@@ -23975,7 +23744,7 @@
           <a:bodyPr wrap="square" lIns="0" tIns="0" rIns="0" bIns="0" rtlCol="0" anchor="ctr"/>
           <a:lstStyle/>
           <a:p>
-            <a:pPr indent="0" marL="0">
+            <a:pPr marL="0" indent="0">
               <a:buNone/>
             </a:pPr>
             <a:r>
@@ -24042,7 +23811,7 @@
             <a:prstDash val="solid"/>
           </a:ln>
           <a:effectLst>
-            <a:outerShdw sx="100000" sy="100000" kx="0" ky="0" algn="bl" rotWithShape="0" blurRad="101600" dist="38100" dir="8100000">
+            <a:outerShdw blurRad="101600" dist="38100" dir="8100000" algn="bl" rotWithShape="0">
               <a:srgbClr val="000000">
                 <a:alpha val="25000"/>
               </a:srgbClr>
@@ -24071,7 +23840,7 @@
           <a:bodyPr wrap="square" lIns="0" tIns="0" rIns="0" bIns="0" rtlCol="0" anchor="ctr"/>
           <a:lstStyle/>
           <a:p>
-            <a:pPr indent="0" marL="0">
+            <a:pPr marL="0" indent="0">
               <a:buNone/>
             </a:pPr>
             <a:r>
@@ -24113,7 +23882,7 @@
             <a:prstDash val="solid"/>
           </a:ln>
           <a:effectLst>
-            <a:outerShdw sx="100000" sy="100000" kx="0" ky="0" algn="bl" rotWithShape="0" blurRad="101600" dist="38100" dir="8100000">
+            <a:outerShdw blurRad="101600" dist="38100" dir="8100000" algn="bl" rotWithShape="0">
               <a:srgbClr val="000000">
                 <a:alpha val="25000"/>
               </a:srgbClr>
@@ -24142,7 +23911,7 @@
           <a:bodyPr wrap="square" lIns="0" tIns="0" rIns="0" bIns="0" rtlCol="0" anchor="ctr"/>
           <a:lstStyle/>
           <a:p>
-            <a:pPr indent="0" marL="0">
+            <a:pPr marL="0" indent="0">
               <a:buNone/>
             </a:pPr>
             <a:r>
@@ -24209,7 +23978,7 @@
             <a:prstDash val="solid"/>
           </a:ln>
           <a:effectLst>
-            <a:outerShdw sx="100000" sy="100000" kx="0" ky="0" algn="bl" rotWithShape="0" blurRad="101600" dist="38100" dir="8100000">
+            <a:outerShdw blurRad="101600" dist="38100" dir="8100000" algn="bl" rotWithShape="0">
               <a:srgbClr val="000000">
                 <a:alpha val="25000"/>
               </a:srgbClr>
@@ -24238,7 +24007,7 @@
           <a:bodyPr wrap="square" lIns="0" tIns="0" rIns="0" bIns="0" rtlCol="0" anchor="ctr"/>
           <a:lstStyle/>
           <a:p>
-            <a:pPr indent="0" marL="0">
+            <a:pPr marL="0" indent="0">
               <a:buNone/>
             </a:pPr>
             <a:r>
@@ -24280,7 +24049,7 @@
             <a:prstDash val="solid"/>
           </a:ln>
           <a:effectLst>
-            <a:outerShdw sx="100000" sy="100000" kx="0" ky="0" algn="bl" rotWithShape="0" blurRad="101600" dist="38100" dir="8100000">
+            <a:outerShdw blurRad="101600" dist="38100" dir="8100000" algn="bl" rotWithShape="0">
               <a:srgbClr val="000000">
                 <a:alpha val="25000"/>
               </a:srgbClr>
@@ -24309,7 +24078,7 @@
           <a:bodyPr wrap="square" lIns="0" tIns="0" rIns="0" bIns="0" rtlCol="0" anchor="ctr"/>
           <a:lstStyle/>
           <a:p>
-            <a:pPr indent="0" marL="0">
+            <a:pPr marL="0" indent="0">
               <a:buNone/>
             </a:pPr>
             <a:r>
@@ -24376,7 +24145,7 @@
             <a:prstDash val="solid"/>
           </a:ln>
           <a:effectLst>
-            <a:outerShdw sx="100000" sy="100000" kx="0" ky="0" algn="bl" rotWithShape="0" blurRad="101600" dist="38100" dir="8100000">
+            <a:outerShdw blurRad="101600" dist="38100" dir="8100000" algn="bl" rotWithShape="0">
               <a:srgbClr val="000000">
                 <a:alpha val="25000"/>
               </a:srgbClr>
@@ -24405,7 +24174,7 @@
           <a:bodyPr wrap="square" lIns="0" tIns="0" rIns="0" bIns="0" rtlCol="0" anchor="ctr"/>
           <a:lstStyle/>
           <a:p>
-            <a:pPr indent="0" marL="0">
+            <a:pPr marL="0" indent="0">
               <a:buNone/>
             </a:pPr>
             <a:r>
@@ -24447,7 +24216,7 @@
             <a:prstDash val="solid"/>
           </a:ln>
           <a:effectLst>
-            <a:outerShdw sx="100000" sy="100000" kx="0" ky="0" algn="bl" rotWithShape="0" blurRad="101600" dist="38100" dir="8100000">
+            <a:outerShdw blurRad="101600" dist="38100" dir="8100000" algn="bl" rotWithShape="0">
               <a:srgbClr val="000000">
                 <a:alpha val="25000"/>
               </a:srgbClr>
@@ -24476,7 +24245,7 @@
           <a:bodyPr wrap="square" lIns="0" tIns="0" rIns="0" bIns="0" rtlCol="0" anchor="ctr"/>
           <a:lstStyle/>
           <a:p>
-            <a:pPr indent="0" marL="0">
+            <a:pPr marL="0" indent="0">
               <a:buNone/>
             </a:pPr>
             <a:r>
@@ -24543,7 +24312,7 @@
             <a:prstDash val="solid"/>
           </a:ln>
           <a:effectLst>
-            <a:outerShdw sx="100000" sy="100000" kx="0" ky="0" algn="bl" rotWithShape="0" blurRad="101600" dist="38100" dir="8100000">
+            <a:outerShdw blurRad="101600" dist="38100" dir="8100000" algn="bl" rotWithShape="0">
               <a:srgbClr val="000000">
                 <a:alpha val="25000"/>
               </a:srgbClr>
@@ -24572,7 +24341,7 @@
           <a:bodyPr wrap="square" lIns="0" tIns="0" rIns="0" bIns="0" rtlCol="0" anchor="ctr"/>
           <a:lstStyle/>
           <a:p>
-            <a:pPr indent="0" marL="0">
+            <a:pPr marL="0" indent="0">
               <a:buNone/>
             </a:pPr>
             <a:r>
@@ -24614,7 +24383,7 @@
             <a:prstDash val="solid"/>
           </a:ln>
           <a:effectLst>
-            <a:outerShdw sx="100000" sy="100000" kx="0" ky="0" algn="bl" rotWithShape="0" blurRad="101600" dist="38100" dir="8100000">
+            <a:outerShdw blurRad="101600" dist="38100" dir="8100000" algn="bl" rotWithShape="0">
               <a:srgbClr val="000000">
                 <a:alpha val="25000"/>
               </a:srgbClr>
@@ -24643,7 +24412,7 @@
           <a:bodyPr wrap="square" lIns="0" tIns="0" rIns="0" bIns="0" rtlCol="0" anchor="ctr"/>
           <a:lstStyle/>
           <a:p>
-            <a:pPr indent="0" marL="0">
+            <a:pPr marL="0" indent="0">
               <a:buNone/>
             </a:pPr>
             <a:r>
@@ -24702,6 +24471,7 @@
         <a:solidFill>
           <a:srgbClr val="0D1B2A"/>
         </a:solidFill>
+        <a:effectLst/>
       </p:bgPr>
     </p:bg>
     <p:spTree>
@@ -24764,7 +24534,7 @@
           <a:bodyPr wrap="square" lIns="0" tIns="0" rIns="0" bIns="0" rtlCol="0" anchor="ctr"/>
           <a:lstStyle/>
           <a:p>
-            <a:pPr indent="0" marL="0">
+            <a:pPr marL="0" indent="0">
               <a:buNone/>
             </a:pPr>
             <a:r>
@@ -24803,7 +24573,7 @@
           <a:bodyPr wrap="square" lIns="0" tIns="0" rIns="0" bIns="0" rtlCol="0" anchor="ctr"/>
           <a:lstStyle/>
           <a:p>
-            <a:pPr indent="0" marL="0">
+            <a:pPr marL="0" indent="0">
               <a:buNone/>
             </a:pPr>
             <a:r>
@@ -24845,7 +24615,7 @@
             <a:prstDash val="solid"/>
           </a:ln>
           <a:effectLst>
-            <a:outerShdw sx="100000" sy="100000" kx="0" ky="0" algn="bl" rotWithShape="0" blurRad="101600" dist="38100" dir="8100000">
+            <a:outerShdw blurRad="101600" dist="38100" dir="8100000" algn="bl" rotWithShape="0">
               <a:srgbClr val="000000">
                 <a:alpha val="25000"/>
               </a:srgbClr>
@@ -24874,7 +24644,7 @@
           <a:bodyPr wrap="square" lIns="0" tIns="0" rIns="0" bIns="0" rtlCol="0" anchor="ctr"/>
           <a:lstStyle/>
           <a:p>
-            <a:pPr algn="ctr" indent="0" marL="0">
+            <a:pPr marL="0" indent="0" algn="ctr">
               <a:buNone/>
             </a:pPr>
             <a:r>
@@ -24910,7 +24680,7 @@
           <a:bodyPr wrap="square" lIns="0" tIns="0" rIns="0" bIns="0" rtlCol="0" anchor="ctr"/>
           <a:lstStyle/>
           <a:p>
-            <a:pPr algn="ctr" indent="0" marL="0">
+            <a:pPr marL="0" indent="0" algn="ctr">
               <a:buNone/>
             </a:pPr>
             <a:r>
@@ -24949,7 +24719,7 @@
           <a:bodyPr wrap="square" lIns="0" tIns="0" rIns="0" bIns="0" rtlCol="0" anchor="ctr"/>
           <a:lstStyle/>
           <a:p>
-            <a:pPr algn="ctr" indent="0" marL="0">
+            <a:pPr marL="0" indent="0" algn="ctr">
               <a:buNone/>
             </a:pPr>
             <a:r>
@@ -24987,7 +24757,7 @@
               <a:srgbClr val="00D4FF"/>
             </a:solidFill>
             <a:prstDash val="solid"/>
-            <a:tailEnd type="open"/>
+            <a:tailEnd type="none"/>
           </a:ln>
         </p:spPr>
       </p:sp>
@@ -25015,7 +24785,7 @@
             <a:prstDash val="solid"/>
           </a:ln>
           <a:effectLst>
-            <a:outerShdw sx="100000" sy="100000" kx="0" ky="0" algn="bl" rotWithShape="0" blurRad="101600" dist="38100" dir="8100000">
+            <a:outerShdw blurRad="101600" dist="38100" dir="8100000" algn="bl" rotWithShape="0">
               <a:srgbClr val="000000">
                 <a:alpha val="25000"/>
               </a:srgbClr>
@@ -25044,7 +24814,7 @@
           <a:bodyPr wrap="square" lIns="0" tIns="0" rIns="0" bIns="0" rtlCol="0" anchor="ctr"/>
           <a:lstStyle/>
           <a:p>
-            <a:pPr algn="ctr" indent="0" marL="0">
+            <a:pPr marL="0" indent="0" algn="ctr">
               <a:buNone/>
             </a:pPr>
             <a:r>
@@ -25080,7 +24850,7 @@
           <a:bodyPr wrap="square" lIns="0" tIns="0" rIns="0" bIns="0" rtlCol="0" anchor="ctr"/>
           <a:lstStyle/>
           <a:p>
-            <a:pPr algn="ctr" indent="0" marL="0">
+            <a:pPr marL="0" indent="0" algn="ctr">
               <a:buNone/>
             </a:pPr>
             <a:r>
@@ -25119,7 +24889,7 @@
           <a:bodyPr wrap="square" lIns="0" tIns="0" rIns="0" bIns="0" rtlCol="0" anchor="ctr"/>
           <a:lstStyle/>
           <a:p>
-            <a:pPr algn="ctr" indent="0" marL="0">
+            <a:pPr marL="0" indent="0" algn="ctr">
               <a:buNone/>
             </a:pPr>
             <a:r>
@@ -25157,7 +24927,7 @@
               <a:srgbClr val="00D4FF"/>
             </a:solidFill>
             <a:prstDash val="solid"/>
-            <a:tailEnd type="open"/>
+            <a:tailEnd type="none"/>
           </a:ln>
         </p:spPr>
       </p:sp>
@@ -25185,7 +24955,7 @@
             <a:prstDash val="solid"/>
           </a:ln>
           <a:effectLst>
-            <a:outerShdw sx="100000" sy="100000" kx="0" ky="0" algn="bl" rotWithShape="0" blurRad="101600" dist="38100" dir="8100000">
+            <a:outerShdw blurRad="101600" dist="38100" dir="8100000" algn="bl" rotWithShape="0">
               <a:srgbClr val="000000">
                 <a:alpha val="25000"/>
               </a:srgbClr>
@@ -25214,7 +24984,7 @@
           <a:bodyPr wrap="square" lIns="0" tIns="0" rIns="0" bIns="0" rtlCol="0" anchor="ctr"/>
           <a:lstStyle/>
           <a:p>
-            <a:pPr algn="ctr" indent="0" marL="0">
+            <a:pPr marL="0" indent="0" algn="ctr">
               <a:buNone/>
             </a:pPr>
             <a:r>
@@ -25250,7 +25020,7 @@
           <a:bodyPr wrap="square" lIns="0" tIns="0" rIns="0" bIns="0" rtlCol="0" anchor="ctr"/>
           <a:lstStyle/>
           <a:p>
-            <a:pPr algn="ctr" indent="0" marL="0">
+            <a:pPr marL="0" indent="0" algn="ctr">
               <a:buNone/>
             </a:pPr>
             <a:r>
@@ -25289,7 +25059,7 @@
           <a:bodyPr wrap="square" lIns="0" tIns="0" rIns="0" bIns="0" rtlCol="0" anchor="ctr"/>
           <a:lstStyle/>
           <a:p>
-            <a:pPr algn="ctr" indent="0" marL="0">
+            <a:pPr marL="0" indent="0" algn="ctr">
               <a:buNone/>
             </a:pPr>
             <a:r>
@@ -25327,7 +25097,7 @@
               <a:srgbClr val="00D4FF"/>
             </a:solidFill>
             <a:prstDash val="solid"/>
-            <a:tailEnd type="open"/>
+            <a:tailEnd type="none"/>
           </a:ln>
         </p:spPr>
       </p:sp>
@@ -25355,7 +25125,7 @@
             <a:prstDash val="solid"/>
           </a:ln>
           <a:effectLst>
-            <a:outerShdw sx="100000" sy="100000" kx="0" ky="0" algn="bl" rotWithShape="0" blurRad="101600" dist="38100" dir="8100000">
+            <a:outerShdw blurRad="101600" dist="38100" dir="8100000" algn="bl" rotWithShape="0">
               <a:srgbClr val="000000">
                 <a:alpha val="25000"/>
               </a:srgbClr>
@@ -25384,7 +25154,7 @@
           <a:bodyPr wrap="square" lIns="0" tIns="0" rIns="0" bIns="0" rtlCol="0" anchor="ctr"/>
           <a:lstStyle/>
           <a:p>
-            <a:pPr algn="ctr" indent="0" marL="0">
+            <a:pPr marL="0" indent="0" algn="ctr">
               <a:buNone/>
             </a:pPr>
             <a:r>
@@ -25420,7 +25190,7 @@
           <a:bodyPr wrap="square" lIns="0" tIns="0" rIns="0" bIns="0" rtlCol="0" anchor="ctr"/>
           <a:lstStyle/>
           <a:p>
-            <a:pPr algn="ctr" indent="0" marL="0">
+            <a:pPr marL="0" indent="0" algn="ctr">
               <a:buNone/>
             </a:pPr>
             <a:r>
@@ -25459,7 +25229,7 @@
           <a:bodyPr wrap="square" lIns="0" tIns="0" rIns="0" bIns="0" rtlCol="0" anchor="ctr"/>
           <a:lstStyle/>
           <a:p>
-            <a:pPr algn="ctr" indent="0" marL="0">
+            <a:pPr marL="0" indent="0" algn="ctr">
               <a:buNone/>
             </a:pPr>
             <a:r>
@@ -25497,7 +25267,7 @@
               <a:srgbClr val="00D4FF"/>
             </a:solidFill>
             <a:prstDash val="solid"/>
-            <a:tailEnd type="open"/>
+            <a:tailEnd type="none"/>
           </a:ln>
         </p:spPr>
       </p:sp>
@@ -25525,7 +25295,7 @@
             <a:prstDash val="solid"/>
           </a:ln>
           <a:effectLst>
-            <a:outerShdw sx="100000" sy="100000" kx="0" ky="0" algn="bl" rotWithShape="0" blurRad="101600" dist="38100" dir="8100000">
+            <a:outerShdw blurRad="101600" dist="38100" dir="8100000" algn="bl" rotWithShape="0">
               <a:srgbClr val="000000">
                 <a:alpha val="25000"/>
               </a:srgbClr>
@@ -25554,7 +25324,7 @@
           <a:bodyPr wrap="square" lIns="0" tIns="0" rIns="0" bIns="0" rtlCol="0" anchor="ctr"/>
           <a:lstStyle/>
           <a:p>
-            <a:pPr algn="ctr" indent="0" marL="0">
+            <a:pPr marL="0" indent="0" algn="ctr">
               <a:buNone/>
             </a:pPr>
             <a:r>
@@ -25590,7 +25360,7 @@
           <a:bodyPr wrap="square" lIns="0" tIns="0" rIns="0" bIns="0" rtlCol="0" anchor="ctr"/>
           <a:lstStyle/>
           <a:p>
-            <a:pPr algn="ctr" indent="0" marL="0">
+            <a:pPr marL="0" indent="0" algn="ctr">
               <a:buNone/>
             </a:pPr>
             <a:r>
@@ -25629,7 +25399,7 @@
           <a:bodyPr wrap="square" lIns="0" tIns="0" rIns="0" bIns="0" rtlCol="0" anchor="ctr"/>
           <a:lstStyle/>
           <a:p>
-            <a:pPr algn="ctr" indent="0" marL="0">
+            <a:pPr marL="0" indent="0" algn="ctr">
               <a:buNone/>
             </a:pPr>
             <a:r>
@@ -25671,7 +25441,7 @@
             <a:prstDash val="solid"/>
           </a:ln>
           <a:effectLst>
-            <a:outerShdw sx="100000" sy="100000" kx="0" ky="0" algn="bl" rotWithShape="0" blurRad="101600" dist="38100" dir="8100000">
+            <a:outerShdw blurRad="101600" dist="38100" dir="8100000" algn="bl" rotWithShape="0">
               <a:srgbClr val="000000">
                 <a:alpha val="25000"/>
               </a:srgbClr>
@@ -25725,7 +25495,7 @@
           <a:bodyPr wrap="square" lIns="0" tIns="0" rIns="0" bIns="0" rtlCol="0" anchor="ctr"/>
           <a:lstStyle/>
           <a:p>
-            <a:pPr indent="0" marL="0">
+            <a:pPr marL="0" indent="0">
               <a:buNone/>
             </a:pPr>
             <a:r>
@@ -25764,7 +25534,7 @@
           <a:bodyPr wrap="square" lIns="0" tIns="0" rIns="0" bIns="0" rtlCol="0" anchor="ctr"/>
           <a:lstStyle/>
           <a:p>
-            <a:pPr indent="0" marL="0">
+            <a:pPr marL="0" indent="0">
               <a:buNone/>
             </a:pPr>
             <a:r>
@@ -25781,7 +25551,7 @@
             <a:endParaRPr lang="en-US" sz="1200" dirty="0"/>
           </a:p>
           <a:p>
-            <a:pPr indent="0" marL="0">
+            <a:pPr marL="0" indent="0">
               <a:buNone/>
             </a:pPr>
             <a:r>
@@ -25823,7 +25593,7 @@
             <a:prstDash val="solid"/>
           </a:ln>
           <a:effectLst>
-            <a:outerShdw sx="100000" sy="100000" kx="0" ky="0" algn="bl" rotWithShape="0" blurRad="101600" dist="38100" dir="8100000">
+            <a:outerShdw blurRad="101600" dist="38100" dir="8100000" algn="bl" rotWithShape="0">
               <a:srgbClr val="000000">
                 <a:alpha val="25000"/>
               </a:srgbClr>
@@ -25877,7 +25647,7 @@
           <a:bodyPr wrap="square" lIns="0" tIns="0" rIns="0" bIns="0" rtlCol="0" anchor="ctr"/>
           <a:lstStyle/>
           <a:p>
-            <a:pPr indent="0" marL="0">
+            <a:pPr marL="0" indent="0">
               <a:buNone/>
             </a:pPr>
             <a:r>
@@ -25916,7 +25686,7 @@
           <a:bodyPr wrap="square" lIns="0" tIns="0" rIns="0" bIns="0" rtlCol="0" anchor="ctr"/>
           <a:lstStyle/>
           <a:p>
-            <a:pPr indent="0" marL="0">
+            <a:pPr marL="0" indent="0">
               <a:buNone/>
             </a:pPr>
             <a:r>
@@ -25933,7 +25703,7 @@
             <a:endParaRPr lang="en-US" sz="1200" dirty="0"/>
           </a:p>
           <a:p>
-            <a:pPr indent="0" marL="0">
+            <a:pPr marL="0" indent="0">
               <a:buNone/>
             </a:pPr>
             <a:r>
@@ -25975,7 +25745,7 @@
             <a:prstDash val="solid"/>
           </a:ln>
           <a:effectLst>
-            <a:outerShdw sx="100000" sy="100000" kx="0" ky="0" algn="bl" rotWithShape="0" blurRad="101600" dist="38100" dir="8100000">
+            <a:outerShdw blurRad="101600" dist="38100" dir="8100000" algn="bl" rotWithShape="0">
               <a:srgbClr val="000000">
                 <a:alpha val="25000"/>
               </a:srgbClr>
@@ -26029,7 +25799,7 @@
           <a:bodyPr wrap="square" lIns="0" tIns="0" rIns="0" bIns="0" rtlCol="0" anchor="ctr"/>
           <a:lstStyle/>
           <a:p>
-            <a:pPr indent="0" marL="0">
+            <a:pPr marL="0" indent="0">
               <a:buNone/>
             </a:pPr>
             <a:r>
@@ -26068,7 +25838,7 @@
           <a:bodyPr wrap="square" lIns="0" tIns="0" rIns="0" bIns="0" rtlCol="0" anchor="ctr"/>
           <a:lstStyle/>
           <a:p>
-            <a:pPr indent="0" marL="0">
+            <a:pPr marL="0" indent="0">
               <a:buNone/>
             </a:pPr>
             <a:r>
@@ -26085,7 +25855,7 @@
             <a:endParaRPr lang="en-US" sz="1200" dirty="0"/>
           </a:p>
           <a:p>
-            <a:pPr indent="0" marL="0">
+            <a:pPr marL="0" indent="0">
               <a:buNone/>
             </a:pPr>
             <a:r>
@@ -26119,6 +25889,7 @@
         <a:solidFill>
           <a:srgbClr val="0D1B2A"/>
         </a:solidFill>
+        <a:effectLst/>
       </p:bgPr>
     </p:bg>
     <p:spTree>
@@ -26181,7 +25952,7 @@
           <a:bodyPr wrap="square" lIns="0" tIns="0" rIns="0" bIns="0" rtlCol="0" anchor="ctr"/>
           <a:lstStyle/>
           <a:p>
-            <a:pPr indent="0" marL="0">
+            <a:pPr marL="0" indent="0">
               <a:buNone/>
             </a:pPr>
             <a:r>
@@ -26220,7 +25991,7 @@
           <a:bodyPr wrap="square" lIns="0" tIns="0" rIns="0" bIns="0" rtlCol="0" anchor="ctr"/>
           <a:lstStyle/>
           <a:p>
-            <a:pPr indent="0" marL="0">
+            <a:pPr marL="0" indent="0">
               <a:buNone/>
             </a:pPr>
             <a:r>
@@ -26262,7 +26033,7 @@
             <a:prstDash val="solid"/>
           </a:ln>
           <a:effectLst>
-            <a:outerShdw sx="100000" sy="100000" kx="0" ky="0" algn="bl" rotWithShape="0" blurRad="101600" dist="38100" dir="8100000">
+            <a:outerShdw blurRad="101600" dist="38100" dir="8100000" algn="bl" rotWithShape="0">
               <a:srgbClr val="000000">
                 <a:alpha val="25000"/>
               </a:srgbClr>
@@ -26316,7 +26087,7 @@
           <a:bodyPr wrap="square" lIns="0" tIns="0" rIns="0" bIns="0" rtlCol="0" anchor="ctr"/>
           <a:lstStyle/>
           <a:p>
-            <a:pPr indent="0" marL="0">
+            <a:pPr marL="0" indent="0">
               <a:buNone/>
             </a:pPr>
             <a:r>
@@ -26355,7 +26126,7 @@
           <a:bodyPr wrap="square" lIns="0" tIns="0" rIns="0" bIns="0" rtlCol="0" anchor="ctr"/>
           <a:lstStyle/>
           <a:p>
-            <a:pPr indent="0" marL="0">
+            <a:pPr marL="0" indent="0">
               <a:buNone/>
             </a:pPr>
             <a:r>
@@ -26372,7 +26143,7 @@
             <a:endParaRPr lang="en-US" sz="1300" dirty="0"/>
           </a:p>
           <a:p>
-            <a:pPr indent="0" marL="0">
+            <a:pPr marL="0" indent="0">
               <a:buNone/>
             </a:pPr>
             <a:r>
@@ -26389,7 +26160,7 @@
             <a:endParaRPr lang="en-US" sz="1300" dirty="0"/>
           </a:p>
           <a:p>
-            <a:pPr indent="0" marL="0">
+            <a:pPr marL="0" indent="0">
               <a:buNone/>
             </a:pPr>
             <a:r>
@@ -26453,7 +26224,7 @@
           <a:bodyPr wrap="square" lIns="0" tIns="0" rIns="0" bIns="0" rtlCol="0" anchor="ctr"/>
           <a:lstStyle/>
           <a:p>
-            <a:pPr indent="0" marL="0">
+            <a:pPr marL="0" indent="0">
               <a:buNone/>
             </a:pPr>
             <a:r>
@@ -26517,7 +26288,7 @@
           <a:bodyPr wrap="square" lIns="0" tIns="0" rIns="0" bIns="0" rtlCol="0" anchor="ctr"/>
           <a:lstStyle/>
           <a:p>
-            <a:pPr indent="0" marL="0">
+            <a:pPr marL="0" indent="0">
               <a:buNone/>
             </a:pPr>
             <a:r>
@@ -26581,7 +26352,7 @@
           <a:bodyPr wrap="square" lIns="0" tIns="0" rIns="0" bIns="0" rtlCol="0" anchor="ctr"/>
           <a:lstStyle/>
           <a:p>
-            <a:pPr indent="0" marL="0">
+            <a:pPr marL="0" indent="0">
               <a:buNone/>
             </a:pPr>
             <a:r>
@@ -26645,7 +26416,7 @@
           <a:bodyPr wrap="square" lIns="0" tIns="0" rIns="0" bIns="0" rtlCol="0" anchor="ctr"/>
           <a:lstStyle/>
           <a:p>
-            <a:pPr indent="0" marL="0">
+            <a:pPr marL="0" indent="0">
               <a:buNone/>
             </a:pPr>
             <a:r>
@@ -26684,7 +26455,7 @@
           <a:bodyPr wrap="square" lIns="0" tIns="0" rIns="0" bIns="0" rtlCol="0" anchor="ctr"/>
           <a:lstStyle/>
           <a:p>
-            <a:pPr algn="ctr" indent="0" marL="0">
+            <a:pPr marL="0" indent="0" algn="ctr">
               <a:buNone/>
             </a:pPr>
             <a:r>
@@ -26722,7 +26493,7 @@
               <a:srgbClr val="00D4FF"/>
             </a:solidFill>
             <a:prstDash val="solid"/>
-            <a:tailEnd type="open"/>
+            <a:tailEnd type="none"/>
           </a:ln>
         </p:spPr>
       </p:sp>
@@ -26747,7 +26518,7 @@
           <a:bodyPr wrap="square" lIns="0" tIns="0" rIns="0" bIns="0" rtlCol="0" anchor="ctr"/>
           <a:lstStyle/>
           <a:p>
-            <a:pPr algn="ctr" indent="0" marL="0">
+            <a:pPr marL="0" indent="0" algn="ctr">
               <a:buNone/>
             </a:pPr>
             <a:r>
@@ -26774,7 +26545,7 @@
         <p:spPr>
           <a:xfrm>
             <a:off x="4937760" y="2944368"/>
-            <a:ext cx="-749808" cy="0"/>
+            <a:ext cx="0" cy="0"/>
           </a:xfrm>
           <a:prstGeom prst="line">
             <a:avLst/>
@@ -26785,7 +26556,7 @@
               <a:srgbClr val="10B981"/>
             </a:solidFill>
             <a:prstDash val="solid"/>
-            <a:tailEnd type="open"/>
+            <a:tailEnd type="none"/>
           </a:ln>
         </p:spPr>
       </p:sp>
@@ -26813,7 +26584,7 @@
             <a:prstDash val="solid"/>
           </a:ln>
           <a:effectLst>
-            <a:outerShdw sx="100000" sy="100000" kx="0" ky="0" algn="bl" rotWithShape="0" blurRad="101600" dist="38100" dir="8100000">
+            <a:outerShdw blurRad="101600" dist="38100" dir="8100000" algn="bl" rotWithShape="0">
               <a:srgbClr val="000000">
                 <a:alpha val="25000"/>
               </a:srgbClr>
@@ -26867,7 +26638,7 @@
           <a:bodyPr wrap="square" lIns="0" tIns="0" rIns="0" bIns="0" rtlCol="0" anchor="ctr"/>
           <a:lstStyle/>
           <a:p>
-            <a:pPr indent="0" marL="0">
+            <a:pPr marL="0" indent="0">
               <a:buNone/>
             </a:pPr>
             <a:r>
@@ -26906,7 +26677,7 @@
           <a:bodyPr wrap="square" lIns="0" tIns="0" rIns="0" bIns="0" rtlCol="0" anchor="ctr"/>
           <a:lstStyle/>
           <a:p>
-            <a:pPr indent="0" marL="0">
+            <a:pPr marL="0" indent="0">
               <a:buNone/>
             </a:pPr>
             <a:r>
@@ -26923,7 +26694,7 @@
             <a:endParaRPr lang="en-US" sz="1300" dirty="0"/>
           </a:p>
           <a:p>
-            <a:pPr indent="0" marL="0">
+            <a:pPr marL="0" indent="0">
               <a:buNone/>
             </a:pPr>
             <a:r>
@@ -26940,7 +26711,7 @@
             <a:endParaRPr lang="en-US" sz="1300" dirty="0"/>
           </a:p>
           <a:p>
-            <a:pPr indent="0" marL="0">
+            <a:pPr marL="0" indent="0">
               <a:buNone/>
             </a:pPr>
             <a:r>
@@ -27004,7 +26775,7 @@
           <a:bodyPr wrap="square" lIns="0" tIns="0" rIns="0" bIns="0" rtlCol="0" anchor="ctr"/>
           <a:lstStyle/>
           <a:p>
-            <a:pPr indent="0" marL="0">
+            <a:pPr marL="0" indent="0">
               <a:buNone/>
             </a:pPr>
             <a:r>
@@ -27068,7 +26839,7 @@
           <a:bodyPr wrap="square" lIns="0" tIns="0" rIns="0" bIns="0" rtlCol="0" anchor="ctr"/>
           <a:lstStyle/>
           <a:p>
-            <a:pPr indent="0" marL="0">
+            <a:pPr marL="0" indent="0">
               <a:buNone/>
             </a:pPr>
             <a:r>
@@ -27132,7 +26903,7 @@
           <a:bodyPr wrap="square" lIns="0" tIns="0" rIns="0" bIns="0" rtlCol="0" anchor="ctr"/>
           <a:lstStyle/>
           <a:p>
-            <a:pPr indent="0" marL="0">
+            <a:pPr marL="0" indent="0">
               <a:buNone/>
             </a:pPr>
             <a:r>
@@ -27196,7 +26967,7 @@
           <a:bodyPr wrap="square" lIns="0" tIns="0" rIns="0" bIns="0" rtlCol="0" anchor="ctr"/>
           <a:lstStyle/>
           <a:p>
-            <a:pPr indent="0" marL="0">
+            <a:pPr marL="0" indent="0">
               <a:buNone/>
             </a:pPr>
             <a:r>
@@ -27230,6 +27001,7 @@
         <a:solidFill>
           <a:srgbClr val="0D1B2A"/>
         </a:solidFill>
+        <a:effectLst/>
       </p:bgPr>
     </p:bg>
     <p:spTree>
@@ -27292,7 +27064,7 @@
           <a:bodyPr wrap="square" lIns="0" tIns="0" rIns="0" bIns="0" rtlCol="0" anchor="ctr"/>
           <a:lstStyle/>
           <a:p>
-            <a:pPr indent="0" marL="0">
+            <a:pPr marL="0" indent="0">
               <a:buNone/>
             </a:pPr>
             <a:r>
@@ -27331,7 +27103,7 @@
           <a:bodyPr wrap="square" lIns="0" tIns="0" rIns="0" bIns="0" rtlCol="0" anchor="ctr"/>
           <a:lstStyle/>
           <a:p>
-            <a:pPr indent="0" marL="0">
+            <a:pPr marL="0" indent="0">
               <a:buNone/>
             </a:pPr>
             <a:r>
@@ -27373,7 +27145,7 @@
             <a:prstDash val="solid"/>
           </a:ln>
           <a:effectLst>
-            <a:outerShdw sx="100000" sy="100000" kx="0" ky="0" algn="bl" rotWithShape="0" blurRad="101600" dist="38100" dir="8100000">
+            <a:outerShdw blurRad="101600" dist="38100" dir="8100000" algn="bl" rotWithShape="0">
               <a:srgbClr val="000000">
                 <a:alpha val="25000"/>
               </a:srgbClr>
@@ -27427,7 +27199,7 @@
           <a:bodyPr wrap="square" lIns="0" tIns="0" rIns="0" bIns="0" rtlCol="0" anchor="ctr"/>
           <a:lstStyle/>
           <a:p>
-            <a:pPr algn="ctr" indent="0" marL="0">
+            <a:pPr marL="0" indent="0" algn="ctr">
               <a:buNone/>
             </a:pPr>
             <a:r>
@@ -27466,7 +27238,7 @@
           <a:bodyPr wrap="square" lIns="0" tIns="0" rIns="0" bIns="0" rtlCol="0" anchor="ctr"/>
           <a:lstStyle/>
           <a:p>
-            <a:pPr algn="ctr" indent="0" marL="0">
+            <a:pPr marL="0" indent="0" algn="ctr">
               <a:buNone/>
             </a:pPr>
             <a:r>
@@ -27483,7 +27255,7 @@
             <a:endParaRPr lang="en-US" sz="1150" dirty="0"/>
           </a:p>
           <a:p>
-            <a:pPr algn="ctr" indent="0" marL="0">
+            <a:pPr marL="0" indent="0" algn="ctr">
               <a:buNone/>
             </a:pPr>
             <a:r>
@@ -27521,7 +27293,7 @@
               <a:srgbClr val="00D4FF"/>
             </a:solidFill>
             <a:prstDash val="solid"/>
-            <a:tailEnd type="open"/>
+            <a:tailEnd type="none"/>
           </a:ln>
         </p:spPr>
       </p:sp>
@@ -27549,7 +27321,7 @@
             <a:prstDash val="solid"/>
           </a:ln>
           <a:effectLst>
-            <a:outerShdw sx="100000" sy="100000" kx="0" ky="0" algn="bl" rotWithShape="0" blurRad="101600" dist="38100" dir="8100000">
+            <a:outerShdw blurRad="101600" dist="38100" dir="8100000" algn="bl" rotWithShape="0">
               <a:srgbClr val="000000">
                 <a:alpha val="25000"/>
               </a:srgbClr>
@@ -27603,7 +27375,7 @@
           <a:bodyPr wrap="square" lIns="0" tIns="0" rIns="0" bIns="0" rtlCol="0" anchor="ctr"/>
           <a:lstStyle/>
           <a:p>
-            <a:pPr algn="ctr" indent="0" marL="0">
+            <a:pPr marL="0" indent="0" algn="ctr">
               <a:buNone/>
             </a:pPr>
             <a:r>
@@ -27642,7 +27414,7 @@
           <a:bodyPr wrap="square" lIns="0" tIns="0" rIns="0" bIns="0" rtlCol="0" anchor="ctr"/>
           <a:lstStyle/>
           <a:p>
-            <a:pPr algn="ctr" indent="0" marL="0">
+            <a:pPr marL="0" indent="0" algn="ctr">
               <a:buNone/>
             </a:pPr>
             <a:r>
@@ -27659,7 +27431,7 @@
             <a:endParaRPr lang="en-US" sz="1150" dirty="0"/>
           </a:p>
           <a:p>
-            <a:pPr algn="ctr" indent="0" marL="0">
+            <a:pPr marL="0" indent="0" algn="ctr">
               <a:buNone/>
             </a:pPr>
             <a:r>
@@ -27697,7 +27469,7 @@
               <a:srgbClr val="00D4FF"/>
             </a:solidFill>
             <a:prstDash val="solid"/>
-            <a:tailEnd type="open"/>
+            <a:tailEnd type="none"/>
           </a:ln>
         </p:spPr>
       </p:sp>
@@ -27725,7 +27497,7 @@
             <a:prstDash val="solid"/>
           </a:ln>
           <a:effectLst>
-            <a:outerShdw sx="100000" sy="100000" kx="0" ky="0" algn="bl" rotWithShape="0" blurRad="101600" dist="38100" dir="8100000">
+            <a:outerShdw blurRad="101600" dist="38100" dir="8100000" algn="bl" rotWithShape="0">
               <a:srgbClr val="000000">
                 <a:alpha val="25000"/>
               </a:srgbClr>
@@ -27779,7 +27551,7 @@
           <a:bodyPr wrap="square" lIns="0" tIns="0" rIns="0" bIns="0" rtlCol="0" anchor="ctr"/>
           <a:lstStyle/>
           <a:p>
-            <a:pPr algn="ctr" indent="0" marL="0">
+            <a:pPr marL="0" indent="0" algn="ctr">
               <a:buNone/>
             </a:pPr>
             <a:r>
@@ -27818,7 +27590,7 @@
           <a:bodyPr wrap="square" lIns="0" tIns="0" rIns="0" bIns="0" rtlCol="0" anchor="ctr"/>
           <a:lstStyle/>
           <a:p>
-            <a:pPr algn="ctr" indent="0" marL="0">
+            <a:pPr marL="0" indent="0" algn="ctr">
               <a:buNone/>
             </a:pPr>
             <a:r>
@@ -27835,7 +27607,7 @@
             <a:endParaRPr lang="en-US" sz="1150" dirty="0"/>
           </a:p>
           <a:p>
-            <a:pPr algn="ctr" indent="0" marL="0">
+            <a:pPr marL="0" indent="0" algn="ctr">
               <a:buNone/>
             </a:pPr>
             <a:r>
@@ -27873,7 +27645,7 @@
               <a:srgbClr val="00D4FF"/>
             </a:solidFill>
             <a:prstDash val="solid"/>
-            <a:tailEnd type="open"/>
+            <a:tailEnd type="none"/>
           </a:ln>
         </p:spPr>
       </p:sp>
@@ -27901,7 +27673,7 @@
             <a:prstDash val="solid"/>
           </a:ln>
           <a:effectLst>
-            <a:outerShdw sx="100000" sy="100000" kx="0" ky="0" algn="bl" rotWithShape="0" blurRad="101600" dist="38100" dir="8100000">
+            <a:outerShdw blurRad="101600" dist="38100" dir="8100000" algn="bl" rotWithShape="0">
               <a:srgbClr val="000000">
                 <a:alpha val="25000"/>
               </a:srgbClr>
@@ -27955,7 +27727,7 @@
           <a:bodyPr wrap="square" lIns="0" tIns="0" rIns="0" bIns="0" rtlCol="0" anchor="ctr"/>
           <a:lstStyle/>
           <a:p>
-            <a:pPr algn="ctr" indent="0" marL="0">
+            <a:pPr marL="0" indent="0" algn="ctr">
               <a:buNone/>
             </a:pPr>
             <a:r>
@@ -27994,7 +27766,7 @@
           <a:bodyPr wrap="square" lIns="0" tIns="0" rIns="0" bIns="0" rtlCol="0" anchor="ctr"/>
           <a:lstStyle/>
           <a:p>
-            <a:pPr algn="ctr" indent="0" marL="0">
+            <a:pPr marL="0" indent="0" algn="ctr">
               <a:buNone/>
             </a:pPr>
             <a:r>
@@ -28011,7 +27783,7 @@
             <a:endParaRPr lang="en-US" sz="1150" dirty="0"/>
           </a:p>
           <a:p>
-            <a:pPr algn="ctr" indent="0" marL="0">
+            <a:pPr marL="0" indent="0" algn="ctr">
               <a:buNone/>
             </a:pPr>
             <a:r>
@@ -28049,7 +27821,7 @@
               <a:srgbClr val="00D4FF"/>
             </a:solidFill>
             <a:prstDash val="solid"/>
-            <a:tailEnd type="open"/>
+            <a:tailEnd type="none"/>
           </a:ln>
         </p:spPr>
       </p:sp>
@@ -28077,7 +27849,7 @@
             <a:prstDash val="solid"/>
           </a:ln>
           <a:effectLst>
-            <a:outerShdw sx="100000" sy="100000" kx="0" ky="0" algn="bl" rotWithShape="0" blurRad="101600" dist="38100" dir="8100000">
+            <a:outerShdw blurRad="101600" dist="38100" dir="8100000" algn="bl" rotWithShape="0">
               <a:srgbClr val="000000">
                 <a:alpha val="25000"/>
               </a:srgbClr>
@@ -28131,7 +27903,7 @@
           <a:bodyPr wrap="square" lIns="0" tIns="0" rIns="0" bIns="0" rtlCol="0" anchor="ctr"/>
           <a:lstStyle/>
           <a:p>
-            <a:pPr algn="ctr" indent="0" marL="0">
+            <a:pPr marL="0" indent="0" algn="ctr">
               <a:buNone/>
             </a:pPr>
             <a:r>
@@ -28170,7 +27942,7 @@
           <a:bodyPr wrap="square" lIns="0" tIns="0" rIns="0" bIns="0" rtlCol="0" anchor="ctr"/>
           <a:lstStyle/>
           <a:p>
-            <a:pPr algn="ctr" indent="0" marL="0">
+            <a:pPr marL="0" indent="0" algn="ctr">
               <a:buNone/>
             </a:pPr>
             <a:r>
@@ -28187,7 +27959,7 @@
             <a:endParaRPr lang="en-US" sz="1150" dirty="0"/>
           </a:p>
           <a:p>
-            <a:pPr algn="ctr" indent="0" marL="0">
+            <a:pPr marL="0" indent="0" algn="ctr">
               <a:buNone/>
             </a:pPr>
             <a:r>
@@ -28229,7 +28001,7 @@
             <a:prstDash val="solid"/>
           </a:ln>
           <a:effectLst>
-            <a:outerShdw sx="100000" sy="100000" kx="0" ky="0" algn="bl" rotWithShape="0" blurRad="101600" dist="38100" dir="8100000">
+            <a:outerShdw blurRad="101600" dist="38100" dir="8100000" algn="bl" rotWithShape="0">
               <a:srgbClr val="000000">
                 <a:alpha val="25000"/>
               </a:srgbClr>
@@ -28283,7 +28055,7 @@
           <a:bodyPr wrap="square" lIns="0" tIns="0" rIns="0" bIns="0" rtlCol="0" anchor="ctr"/>
           <a:lstStyle/>
           <a:p>
-            <a:pPr indent="0" marL="0">
+            <a:pPr marL="0" indent="0">
               <a:buNone/>
             </a:pPr>
             <a:r>
@@ -28349,7 +28121,7 @@
           <a:bodyPr wrap="square" lIns="0" tIns="0" rIns="0" bIns="0" rtlCol="0" anchor="ctr"/>
           <a:lstStyle/>
           <a:p>
-            <a:pPr algn="ctr" indent="0" marL="0">
+            <a:pPr marL="0" indent="0" algn="ctr">
               <a:buNone/>
             </a:pPr>
             <a:r>
@@ -28415,7 +28187,7 @@
           <a:bodyPr wrap="square" lIns="0" tIns="0" rIns="0" bIns="0" rtlCol="0" anchor="ctr"/>
           <a:lstStyle/>
           <a:p>
-            <a:pPr algn="ctr" indent="0" marL="0">
+            <a:pPr marL="0" indent="0" algn="ctr">
               <a:buNone/>
             </a:pPr>
             <a:r>
@@ -28442,7 +28214,7 @@
         <p:spPr>
           <a:xfrm>
             <a:off x="2450592" y="3803904"/>
-            <a:ext cx="-137160" cy="0"/>
+            <a:ext cx="0" cy="0"/>
           </a:xfrm>
           <a:prstGeom prst="line">
             <a:avLst/>
@@ -28453,7 +28225,7 @@
               <a:srgbClr val="FFFFFF"/>
             </a:solidFill>
             <a:prstDash val="solid"/>
-            <a:tailEnd type="open"/>
+            <a:tailEnd type="none"/>
           </a:ln>
         </p:spPr>
       </p:sp>
@@ -28505,7 +28277,7 @@
           <a:bodyPr wrap="square" lIns="0" tIns="0" rIns="0" bIns="0" rtlCol="0" anchor="ctr"/>
           <a:lstStyle/>
           <a:p>
-            <a:pPr algn="ctr" indent="0" marL="0">
+            <a:pPr marL="0" indent="0" algn="ctr">
               <a:buNone/>
             </a:pPr>
             <a:r>
@@ -28532,7 +28304,7 @@
         <p:spPr>
           <a:xfrm>
             <a:off x="4553712" y="3803904"/>
-            <a:ext cx="-137160" cy="0"/>
+            <a:ext cx="0" cy="0"/>
           </a:xfrm>
           <a:prstGeom prst="line">
             <a:avLst/>
@@ -28543,7 +28315,7 @@
               <a:srgbClr val="FFFFFF"/>
             </a:solidFill>
             <a:prstDash val="solid"/>
-            <a:tailEnd type="open"/>
+            <a:tailEnd type="none"/>
           </a:ln>
         </p:spPr>
       </p:sp>
@@ -28595,7 +28367,7 @@
           <a:bodyPr wrap="square" lIns="0" tIns="0" rIns="0" bIns="0" rtlCol="0" anchor="ctr"/>
           <a:lstStyle/>
           <a:p>
-            <a:pPr algn="ctr" indent="0" marL="0">
+            <a:pPr marL="0" indent="0" algn="ctr">
               <a:buNone/>
             </a:pPr>
             <a:r>
@@ -28622,7 +28394,7 @@
         <p:spPr>
           <a:xfrm>
             <a:off x="6656832" y="3803904"/>
-            <a:ext cx="-137160" cy="0"/>
+            <a:ext cx="0" cy="0"/>
           </a:xfrm>
           <a:prstGeom prst="line">
             <a:avLst/>
@@ -28633,7 +28405,7 @@
               <a:srgbClr val="FFFFFF"/>
             </a:solidFill>
             <a:prstDash val="solid"/>
-            <a:tailEnd type="open"/>
+            <a:tailEnd type="none"/>
           </a:ln>
         </p:spPr>
       </p:sp>
@@ -28653,6 +28425,7 @@
         <a:solidFill>
           <a:srgbClr val="0D1B2A"/>
         </a:solidFill>
+        <a:effectLst/>
       </p:bgPr>
     </p:bg>
     <p:spTree>
@@ -28715,7 +28488,7 @@
           <a:bodyPr wrap="square" lIns="0" tIns="0" rIns="0" bIns="0" rtlCol="0" anchor="ctr"/>
           <a:lstStyle/>
           <a:p>
-            <a:pPr indent="0" marL="0">
+            <a:pPr marL="0" indent="0">
               <a:buNone/>
             </a:pPr>
             <a:r>
@@ -28754,7 +28527,7 @@
           <a:bodyPr wrap="square" lIns="0" tIns="0" rIns="0" bIns="0" rtlCol="0" anchor="ctr"/>
           <a:lstStyle/>
           <a:p>
-            <a:pPr indent="0" marL="0">
+            <a:pPr marL="0" indent="0">
               <a:buNone/>
             </a:pPr>
             <a:r>
@@ -28796,7 +28569,7 @@
             <a:prstDash val="solid"/>
           </a:ln>
           <a:effectLst>
-            <a:outerShdw sx="100000" sy="100000" kx="0" ky="0" algn="bl" rotWithShape="0" blurRad="101600" dist="38100" dir="8100000">
+            <a:outerShdw blurRad="101600" dist="38100" dir="8100000" algn="bl" rotWithShape="0">
               <a:srgbClr val="000000">
                 <a:alpha val="25000"/>
               </a:srgbClr>
@@ -29125,7 +28898,7 @@
           <a:bodyPr wrap="square" lIns="0" tIns="0" rIns="0" bIns="0" rtlCol="0" anchor="ctr"/>
           <a:lstStyle/>
           <a:p>
-            <a:pPr algn="ctr" indent="0" marL="0">
+            <a:pPr marL="0" indent="0" algn="ctr">
               <a:buNone/>
             </a:pPr>
             <a:r>
@@ -29142,7 +28915,7 @@
             <a:endParaRPr lang="en-US" sz="1100" dirty="0"/>
           </a:p>
           <a:p>
-            <a:pPr algn="ctr" indent="0" marL="0">
+            <a:pPr marL="0" indent="0" algn="ctr">
               <a:buNone/>
             </a:pPr>
             <a:r>
@@ -29184,7 +28957,7 @@
             <a:prstDash val="solid"/>
           </a:ln>
           <a:effectLst>
-            <a:outerShdw sx="100000" sy="100000" kx="0" ky="0" algn="bl" rotWithShape="0" blurRad="101600" dist="38100" dir="8100000">
+            <a:outerShdw blurRad="101600" dist="38100" dir="8100000" algn="bl" rotWithShape="0">
               <a:srgbClr val="000000">
                 <a:alpha val="25000"/>
               </a:srgbClr>
@@ -29213,7 +28986,7 @@
           <a:bodyPr wrap="square" lIns="0" tIns="0" rIns="0" bIns="0" rtlCol="0" anchor="ctr"/>
           <a:lstStyle/>
           <a:p>
-            <a:pPr algn="ctr" indent="0" marL="0">
+            <a:pPr marL="0" indent="0" algn="ctr">
               <a:buNone/>
             </a:pPr>
             <a:r>
@@ -29249,7 +29022,7 @@
           <a:bodyPr wrap="square" lIns="0" tIns="0" rIns="0" bIns="0" rtlCol="0" anchor="ctr"/>
           <a:lstStyle/>
           <a:p>
-            <a:pPr indent="0" marL="0">
+            <a:pPr marL="0" indent="0">
               <a:buNone/>
             </a:pPr>
             <a:r>
@@ -29288,7 +29061,7 @@
           <a:bodyPr wrap="square" lIns="0" tIns="0" rIns="0" bIns="0" rtlCol="0" anchor="ctr"/>
           <a:lstStyle/>
           <a:p>
-            <a:pPr indent="0" marL="0">
+            <a:pPr marL="0" indent="0">
               <a:buNone/>
             </a:pPr>
             <a:r>
@@ -29330,7 +29103,7 @@
             <a:prstDash val="solid"/>
           </a:ln>
           <a:effectLst>
-            <a:outerShdw sx="100000" sy="100000" kx="0" ky="0" algn="bl" rotWithShape="0" blurRad="101600" dist="38100" dir="8100000">
+            <a:outerShdw blurRad="101600" dist="38100" dir="8100000" algn="bl" rotWithShape="0">
               <a:srgbClr val="000000">
                 <a:alpha val="25000"/>
               </a:srgbClr>
@@ -29359,7 +29132,7 @@
           <a:bodyPr wrap="square" lIns="0" tIns="0" rIns="0" bIns="0" rtlCol="0" anchor="ctr"/>
           <a:lstStyle/>
           <a:p>
-            <a:pPr algn="ctr" indent="0" marL="0">
+            <a:pPr marL="0" indent="0" algn="ctr">
               <a:buNone/>
             </a:pPr>
             <a:r>
@@ -29395,7 +29168,7 @@
           <a:bodyPr wrap="square" lIns="0" tIns="0" rIns="0" bIns="0" rtlCol="0" anchor="ctr"/>
           <a:lstStyle/>
           <a:p>
-            <a:pPr indent="0" marL="0">
+            <a:pPr marL="0" indent="0">
               <a:buNone/>
             </a:pPr>
             <a:r>
@@ -29434,7 +29207,7 @@
           <a:bodyPr wrap="square" lIns="0" tIns="0" rIns="0" bIns="0" rtlCol="0" anchor="ctr"/>
           <a:lstStyle/>
           <a:p>
-            <a:pPr indent="0" marL="0">
+            <a:pPr marL="0" indent="0">
               <a:buNone/>
             </a:pPr>
             <a:r>
@@ -29476,7 +29249,7 @@
             <a:prstDash val="solid"/>
           </a:ln>
           <a:effectLst>
-            <a:outerShdw sx="100000" sy="100000" kx="0" ky="0" algn="bl" rotWithShape="0" blurRad="101600" dist="38100" dir="8100000">
+            <a:outerShdw blurRad="101600" dist="38100" dir="8100000" algn="bl" rotWithShape="0">
               <a:srgbClr val="000000">
                 <a:alpha val="25000"/>
               </a:srgbClr>
@@ -29505,7 +29278,7 @@
           <a:bodyPr wrap="square" lIns="0" tIns="0" rIns="0" bIns="0" rtlCol="0" anchor="ctr"/>
           <a:lstStyle/>
           <a:p>
-            <a:pPr algn="ctr" indent="0" marL="0">
+            <a:pPr marL="0" indent="0" algn="ctr">
               <a:buNone/>
             </a:pPr>
             <a:r>
@@ -29541,7 +29314,7 @@
           <a:bodyPr wrap="square" lIns="0" tIns="0" rIns="0" bIns="0" rtlCol="0" anchor="ctr"/>
           <a:lstStyle/>
           <a:p>
-            <a:pPr indent="0" marL="0">
+            <a:pPr marL="0" indent="0">
               <a:buNone/>
             </a:pPr>
             <a:r>
@@ -29580,7 +29353,7 @@
           <a:bodyPr wrap="square" lIns="0" tIns="0" rIns="0" bIns="0" rtlCol="0" anchor="ctr"/>
           <a:lstStyle/>
           <a:p>
-            <a:pPr indent="0" marL="0">
+            <a:pPr marL="0" indent="0">
               <a:buNone/>
             </a:pPr>
             <a:r>
@@ -29622,7 +29395,7 @@
             <a:prstDash val="solid"/>
           </a:ln>
           <a:effectLst>
-            <a:outerShdw sx="100000" sy="100000" kx="0" ky="0" algn="bl" rotWithShape="0" blurRad="101600" dist="38100" dir="8100000">
+            <a:outerShdw blurRad="101600" dist="38100" dir="8100000" algn="bl" rotWithShape="0">
               <a:srgbClr val="000000">
                 <a:alpha val="25000"/>
               </a:srgbClr>
@@ -29651,7 +29424,7 @@
           <a:bodyPr wrap="square" lIns="0" tIns="0" rIns="0" bIns="0" rtlCol="0" anchor="ctr"/>
           <a:lstStyle/>
           <a:p>
-            <a:pPr algn="ctr" indent="0" marL="0">
+            <a:pPr marL="0" indent="0" algn="ctr">
               <a:buNone/>
             </a:pPr>
             <a:r>
@@ -29687,7 +29460,7 @@
           <a:bodyPr wrap="square" lIns="0" tIns="0" rIns="0" bIns="0" rtlCol="0" anchor="ctr"/>
           <a:lstStyle/>
           <a:p>
-            <a:pPr indent="0" marL="0">
+            <a:pPr marL="0" indent="0">
               <a:buNone/>
             </a:pPr>
             <a:r>
@@ -29726,7 +29499,7 @@
           <a:bodyPr wrap="square" lIns="0" tIns="0" rIns="0" bIns="0" rtlCol="0" anchor="ctr"/>
           <a:lstStyle/>
           <a:p>
-            <a:pPr indent="0" marL="0">
+            <a:pPr marL="0" indent="0">
               <a:buNone/>
             </a:pPr>
             <a:r>
@@ -29768,7 +29541,7 @@
             <a:prstDash val="solid"/>
           </a:ln>
           <a:effectLst>
-            <a:outerShdw sx="100000" sy="100000" kx="0" ky="0" algn="bl" rotWithShape="0" blurRad="101600" dist="38100" dir="8100000">
+            <a:outerShdw blurRad="101600" dist="38100" dir="8100000" algn="bl" rotWithShape="0">
               <a:srgbClr val="000000">
                 <a:alpha val="25000"/>
               </a:srgbClr>
@@ -29822,7 +29595,7 @@
           <a:bodyPr wrap="square" lIns="0" tIns="0" rIns="0" bIns="0" rtlCol="0" anchor="ctr"/>
           <a:lstStyle/>
           <a:p>
-            <a:pPr indent="0" marL="0">
+            <a:pPr marL="0" indent="0">
               <a:buNone/>
             </a:pPr>
             <a:r>
@@ -29856,6 +29629,7 @@
         <a:solidFill>
           <a:srgbClr val="0D1B2A"/>
         </a:solidFill>
+        <a:effectLst/>
       </p:bgPr>
     </p:bg>
     <p:spTree>
@@ -29918,7 +29692,7 @@
           <a:bodyPr wrap="square" lIns="0" tIns="0" rIns="0" bIns="0" rtlCol="0" anchor="ctr"/>
           <a:lstStyle/>
           <a:p>
-            <a:pPr indent="0" marL="0">
+            <a:pPr marL="0" indent="0">
               <a:buNone/>
             </a:pPr>
             <a:r>
@@ -29957,7 +29731,7 @@
           <a:bodyPr wrap="square" lIns="0" tIns="0" rIns="0" bIns="0" rtlCol="0" anchor="ctr"/>
           <a:lstStyle/>
           <a:p>
-            <a:pPr indent="0" marL="0">
+            <a:pPr marL="0" indent="0">
               <a:buNone/>
             </a:pPr>
             <a:r>
@@ -29999,7 +29773,7 @@
             <a:prstDash val="solid"/>
           </a:ln>
           <a:effectLst>
-            <a:outerShdw sx="100000" sy="100000" kx="0" ky="0" algn="bl" rotWithShape="0" blurRad="101600" dist="38100" dir="8100000">
+            <a:outerShdw blurRad="101600" dist="38100" dir="8100000" algn="bl" rotWithShape="0">
               <a:srgbClr val="000000">
                 <a:alpha val="25000"/>
               </a:srgbClr>
@@ -30053,7 +29827,7 @@
           <a:bodyPr wrap="square" lIns="0" tIns="0" rIns="0" bIns="0" rtlCol="0" anchor="ctr"/>
           <a:lstStyle/>
           <a:p>
-            <a:pPr algn="ctr" indent="0" marL="0">
+            <a:pPr marL="0" indent="0" algn="ctr">
               <a:buNone/>
             </a:pPr>
             <a:r>
@@ -30117,7 +29891,7 @@
           <a:bodyPr wrap="square" lIns="0" tIns="0" rIns="0" bIns="0" rtlCol="0" anchor="ctr"/>
           <a:lstStyle/>
           <a:p>
-            <a:pPr indent="0" marL="0">
+            <a:pPr marL="0" indent="0">
               <a:buNone/>
             </a:pPr>
             <a:r>
@@ -30181,7 +29955,7 @@
           <a:bodyPr wrap="square" lIns="0" tIns="0" rIns="0" bIns="0" rtlCol="0" anchor="ctr"/>
           <a:lstStyle/>
           <a:p>
-            <a:pPr indent="0" marL="0">
+            <a:pPr marL="0" indent="0">
               <a:buNone/>
             </a:pPr>
             <a:r>
@@ -30245,7 +30019,7 @@
           <a:bodyPr wrap="square" lIns="0" tIns="0" rIns="0" bIns="0" rtlCol="0" anchor="ctr"/>
           <a:lstStyle/>
           <a:p>
-            <a:pPr indent="0" marL="0">
+            <a:pPr marL="0" indent="0">
               <a:buNone/>
             </a:pPr>
             <a:r>
@@ -30309,7 +30083,7 @@
           <a:bodyPr wrap="square" lIns="0" tIns="0" rIns="0" bIns="0" rtlCol="0" anchor="ctr"/>
           <a:lstStyle/>
           <a:p>
-            <a:pPr indent="0" marL="0">
+            <a:pPr marL="0" indent="0">
               <a:buNone/>
             </a:pPr>
             <a:r>
@@ -30373,7 +30147,7 @@
           <a:bodyPr wrap="square" lIns="0" tIns="0" rIns="0" bIns="0" rtlCol="0" anchor="ctr"/>
           <a:lstStyle/>
           <a:p>
-            <a:pPr indent="0" marL="0">
+            <a:pPr marL="0" indent="0">
               <a:buNone/>
             </a:pPr>
             <a:r>
@@ -30437,7 +30211,7 @@
           <a:bodyPr wrap="square" lIns="0" tIns="0" rIns="0" bIns="0" rtlCol="0" anchor="ctr"/>
           <a:lstStyle/>
           <a:p>
-            <a:pPr indent="0" marL="0">
+            <a:pPr marL="0" indent="0">
               <a:buNone/>
             </a:pPr>
             <a:r>
@@ -30479,7 +30253,7 @@
             <a:prstDash val="solid"/>
           </a:ln>
           <a:effectLst>
-            <a:outerShdw sx="100000" sy="100000" kx="0" ky="0" algn="bl" rotWithShape="0" blurRad="101600" dist="38100" dir="8100000">
+            <a:outerShdw blurRad="101600" dist="38100" dir="8100000" algn="bl" rotWithShape="0">
               <a:srgbClr val="000000">
                 <a:alpha val="25000"/>
               </a:srgbClr>
@@ -30508,7 +30282,7 @@
           <a:bodyPr wrap="square" lIns="0" tIns="0" rIns="0" bIns="0" rtlCol="0" anchor="ctr"/>
           <a:lstStyle/>
           <a:p>
-            <a:pPr indent="0" marL="0">
+            <a:pPr marL="0" indent="0">
               <a:buNone/>
             </a:pPr>
             <a:r>
@@ -30547,7 +30321,7 @@
           <a:bodyPr wrap="square" lIns="0" tIns="0" rIns="0" bIns="0" rtlCol="0" anchor="ctr"/>
           <a:lstStyle/>
           <a:p>
-            <a:pPr indent="0" marL="0">
+            <a:pPr marL="0" indent="0">
               <a:buNone/>
             </a:pPr>
             <a:r>
@@ -30586,7 +30360,7 @@
           <a:bodyPr wrap="square" lIns="0" tIns="0" rIns="0" bIns="0" rtlCol="0" anchor="ctr"/>
           <a:lstStyle/>
           <a:p>
-            <a:pPr indent="0" marL="0">
+            <a:pPr marL="0" indent="0">
               <a:buNone/>
             </a:pPr>
             <a:r>
@@ -30625,7 +30399,7 @@
           <a:bodyPr wrap="square" lIns="0" tIns="0" rIns="0" bIns="0" rtlCol="0" anchor="ctr"/>
           <a:lstStyle/>
           <a:p>
-            <a:pPr indent="0" marL="0">
+            <a:pPr marL="0" indent="0">
               <a:buNone/>
             </a:pPr>
             <a:r>
@@ -30667,7 +30441,7 @@
             <a:prstDash val="solid"/>
           </a:ln>
           <a:effectLst>
-            <a:outerShdw sx="100000" sy="100000" kx="0" ky="0" algn="bl" rotWithShape="0" blurRad="101600" dist="38100" dir="8100000">
+            <a:outerShdw blurRad="101600" dist="38100" dir="8100000" algn="bl" rotWithShape="0">
               <a:srgbClr val="000000">
                 <a:alpha val="25000"/>
               </a:srgbClr>
@@ -30696,7 +30470,7 @@
           <a:bodyPr wrap="square" lIns="0" tIns="0" rIns="0" bIns="0" rtlCol="0" anchor="ctr"/>
           <a:lstStyle/>
           <a:p>
-            <a:pPr indent="0" marL="0">
+            <a:pPr marL="0" indent="0">
               <a:buNone/>
             </a:pPr>
             <a:r>
@@ -30735,7 +30509,7 @@
           <a:bodyPr wrap="square" lIns="0" tIns="0" rIns="0" bIns="0" rtlCol="0" anchor="ctr"/>
           <a:lstStyle/>
           <a:p>
-            <a:pPr indent="0" marL="0">
+            <a:pPr marL="0" indent="0">
               <a:buNone/>
             </a:pPr>
             <a:r>
@@ -30774,7 +30548,7 @@
           <a:bodyPr wrap="square" lIns="0" tIns="0" rIns="0" bIns="0" rtlCol="0" anchor="ctr"/>
           <a:lstStyle/>
           <a:p>
-            <a:pPr indent="0" marL="0">
+            <a:pPr marL="0" indent="0">
               <a:buNone/>
             </a:pPr>
             <a:r>
@@ -30813,7 +30587,7 @@
           <a:bodyPr wrap="square" lIns="0" tIns="0" rIns="0" bIns="0" rtlCol="0" anchor="ctr"/>
           <a:lstStyle/>
           <a:p>
-            <a:pPr indent="0" marL="0">
+            <a:pPr marL="0" indent="0">
               <a:buNone/>
             </a:pPr>
             <a:r>
@@ -30855,7 +30629,7 @@
             <a:prstDash val="solid"/>
           </a:ln>
           <a:effectLst>
-            <a:outerShdw sx="100000" sy="100000" kx="0" ky="0" algn="bl" rotWithShape="0" blurRad="101600" dist="38100" dir="8100000">
+            <a:outerShdw blurRad="101600" dist="38100" dir="8100000" algn="bl" rotWithShape="0">
               <a:srgbClr val="000000">
                 <a:alpha val="25000"/>
               </a:srgbClr>
@@ -30884,7 +30658,7 @@
           <a:bodyPr wrap="square" lIns="0" tIns="0" rIns="0" bIns="0" rtlCol="0" anchor="ctr"/>
           <a:lstStyle/>
           <a:p>
-            <a:pPr indent="0" marL="0">
+            <a:pPr marL="0" indent="0">
               <a:buNone/>
             </a:pPr>
             <a:r>
@@ -31203,4 +30977,319 @@
     </a:ext>
   </a:extLst>
 </a:theme>
+</file>
+
+<file path=ppt/theme/theme2.xml><?xml version="1.0" encoding="utf-8"?>
+<a:theme xmlns:a="http://schemas.openxmlformats.org/drawingml/2006/main" name="Office Theme">
+  <a:themeElements>
+    <a:clrScheme name="Office">
+      <a:dk1>
+        <a:sysClr val="windowText" lastClr="000000"/>
+      </a:dk1>
+      <a:lt1>
+        <a:sysClr val="window" lastClr="FFFFFF"/>
+      </a:lt1>
+      <a:dk2>
+        <a:srgbClr val="44546A"/>
+      </a:dk2>
+      <a:lt2>
+        <a:srgbClr val="E7E6E6"/>
+      </a:lt2>
+      <a:accent1>
+        <a:srgbClr val="4472C4"/>
+      </a:accent1>
+      <a:accent2>
+        <a:srgbClr val="ED7D31"/>
+      </a:accent2>
+      <a:accent3>
+        <a:srgbClr val="A5A5A5"/>
+      </a:accent3>
+      <a:accent4>
+        <a:srgbClr val="FFC000"/>
+      </a:accent4>
+      <a:accent5>
+        <a:srgbClr val="5B9BD5"/>
+      </a:accent5>
+      <a:accent6>
+        <a:srgbClr val="70AD47"/>
+      </a:accent6>
+      <a:hlink>
+        <a:srgbClr val="0563C1"/>
+      </a:hlink>
+      <a:folHlink>
+        <a:srgbClr val="954F72"/>
+      </a:folHlink>
+    </a:clrScheme>
+    <a:fontScheme name="Office">
+      <a:majorFont>
+        <a:latin typeface="Calibri Light" panose="020F0302020204030204"/>
+        <a:ea typeface=""/>
+        <a:cs typeface=""/>
+        <a:font script="Jpan" typeface="游ゴシック Light"/>
+        <a:font script="Hang" typeface="맑은 고딕"/>
+        <a:font script="Hans" typeface="等线 Light"/>
+        <a:font script="Hant" typeface="新細明體"/>
+        <a:font script="Arab" typeface="Times New Roman"/>
+        <a:font script="Hebr" typeface="Times New Roman"/>
+        <a:font script="Thai" typeface="Angsana New"/>
+        <a:font script="Ethi" typeface="Nyala"/>
+        <a:font script="Beng" typeface="Vrinda"/>
+        <a:font script="Gujr" typeface="Shruti"/>
+        <a:font script="Khmr" typeface="MoolBoran"/>
+        <a:font script="Knda" typeface="Tunga"/>
+        <a:font script="Guru" typeface="Raavi"/>
+        <a:font script="Cans" typeface="Euphemia"/>
+        <a:font script="Cher" typeface="Plantagenet Cherokee"/>
+        <a:font script="Yiii" typeface="Microsoft Yi Baiti"/>
+        <a:font script="Tibt" typeface="Microsoft Himalaya"/>
+        <a:font script="Thaa" typeface="MV Boli"/>
+        <a:font script="Deva" typeface="Mangal"/>
+        <a:font script="Telu" typeface="Gautami"/>
+        <a:font script="Taml" typeface="Latha"/>
+        <a:font script="Syrc" typeface="Estrangelo Edessa"/>
+        <a:font script="Orya" typeface="Kalinga"/>
+        <a:font script="Mlym" typeface="Kartika"/>
+        <a:font script="Laoo" typeface="DokChampa"/>
+        <a:font script="Sinh" typeface="Iskoola Pota"/>
+        <a:font script="Mong" typeface="Mongolian Baiti"/>
+        <a:font script="Viet" typeface="Times New Roman"/>
+        <a:font script="Uigh" typeface="Microsoft Uighur"/>
+        <a:font script="Geor" typeface="Sylfaen"/>
+        <a:font script="Armn" typeface="Arial"/>
+        <a:font script="Bugi" typeface="Leelawadee UI"/>
+        <a:font script="Bopo" typeface="Microsoft JhengHei"/>
+        <a:font script="Java" typeface="Javanese Text"/>
+        <a:font script="Lisu" typeface="Segoe UI"/>
+        <a:font script="Mymr" typeface="Myanmar Text"/>
+        <a:font script="Nkoo" typeface="Ebrima"/>
+        <a:font script="Olck" typeface="Nirmala UI"/>
+        <a:font script="Osma" typeface="Ebrima"/>
+        <a:font script="Phag" typeface="Phagspa"/>
+        <a:font script="Syrn" typeface="Estrangelo Edessa"/>
+        <a:font script="Syrj" typeface="Estrangelo Edessa"/>
+        <a:font script="Syre" typeface="Estrangelo Edessa"/>
+        <a:font script="Sora" typeface="Nirmala UI"/>
+        <a:font script="Tale" typeface="Microsoft Tai Le"/>
+        <a:font script="Talu" typeface="Microsoft New Tai Lue"/>
+        <a:font script="Tfng" typeface="Ebrima"/>
+      </a:majorFont>
+      <a:minorFont>
+        <a:latin typeface="Calibri" panose="020F0502020204030204"/>
+        <a:ea typeface=""/>
+        <a:cs typeface=""/>
+        <a:font script="Jpan" typeface="游ゴシック"/>
+        <a:font script="Hang" typeface="맑은 고딕"/>
+        <a:font script="Hans" typeface="等线"/>
+        <a:font script="Hant" typeface="新細明體"/>
+        <a:font script="Arab" typeface="Arial"/>
+        <a:font script="Hebr" typeface="Arial"/>
+        <a:font script="Thai" typeface="Cordia New"/>
+        <a:font script="Ethi" typeface="Nyala"/>
+        <a:font script="Beng" typeface="Vrinda"/>
+        <a:font script="Gujr" typeface="Shruti"/>
+        <a:font script="Khmr" typeface="DaunPenh"/>
+        <a:font script="Knda" typeface="Tunga"/>
+        <a:font script="Guru" typeface="Raavi"/>
+        <a:font script="Cans" typeface="Euphemia"/>
+        <a:font script="Cher" typeface="Plantagenet Cherokee"/>
+        <a:font script="Yiii" typeface="Microsoft Yi Baiti"/>
+        <a:font script="Tibt" typeface="Microsoft Himalaya"/>
+        <a:font script="Thaa" typeface="MV Boli"/>
+        <a:font script="Deva" typeface="Mangal"/>
+        <a:font script="Telu" typeface="Gautami"/>
+        <a:font script="Taml" typeface="Latha"/>
+        <a:font script="Syrc" typeface="Estrangelo Edessa"/>
+        <a:font script="Orya" typeface="Kalinga"/>
+        <a:font script="Mlym" typeface="Kartika"/>
+        <a:font script="Laoo" typeface="DokChampa"/>
+        <a:font script="Sinh" typeface="Iskoola Pota"/>
+        <a:font script="Mong" typeface="Mongolian Baiti"/>
+        <a:font script="Viet" typeface="Arial"/>
+        <a:font script="Uigh" typeface="Microsoft Uighur"/>
+        <a:font script="Geor" typeface="Sylfaen"/>
+        <a:font script="Armn" typeface="Arial"/>
+        <a:font script="Bugi" typeface="Leelawadee UI"/>
+        <a:font script="Bopo" typeface="Microsoft JhengHei"/>
+        <a:font script="Java" typeface="Javanese Text"/>
+        <a:font script="Lisu" typeface="Segoe UI"/>
+        <a:font script="Mymr" typeface="Myanmar Text"/>
+        <a:font script="Nkoo" typeface="Ebrima"/>
+        <a:font script="Olck" typeface="Nirmala UI"/>
+        <a:font script="Osma" typeface="Ebrima"/>
+        <a:font script="Phag" typeface="Phagspa"/>
+        <a:font script="Syrn" typeface="Estrangelo Edessa"/>
+        <a:font script="Syrj" typeface="Estrangelo Edessa"/>
+        <a:font script="Syre" typeface="Estrangelo Edessa"/>
+        <a:font script="Sora" typeface="Nirmala UI"/>
+        <a:font script="Tale" typeface="Microsoft Tai Le"/>
+        <a:font script="Talu" typeface="Microsoft New Tai Lue"/>
+        <a:font script="Tfng" typeface="Ebrima"/>
+      </a:minorFont>
+    </a:fontScheme>
+    <a:fmtScheme name="Office">
+      <a:fillStyleLst>
+        <a:solidFill>
+          <a:schemeClr val="phClr"/>
+        </a:solidFill>
+        <a:gradFill rotWithShape="1">
+          <a:gsLst>
+            <a:gs pos="0">
+              <a:schemeClr val="phClr">
+                <a:lumMod val="110000"/>
+                <a:satMod val="105000"/>
+                <a:tint val="67000"/>
+              </a:schemeClr>
+            </a:gs>
+            <a:gs pos="50000">
+              <a:schemeClr val="phClr">
+                <a:lumMod val="105000"/>
+                <a:satMod val="103000"/>
+                <a:tint val="73000"/>
+              </a:schemeClr>
+            </a:gs>
+            <a:gs pos="100000">
+              <a:schemeClr val="phClr">
+                <a:lumMod val="105000"/>
+                <a:satMod val="109000"/>
+                <a:tint val="81000"/>
+              </a:schemeClr>
+            </a:gs>
+          </a:gsLst>
+          <a:lin ang="5400000" scaled="0"/>
+        </a:gradFill>
+        <a:gradFill rotWithShape="1">
+          <a:gsLst>
+            <a:gs pos="0">
+              <a:schemeClr val="phClr">
+                <a:satMod val="103000"/>
+                <a:lumMod val="102000"/>
+                <a:tint val="94000"/>
+              </a:schemeClr>
+            </a:gs>
+            <a:gs pos="50000">
+              <a:schemeClr val="phClr">
+                <a:satMod val="110000"/>
+                <a:lumMod val="100000"/>
+                <a:shade val="100000"/>
+              </a:schemeClr>
+            </a:gs>
+            <a:gs pos="100000">
+              <a:schemeClr val="phClr">
+                <a:lumMod val="99000"/>
+                <a:satMod val="120000"/>
+                <a:shade val="78000"/>
+              </a:schemeClr>
+            </a:gs>
+          </a:gsLst>
+          <a:lin ang="5400000" scaled="0"/>
+        </a:gradFill>
+      </a:fillStyleLst>
+      <a:lnStyleLst>
+        <a:ln w="6350" cap="flat" cmpd="sng" algn="ctr">
+          <a:solidFill>
+            <a:schemeClr val="phClr"/>
+          </a:solidFill>
+          <a:prstDash val="solid"/>
+          <a:miter lim="800000"/>
+        </a:ln>
+        <a:ln w="12700" cap="flat" cmpd="sng" algn="ctr">
+          <a:solidFill>
+            <a:schemeClr val="phClr"/>
+          </a:solidFill>
+          <a:prstDash val="solid"/>
+          <a:miter lim="800000"/>
+        </a:ln>
+        <a:ln w="19050" cap="flat" cmpd="sng" algn="ctr">
+          <a:solidFill>
+            <a:schemeClr val="phClr"/>
+          </a:solidFill>
+          <a:prstDash val="solid"/>
+          <a:miter lim="800000"/>
+        </a:ln>
+      </a:lnStyleLst>
+      <a:effectStyleLst>
+        <a:effectStyle>
+          <a:effectLst/>
+        </a:effectStyle>
+        <a:effectStyle>
+          <a:effectLst/>
+        </a:effectStyle>
+        <a:effectStyle>
+          <a:effectLst>
+            <a:outerShdw blurRad="57150" dist="19050" dir="5400000" algn="ctr" rotWithShape="0">
+              <a:srgbClr val="000000">
+                <a:alpha val="63000"/>
+              </a:srgbClr>
+            </a:outerShdw>
+          </a:effectLst>
+        </a:effectStyle>
+      </a:effectStyleLst>
+      <a:bgFillStyleLst>
+        <a:solidFill>
+          <a:schemeClr val="phClr"/>
+        </a:solidFill>
+        <a:solidFill>
+          <a:schemeClr val="phClr">
+            <a:tint val="95000"/>
+            <a:satMod val="170000"/>
+          </a:schemeClr>
+        </a:solidFill>
+        <a:gradFill rotWithShape="1">
+          <a:gsLst>
+            <a:gs pos="0">
+              <a:schemeClr val="phClr">
+                <a:tint val="93000"/>
+                <a:satMod val="150000"/>
+                <a:shade val="98000"/>
+                <a:lumMod val="102000"/>
+              </a:schemeClr>
+            </a:gs>
+            <a:gs pos="50000">
+              <a:schemeClr val="phClr">
+                <a:tint val="98000"/>
+                <a:satMod val="130000"/>
+                <a:shade val="90000"/>
+                <a:lumMod val="103000"/>
+              </a:schemeClr>
+            </a:gs>
+            <a:gs pos="100000">
+              <a:schemeClr val="phClr">
+                <a:shade val="63000"/>
+                <a:satMod val="120000"/>
+              </a:schemeClr>
+            </a:gs>
+          </a:gsLst>
+          <a:lin ang="5400000" scaled="0"/>
+        </a:gradFill>
+      </a:bgFillStyleLst>
+    </a:fmtScheme>
+  </a:themeElements>
+  <a:objectDefaults/>
+  <a:extraClrSchemeLst/>
+  <a:extLst>
+    <a:ext uri="{05A4C25C-085E-4340-85A3-A5531E510DB2}">
+      <thm15:themeFamily xmlns:thm15="http://schemas.microsoft.com/office/thememl/2012/main" name="Office Theme" id="{62F939B6-93AF-4DB8-9C6B-D6C7DFDC589F}" vid="{4A3C46E8-61CC-4603-A589-7422A47A8E4A}"/>
+    </a:ext>
+  </a:extLst>
+</a:theme>
+</file>
+
+<file path=ppt/webextensions/taskpanes.xml><?xml version="1.0" encoding="utf-8"?>
+<wetp:taskpanes xmlns:wetp="http://schemas.microsoft.com/office/webextensions/taskpanes/2010/11">
+  <wetp:taskpane dockstate="right" visibility="0" width="450" row="7">
+    <wetp:webextensionref xmlns:r="http://schemas.openxmlformats.org/officeDocument/2006/relationships" r:id="rId1"/>
+  </wetp:taskpane>
+</wetp:taskpanes>
+</file>
+
+<file path=ppt/webextensions/webextension1.xml><?xml version="1.0" encoding="utf-8"?>
+<we:webextension xmlns:we="http://schemas.microsoft.com/office/webextensions/webextension/2010/11" id="{A149ECD4-711A-4A8C-A08C-A8BB6B0360A8}">
+  <we:reference id="wa200005566" version="3.0.0.2" store="en-US" storeType="OMEX"/>
+  <we:alternateReferences>
+    <we:reference id="wa200005566" version="3.0.0.2" store="wa200005566" storeType="OMEX"/>
+  </we:alternateReferences>
+  <we:properties/>
+  <we:bindings/>
+  <we:snapshot xmlns:r="http://schemas.openxmlformats.org/officeDocument/2006/relationships"/>
+</we:webextension>
 </file>